--- a/praesentation/green-it-hans.pptx
+++ b/praesentation/green-it-hans.pptx
@@ -507,7 +507,7 @@
           <a:p>
             <a:r>
               <a:rPr lang="en-US" dirty="0"/>
-              <a:t>Ca. 15 sek. "Min del er opgave 3 om Service Value Chain, Incident og Problem Management i opgave 4 og de fire dimensioner i opgave 5."</a:t>
+              <a:t>Jeg har opgave 3, 4 og 5. Først Service Value Chain. Så incident og problem management. Og til sidst de fire dimensioner.</a:t>
             </a:r>
             <a:endParaRPr lang="en-US" dirty="0"/>
           </a:p>
@@ -595,7 +595,8 @@
           <a:p>
             <a:r>
               <a:rPr lang="en-US" dirty="0"/>
-              <a:t>Ca. 45 sek. Seks aktiviteter, der omdanner kundens behov til værdi. Ikke afdelinger: engage laver både salg og de nye kontorer. Forslag: hver aktivitet får en ansvarlig, så intet falder mellem bygningen i byen, fabrikken og kontorerne i Jylland.</a:t>
+              <a:t>Så hvad er Service Value Chain? Det er de seks aktiviteter, der omdanner efterspørgsel og muligheder til værdi. Plan. Improve. Engage. Design og transition. Obtain og build. Deliver og support.
+ Aktiviteterne er ikke afdelinger. Engage sker fx både i salg og på de nye kontorer. Vi foreslår, at hver aktivitet får én ansvarlig. Så ryger der ikke opgaver ned mellem byen, fabrikken og Jylland.</a:t>
             </a:r>
             <a:endParaRPr lang="en-US" dirty="0"/>
           </a:p>
@@ -683,7 +684,9 @@
           <a:p>
             <a:r>
               <a:rPr lang="en-US" dirty="0"/>
-              <a:t>Ca. 45 sek. Svineproducenten: sælgeren afklarer (engage), R&amp;D tilpasser (design), fabrikken laver sensorer (build), test (design), værkstedet installerer (deliver), opfølgning (engage), næste gang hurtigere (improve). Engage og design to gange, plan slet ikke. En sensorfejl kan gå direkte fra engage til deliver og support.</a:t>
+              <a:t>Eksemplet i opgaven er en svineproducent, der vil have staldovervågning. Sælgeren finder ud af, hvad landmanden skal bruge. Det er engage. R&amp;D tilpasser løsningen. Det er design og transition. Fabrikken laver sensorerne. Det er obtain og build. Løsningen testes og overdrages til drift. Det er design og transition igen. Værkstedet installerer. Det er deliver og support. Efter en måned følger sælgeren op. Det er engage igen. Det, vi lærer, gør det hurtigere næste gang. Det er improve.
+ Pointen er, at det ikke er et samlebånd. Man bruger aktiviteterne efter behov. Engage og design bruges to gange. Plan bruges slet ikke. En sensorfejl kan gå direkte fra engage til deliver og support.
+ Og hver aktivitet bidrager. Engage er der, hvor vi skaber værdien sammen med landmanden. Design og transition tester, før noget kommer i drift. Det beskytter den stabile drift. Deliver og support er der, hvor kunden mærker værdien hver dag. Og improve gør fejl til forbedringer.</a:t>
             </a:r>
             <a:endParaRPr lang="en-US" dirty="0"/>
           </a:p>
@@ -771,7 +774,9 @@
           <a:p>
             <a:r>
               <a:rPr lang="en-US" dirty="0"/>
-              <a:t>Ca. 1 min. Uplanlagt afbrydelse eller forringelse. Få servicen op igen hurtigst muligt, ikke finde årsagen. Registrer, prioriter, diagnosticer, eskaler, løs. Prioriteten styrer SLA-tiderne. L1 servicedesk, L2 specialister, L3 R&amp;D. Eksempel: kvægstald om natten, prioritet 1, gatewayens mobilforbindelse, reservegateway, workaround manuelt tilsyn. Mange stalde: major incident med én leder.</a:t>
+              <a:t>Så kommer vi til opgave 4. Incident management. En incident er en uplanlagt afbrydelse eller forringelse af en service. Altså når noget går ned eller virker dårligere. Formålet er at få det op at køre igen. Hurtigst muligt. Incident management finder ikke årsagen. Det gør problem management.
+ Processen har fem trin. Registrer. Prioriter. Diagnosticer. Eskaler. Og løs og luk. Prioriteten sættes ud fra, hvor slemt det er, og hvor meget det haster. Den bestemmer, hvor hurtigt det skal løses. Det står i SLA'en. Eskalering betyder, at sagen går videre. L1 er servicedesken. L2 er specialisterne. L3 er udviklerne i R&amp;D. Landmanden ringer kun ét sted hen. Til servicedesken. Og med et fælles ticketsystem kan alle tre steder se de samme sager.
+ Eksemplet er en kvægstald en sommernat. Sensorerne holder op med at sende data. Det er prioritet 1. L2 finder fejlen i gatewayen. Altså boksen, der sender data videre. En tekniker kører ud med en ny. Imens tjekker landmanden selv dyrene. Det er workarounden. En midlertidig løsning. Hvis det rammer mange stalde, er det en major incident. Så får den sin egen leder.</a:t>
             </a:r>
             <a:endParaRPr lang="en-US" dirty="0"/>
           </a:p>
@@ -859,7 +864,10 @@
           <a:p>
             <a:r>
               <a:rPr lang="en-US" dirty="0"/>
-              <a:t>Ca. 1 min. Et problem er årsagen til en eller flere incidents. Tre faser: identification (mønster i gentagne incidents), control (root cause, workaround, known error), error control (permanent løsning via Change Control). Eksempel: firmware, 15 kunder, strømsparetilstand. Sammenhæng: incident genopretter, problem fjerner årsagen. Incident kan lukkes, selv om problemet er åbent. Known errors gør servicedesken hurtigere.</a:t>
+              <a:t>Så har vi problem management. Et problem er årsagen, eller den mulige årsag, til en eller flere incidents. Problem management finder årsagen. Så det ikke sker igen.
+ Der er tre faser. Først problem identification. Vi finder problemer i incidents, der kommer igen. Efter en major incident. Eller før, fx fra R&amp;D's tests. Så problem control. Vi finder root cause, altså grundårsagen. Og vi laver en workaround. Når vi kender årsagen, men ikke har løst den, hedder det en known error. Til sidst error control. Den rigtige løsning skal igennem change control, før den kommer ud.
+ Eksemplet er en firmwareopdatering. Bagefter mister sensorerne på dyr på friland forbindelsen om natten. Det sker hos 15 kunder. Servicedesken genstarter gatewayen. Men de ser mønstret og opretter et problem. R&amp;D finder årsagen. Firmwaren går i strømsparetilstand og vågner ikke ved svagt signal. Workarounden er at slå strømspar fra. Fejlen bliver en known error, så alle bruger samme workaround. Og den rettede firmware kommer ud via change control.
+ Så hvordan hænger de sammen? Incident management får servicen op igen. Problem management fjerner årsagen. En incident kan lukkes, selvom problemet stadig er åbent. Og når servicedesken kender en known error, løser de den næste incident hurtigere.</a:t>
             </a:r>
             <a:endParaRPr lang="en-US" dirty="0"/>
           </a:p>
@@ -947,7 +955,12 @@
           <a:p>
             <a:r>
               <a:rPr lang="en-US" dirty="0"/>
-              <a:t>Ca. 1 min. Mangler én, fejler servicen. Udenom: GDPR, NIS2, bæredygtighed. Mennesker: dem og os mellem byen og fabrikken, klare roller, meld fejl tidligt. Information og teknologi: sensordata, landmanden ejer data, GDPR, skalering. Leverandører: hosting, sensorer, tele, deres nedetid lægges oven i, failover. Værdistrømme og processer: overgangene mellem bygningerne er der, sagerne venter, faste processer. Afslut: "Det var min del. Så giver jeg ordet videre til Patrick."</a:t>
+              <a:t>Så kommer vi til de fire dimensioner. En service skal ses fra fire sider. Hvis man glemmer én, går det galt. Og så er der ting udefra, som påvirker dem alle. Det hedder PESTLE. Fx GDPR, NIS2 og krav om bæredygtighed.
+ Først organisationer og mennesker. R&amp;D sidder i byen. Salg sidder på fabrikken. Så kan der nemt komme en os og dem-kultur. Green-IT skal have klare roller. Og man skal turde sige det, når noget går galt. Gerne tidligt.
+ Så information og teknologi. Sensordata er kernen. Landmanden ejer sine data, og persondata er omfattet af GDPR. Og teknologien skal kunne vokse med de nye kontorer.
+ Så partnere og leverandører. Det er fx hosting, sensorleverandører og teleselskaber. Når de er nede, er Green-IT også nede. Så de vigtige dele skal have failover. Altså en backup, der tager over.
+ Og til sidst værdistrømme og processer. Værdistrømmen går på tværs af fabrikken og byen. Sagerne ligger og venter, når de skal fra det ene sted til det andet. Faste processer gør, at alle steder arbejder på samme måde.
+Og det var så min del. Og så vil jeg give ordet videre til Patrick.</a:t>
             </a:r>
             <a:endParaRPr lang="en-US" dirty="0"/>
           </a:p>
@@ -1368,7 +1381,7 @@
         <p:spPr>
           <a:xfrm>
             <a:off x="685800" y="1600200"/>
-            <a:ext cx="7772400" cy="1645920"/>
+            <a:ext cx="7315200" cy="1645920"/>
           </a:xfrm>
           <a:prstGeom prst="rect">
             <a:avLst/>
@@ -1431,7 +1444,7 @@
                 <a:ea typeface="Arial" pitchFamily="34" charset="-122"/>
                 <a:cs typeface="Arial" pitchFamily="34" charset="-120"/>
               </a:rPr>
-              <a:t>Hans Petur  ·  opgave 3, 4 og 5</a:t>
+              <a:t>Hans Petur</a:t>
             </a:r>
             <a:endParaRPr lang="en-US" sz="1800" dirty="0"/>
           </a:p>
@@ -1445,7 +1458,7 @@
         </p:nvSpPr>
         <p:spPr>
           <a:xfrm>
-            <a:off x="8595360" y="1463040"/>
+            <a:off x="8412480" y="1371600"/>
             <a:ext cx="640080" cy="640080"/>
           </a:xfrm>
           <a:prstGeom prst="ellipse">
@@ -1478,7 +1491,7 @@
         </p:blipFill>
         <p:spPr>
           <a:xfrm>
-            <a:off x="8748979" y="1616659"/>
+            <a:off x="8566099" y="1525219"/>
             <a:ext cx="332842" cy="332842"/>
           </a:xfrm>
           <a:prstGeom prst="rect">
@@ -1494,24 +1507,63 @@
         </p:nvSpPr>
         <p:spPr>
           <a:xfrm>
-            <a:off x="9418320" y="1463040"/>
-            <a:ext cx="2377440" cy="640080"/>
-          </a:xfrm>
-          <a:prstGeom prst="rect">
-            <a:avLst/>
-          </a:prstGeom>
-          <a:noFill/>
-          <a:ln/>
-        </p:spPr>
-        <p:txBody>
-          <a:bodyPr wrap="square" lIns="0" tIns="0" rIns="0" bIns="0" rtlCol="0" anchor="ctr"/>
+            <a:off x="9235440" y="1371600"/>
+            <a:ext cx="2560320" cy="274320"/>
+          </a:xfrm>
+          <a:prstGeom prst="rect">
+            <a:avLst/>
+          </a:prstGeom>
+          <a:noFill/>
+          <a:ln/>
+        </p:spPr>
+        <p:txBody>
+          <a:bodyPr wrap="square" lIns="0" tIns="0" rIns="0" bIns="0" rtlCol="0" anchor="t"/>
           <a:lstStyle/>
           <a:p>
             <a:pPr indent="0" marL="0">
               <a:buNone/>
             </a:pPr>
             <a:r>
-              <a:rPr lang="en-US" sz="1800" dirty="0">
+              <a:rPr lang="en-US" sz="1100" b="1" dirty="0">
+                <a:solidFill>
+                  <a:srgbClr val="A9D3B0"/>
+                </a:solidFill>
+                <a:latin typeface="Courier New" pitchFamily="34" charset="0"/>
+                <a:ea typeface="Courier New" pitchFamily="34" charset="-122"/>
+                <a:cs typeface="Courier New" pitchFamily="34" charset="-120"/>
+              </a:rPr>
+              <a:t>Opgave 3</a:t>
+            </a:r>
+            <a:endParaRPr lang="en-US" sz="1100" dirty="0"/>
+          </a:p>
+        </p:txBody>
+      </p:sp>
+      <p:sp>
+        <p:nvSpPr>
+          <p:cNvPr id="9" name="Text 5"/>
+          <p:cNvSpPr txBox="1"/>
+          <p:nvPr/>
+        </p:nvSpPr>
+        <p:spPr>
+          <a:xfrm>
+            <a:off x="9235440" y="1645920"/>
+            <a:ext cx="2377440" cy="365760"/>
+          </a:xfrm>
+          <a:prstGeom prst="rect">
+            <a:avLst/>
+          </a:prstGeom>
+          <a:noFill/>
+          <a:ln/>
+        </p:spPr>
+        <p:txBody>
+          <a:bodyPr wrap="square" lIns="0" tIns="0" rIns="0" bIns="0" rtlCol="0" anchor="t"/>
+          <a:lstStyle/>
+          <a:p>
+            <a:pPr indent="0" marL="0">
+              <a:buNone/>
+            </a:pPr>
+            <a:r>
+              <a:rPr lang="en-US" sz="1700" dirty="0">
                 <a:solidFill>
                   <a:srgbClr val="F5F8F8"/>
                 </a:solidFill>
@@ -1521,19 +1573,19 @@
               </a:rPr>
               <a:t>Service Value Chain</a:t>
             </a:r>
-            <a:endParaRPr lang="en-US" sz="1800" dirty="0"/>
-          </a:p>
-        </p:txBody>
-      </p:sp>
-      <p:sp>
-        <p:nvSpPr>
-          <p:cNvPr id="9" name="Shape 5"/>
+            <a:endParaRPr lang="en-US" sz="1700" dirty="0"/>
+          </a:p>
+        </p:txBody>
+      </p:sp>
+      <p:sp>
+        <p:nvSpPr>
+          <p:cNvPr id="10" name="Shape 6"/>
           <p:cNvSpPr/>
           <p:nvPr/>
         </p:nvSpPr>
         <p:spPr>
           <a:xfrm>
-            <a:off x="8595360" y="2423160"/>
+            <a:off x="8412480" y="2377440"/>
             <a:ext cx="640080" cy="640080"/>
           </a:xfrm>
           <a:prstGeom prst="ellipse">
@@ -1552,7 +1604,7 @@
       </p:sp>
       <p:pic>
         <p:nvPicPr>
-          <p:cNvPr id="10" name="Image 1" descr="preencoded.png">    </p:cNvPr>
+          <p:cNvPr id="11" name="Image 1" descr="preencoded.png">    </p:cNvPr>
           <p:cNvPicPr>
             <a:picLocks noChangeAspect="1"/>
           </p:cNvPicPr>
@@ -1566,7 +1618,7 @@
         </p:blipFill>
         <p:spPr>
           <a:xfrm>
-            <a:off x="8748979" y="2576779"/>
+            <a:off x="8566099" y="2531059"/>
             <a:ext cx="332842" cy="332842"/>
           </a:xfrm>
           <a:prstGeom prst="rect">
@@ -1576,30 +1628,69 @@
       </p:pic>
       <p:sp>
         <p:nvSpPr>
-          <p:cNvPr id="11" name="Text 6"/>
-          <p:cNvSpPr txBox="1"/>
-          <p:nvPr/>
-        </p:nvSpPr>
-        <p:spPr>
-          <a:xfrm>
-            <a:off x="9418320" y="2423160"/>
-            <a:ext cx="2377440" cy="640080"/>
-          </a:xfrm>
-          <a:prstGeom prst="rect">
-            <a:avLst/>
-          </a:prstGeom>
-          <a:noFill/>
-          <a:ln/>
-        </p:spPr>
-        <p:txBody>
-          <a:bodyPr wrap="square" lIns="0" tIns="0" rIns="0" bIns="0" rtlCol="0" anchor="ctr"/>
+          <p:cNvPr id="12" name="Text 7"/>
+          <p:cNvSpPr txBox="1"/>
+          <p:nvPr/>
+        </p:nvSpPr>
+        <p:spPr>
+          <a:xfrm>
+            <a:off x="9235440" y="2377440"/>
+            <a:ext cx="2560320" cy="274320"/>
+          </a:xfrm>
+          <a:prstGeom prst="rect">
+            <a:avLst/>
+          </a:prstGeom>
+          <a:noFill/>
+          <a:ln/>
+        </p:spPr>
+        <p:txBody>
+          <a:bodyPr wrap="square" lIns="0" tIns="0" rIns="0" bIns="0" rtlCol="0" anchor="t"/>
           <a:lstStyle/>
           <a:p>
             <a:pPr indent="0" marL="0">
               <a:buNone/>
             </a:pPr>
             <a:r>
-              <a:rPr lang="en-US" sz="1800" dirty="0">
+              <a:rPr lang="en-US" sz="1100" b="1" dirty="0">
+                <a:solidFill>
+                  <a:srgbClr val="A9D3B0"/>
+                </a:solidFill>
+                <a:latin typeface="Courier New" pitchFamily="34" charset="0"/>
+                <a:ea typeface="Courier New" pitchFamily="34" charset="-122"/>
+                <a:cs typeface="Courier New" pitchFamily="34" charset="-120"/>
+              </a:rPr>
+              <a:t>Opgave 4</a:t>
+            </a:r>
+            <a:endParaRPr lang="en-US" sz="1100" dirty="0"/>
+          </a:p>
+        </p:txBody>
+      </p:sp>
+      <p:sp>
+        <p:nvSpPr>
+          <p:cNvPr id="13" name="Text 8"/>
+          <p:cNvSpPr txBox="1"/>
+          <p:nvPr/>
+        </p:nvSpPr>
+        <p:spPr>
+          <a:xfrm>
+            <a:off x="9235440" y="2651760"/>
+            <a:ext cx="2377440" cy="365760"/>
+          </a:xfrm>
+          <a:prstGeom prst="rect">
+            <a:avLst/>
+          </a:prstGeom>
+          <a:noFill/>
+          <a:ln/>
+        </p:spPr>
+        <p:txBody>
+          <a:bodyPr wrap="square" lIns="0" tIns="0" rIns="0" bIns="0" rtlCol="0" anchor="t"/>
+          <a:lstStyle/>
+          <a:p>
+            <a:pPr indent="0" marL="0">
+              <a:buNone/>
+            </a:pPr>
+            <a:r>
+              <a:rPr lang="en-US" sz="1700" dirty="0">
                 <a:solidFill>
                   <a:srgbClr val="F5F8F8"/>
                 </a:solidFill>
@@ -1607,21 +1698,21 @@
                 <a:ea typeface="Arial" pitchFamily="34" charset="-122"/>
                 <a:cs typeface="Arial" pitchFamily="34" charset="-120"/>
               </a:rPr>
-              <a:t>Incident</a:t>
-            </a:r>
-            <a:endParaRPr lang="en-US" sz="1800" dirty="0"/>
-          </a:p>
-        </p:txBody>
-      </p:sp>
-      <p:sp>
-        <p:nvSpPr>
-          <p:cNvPr id="12" name="Shape 7"/>
+              <a:t>Incident management</a:t>
+            </a:r>
+            <a:endParaRPr lang="en-US" sz="1700" dirty="0"/>
+          </a:p>
+        </p:txBody>
+      </p:sp>
+      <p:sp>
+        <p:nvSpPr>
+          <p:cNvPr id="14" name="Shape 9"/>
           <p:cNvSpPr/>
           <p:nvPr/>
         </p:nvSpPr>
         <p:spPr>
           <a:xfrm>
-            <a:off x="8595360" y="3383280"/>
+            <a:off x="8412480" y="3383280"/>
             <a:ext cx="640080" cy="640080"/>
           </a:xfrm>
           <a:prstGeom prst="ellipse">
@@ -1640,7 +1731,7 @@
       </p:sp>
       <p:pic>
         <p:nvPicPr>
-          <p:cNvPr id="13" name="Image 2" descr="preencoded.png">    </p:cNvPr>
+          <p:cNvPr id="15" name="Image 2" descr="preencoded.png">    </p:cNvPr>
           <p:cNvPicPr>
             <a:picLocks noChangeAspect="1"/>
           </p:cNvPicPr>
@@ -1654,7 +1745,7 @@
         </p:blipFill>
         <p:spPr>
           <a:xfrm>
-            <a:off x="8748979" y="3536899"/>
+            <a:off x="8566099" y="3536899"/>
             <a:ext cx="332842" cy="332842"/>
           </a:xfrm>
           <a:prstGeom prst="rect">
@@ -1664,30 +1755,69 @@
       </p:pic>
       <p:sp>
         <p:nvSpPr>
-          <p:cNvPr id="14" name="Text 8"/>
-          <p:cNvSpPr txBox="1"/>
-          <p:nvPr/>
-        </p:nvSpPr>
-        <p:spPr>
-          <a:xfrm>
-            <a:off x="9418320" y="3383280"/>
-            <a:ext cx="2377440" cy="640080"/>
-          </a:xfrm>
-          <a:prstGeom prst="rect">
-            <a:avLst/>
-          </a:prstGeom>
-          <a:noFill/>
-          <a:ln/>
-        </p:spPr>
-        <p:txBody>
-          <a:bodyPr wrap="square" lIns="0" tIns="0" rIns="0" bIns="0" rtlCol="0" anchor="ctr"/>
+          <p:cNvPr id="16" name="Text 10"/>
+          <p:cNvSpPr txBox="1"/>
+          <p:nvPr/>
+        </p:nvSpPr>
+        <p:spPr>
+          <a:xfrm>
+            <a:off x="9235440" y="3383280"/>
+            <a:ext cx="2560320" cy="274320"/>
+          </a:xfrm>
+          <a:prstGeom prst="rect">
+            <a:avLst/>
+          </a:prstGeom>
+          <a:noFill/>
+          <a:ln/>
+        </p:spPr>
+        <p:txBody>
+          <a:bodyPr wrap="square" lIns="0" tIns="0" rIns="0" bIns="0" rtlCol="0" anchor="t"/>
           <a:lstStyle/>
           <a:p>
             <a:pPr indent="0" marL="0">
               <a:buNone/>
             </a:pPr>
             <a:r>
-              <a:rPr lang="en-US" sz="1800" dirty="0">
+              <a:rPr lang="en-US" sz="1100" b="1" dirty="0">
+                <a:solidFill>
+                  <a:srgbClr val="A9D3B0"/>
+                </a:solidFill>
+                <a:latin typeface="Courier New" pitchFamily="34" charset="0"/>
+                <a:ea typeface="Courier New" pitchFamily="34" charset="-122"/>
+                <a:cs typeface="Courier New" pitchFamily="34" charset="-120"/>
+              </a:rPr>
+              <a:t>Opgave 4</a:t>
+            </a:r>
+            <a:endParaRPr lang="en-US" sz="1100" dirty="0"/>
+          </a:p>
+        </p:txBody>
+      </p:sp>
+      <p:sp>
+        <p:nvSpPr>
+          <p:cNvPr id="17" name="Text 11"/>
+          <p:cNvSpPr txBox="1"/>
+          <p:nvPr/>
+        </p:nvSpPr>
+        <p:spPr>
+          <a:xfrm>
+            <a:off x="9235440" y="3657600"/>
+            <a:ext cx="2377440" cy="365760"/>
+          </a:xfrm>
+          <a:prstGeom prst="rect">
+            <a:avLst/>
+          </a:prstGeom>
+          <a:noFill/>
+          <a:ln/>
+        </p:spPr>
+        <p:txBody>
+          <a:bodyPr wrap="square" lIns="0" tIns="0" rIns="0" bIns="0" rtlCol="0" anchor="t"/>
+          <a:lstStyle/>
+          <a:p>
+            <a:pPr indent="0" marL="0">
+              <a:buNone/>
+            </a:pPr>
+            <a:r>
+              <a:rPr lang="en-US" sz="1700" dirty="0">
                 <a:solidFill>
                   <a:srgbClr val="F5F8F8"/>
                 </a:solidFill>
@@ -1695,21 +1825,21 @@
                 <a:ea typeface="Arial" pitchFamily="34" charset="-122"/>
                 <a:cs typeface="Arial" pitchFamily="34" charset="-120"/>
               </a:rPr>
-              <a:t>Problem</a:t>
-            </a:r>
-            <a:endParaRPr lang="en-US" sz="1800" dirty="0"/>
-          </a:p>
-        </p:txBody>
-      </p:sp>
-      <p:sp>
-        <p:nvSpPr>
-          <p:cNvPr id="15" name="Shape 9"/>
+              <a:t>Problem management</a:t>
+            </a:r>
+            <a:endParaRPr lang="en-US" sz="1700" dirty="0"/>
+          </a:p>
+        </p:txBody>
+      </p:sp>
+      <p:sp>
+        <p:nvSpPr>
+          <p:cNvPr id="18" name="Shape 12"/>
           <p:cNvSpPr/>
           <p:nvPr/>
         </p:nvSpPr>
         <p:spPr>
           <a:xfrm>
-            <a:off x="8595360" y="4343400"/>
+            <a:off x="8412480" y="4389120"/>
             <a:ext cx="640080" cy="640080"/>
           </a:xfrm>
           <a:prstGeom prst="ellipse">
@@ -1728,7 +1858,7 @@
       </p:sp>
       <p:pic>
         <p:nvPicPr>
-          <p:cNvPr id="16" name="Image 3" descr="preencoded.png">    </p:cNvPr>
+          <p:cNvPr id="19" name="Image 3" descr="preencoded.png">    </p:cNvPr>
           <p:cNvPicPr>
             <a:picLocks noChangeAspect="1"/>
           </p:cNvPicPr>
@@ -1742,7 +1872,7 @@
         </p:blipFill>
         <p:spPr>
           <a:xfrm>
-            <a:off x="8748979" y="4497019"/>
+            <a:off x="8566099" y="4542739"/>
             <a:ext cx="332842" cy="332842"/>
           </a:xfrm>
           <a:prstGeom prst="rect">
@@ -1752,30 +1882,69 @@
       </p:pic>
       <p:sp>
         <p:nvSpPr>
-          <p:cNvPr id="17" name="Text 10"/>
-          <p:cNvSpPr txBox="1"/>
-          <p:nvPr/>
-        </p:nvSpPr>
-        <p:spPr>
-          <a:xfrm>
-            <a:off x="9418320" y="4343400"/>
-            <a:ext cx="2377440" cy="640080"/>
-          </a:xfrm>
-          <a:prstGeom prst="rect">
-            <a:avLst/>
-          </a:prstGeom>
-          <a:noFill/>
-          <a:ln/>
-        </p:spPr>
-        <p:txBody>
-          <a:bodyPr wrap="square" lIns="0" tIns="0" rIns="0" bIns="0" rtlCol="0" anchor="ctr"/>
+          <p:cNvPr id="20" name="Text 13"/>
+          <p:cNvSpPr txBox="1"/>
+          <p:nvPr/>
+        </p:nvSpPr>
+        <p:spPr>
+          <a:xfrm>
+            <a:off x="9235440" y="4389120"/>
+            <a:ext cx="2560320" cy="274320"/>
+          </a:xfrm>
+          <a:prstGeom prst="rect">
+            <a:avLst/>
+          </a:prstGeom>
+          <a:noFill/>
+          <a:ln/>
+        </p:spPr>
+        <p:txBody>
+          <a:bodyPr wrap="square" lIns="0" tIns="0" rIns="0" bIns="0" rtlCol="0" anchor="t"/>
           <a:lstStyle/>
           <a:p>
             <a:pPr indent="0" marL="0">
               <a:buNone/>
             </a:pPr>
             <a:r>
-              <a:rPr lang="en-US" sz="1800" dirty="0">
+              <a:rPr lang="en-US" sz="1100" b="1" dirty="0">
+                <a:solidFill>
+                  <a:srgbClr val="A9D3B0"/>
+                </a:solidFill>
+                <a:latin typeface="Courier New" pitchFamily="34" charset="0"/>
+                <a:ea typeface="Courier New" pitchFamily="34" charset="-122"/>
+                <a:cs typeface="Courier New" pitchFamily="34" charset="-120"/>
+              </a:rPr>
+              <a:t>Opgave 5</a:t>
+            </a:r>
+            <a:endParaRPr lang="en-US" sz="1100" dirty="0"/>
+          </a:p>
+        </p:txBody>
+      </p:sp>
+      <p:sp>
+        <p:nvSpPr>
+          <p:cNvPr id="21" name="Text 14"/>
+          <p:cNvSpPr txBox="1"/>
+          <p:nvPr/>
+        </p:nvSpPr>
+        <p:spPr>
+          <a:xfrm>
+            <a:off x="9235440" y="4663440"/>
+            <a:ext cx="2377440" cy="365760"/>
+          </a:xfrm>
+          <a:prstGeom prst="rect">
+            <a:avLst/>
+          </a:prstGeom>
+          <a:noFill/>
+          <a:ln/>
+        </p:spPr>
+        <p:txBody>
+          <a:bodyPr wrap="square" lIns="0" tIns="0" rIns="0" bIns="0" rtlCol="0" anchor="t"/>
+          <a:lstStyle/>
+          <a:p>
+            <a:pPr indent="0" marL="0">
+              <a:buNone/>
+            </a:pPr>
+            <a:r>
+              <a:rPr lang="en-US" sz="1700" dirty="0">
                 <a:solidFill>
                   <a:srgbClr val="F5F8F8"/>
                 </a:solidFill>
@@ -1783,9 +1952,9 @@
                 <a:ea typeface="Arial" pitchFamily="34" charset="-122"/>
                 <a:cs typeface="Arial" pitchFamily="34" charset="-120"/>
               </a:rPr>
-              <a:t>Fire dimensioner</a:t>
-            </a:r>
-            <a:endParaRPr lang="en-US" sz="1800" dirty="0"/>
+              <a:t>De fire dimensioner</a:t>
+            </a:r>
+            <a:endParaRPr lang="en-US" sz="1700" dirty="0"/>
           </a:p>
         </p:txBody>
       </p:sp>
@@ -1979,18 +2148,57 @@
       </p:sp>
       <p:sp>
         <p:nvSpPr>
-          <p:cNvPr id="7" name="Shape 4"/>
+          <p:cNvPr id="7" name="Text 4"/>
+          <p:cNvSpPr txBox="1"/>
+          <p:nvPr/>
+        </p:nvSpPr>
+        <p:spPr>
+          <a:xfrm>
+            <a:off x="548640" y="1463040"/>
+            <a:ext cx="11094415" cy="411480"/>
+          </a:xfrm>
+          <a:prstGeom prst="rect">
+            <a:avLst/>
+          </a:prstGeom>
+          <a:noFill/>
+          <a:ln/>
+        </p:spPr>
+        <p:txBody>
+          <a:bodyPr wrap="square" lIns="0" tIns="0" rIns="0" bIns="0" rtlCol="0" anchor="t"/>
+          <a:lstStyle/>
+          <a:p>
+            <a:pPr indent="0" marL="0">
+              <a:buNone/>
+            </a:pPr>
+            <a:r>
+              <a:rPr lang="en-US" sz="2000" i="1" dirty="0">
+                <a:solidFill>
+                  <a:srgbClr val="2F6B3A"/>
+                </a:solidFill>
+                <a:latin typeface="Georgia" pitchFamily="34" charset="0"/>
+                <a:ea typeface="Georgia" pitchFamily="34" charset="-122"/>
+                <a:cs typeface="Georgia" pitchFamily="34" charset="-120"/>
+              </a:rPr>
+              <a:t>6 aktiviteter, der omdanner efterspørgsel og muligheder til værdi</a:t>
+            </a:r>
+            <a:endParaRPr lang="en-US" sz="2000" dirty="0"/>
+          </a:p>
+        </p:txBody>
+      </p:sp>
+      <p:sp>
+        <p:nvSpPr>
+          <p:cNvPr id="8" name="Shape 5"/>
           <p:cNvSpPr/>
           <p:nvPr/>
         </p:nvSpPr>
         <p:spPr>
           <a:xfrm>
-            <a:off x="548640" y="1737360"/>
-            <a:ext cx="3515258" cy="1691640"/>
+            <a:off x="548640" y="2057400"/>
+            <a:ext cx="3515258" cy="1463040"/>
           </a:xfrm>
           <a:prstGeom prst="roundRect">
             <a:avLst>
-              <a:gd name="adj" fmla="val 6486"/>
+              <a:gd name="adj" fmla="val 7500"/>
             </a:avLst>
           </a:prstGeom>
           <a:solidFill>
@@ -2006,14 +2214,14 @@
       </p:sp>
       <p:sp>
         <p:nvSpPr>
-          <p:cNvPr id="8" name="Shape 5"/>
+          <p:cNvPr id="9" name="Shape 6"/>
           <p:cNvSpPr/>
           <p:nvPr/>
         </p:nvSpPr>
         <p:spPr>
           <a:xfrm>
-            <a:off x="822960" y="2011680"/>
-            <a:ext cx="457200" cy="457200"/>
+            <a:off x="777240" y="2286000"/>
+            <a:ext cx="411480" cy="411480"/>
           </a:xfrm>
           <a:prstGeom prst="ellipse">
             <a:avLst/>
@@ -2031,14 +2239,14 @@
       </p:sp>
       <p:sp>
         <p:nvSpPr>
-          <p:cNvPr id="9" name="Text 6"/>
-          <p:cNvSpPr txBox="1"/>
-          <p:nvPr/>
-        </p:nvSpPr>
-        <p:spPr>
-          <a:xfrm>
-            <a:off x="822960" y="2011680"/>
-            <a:ext cx="457200" cy="457200"/>
+          <p:cNvPr id="10" name="Text 7"/>
+          <p:cNvSpPr txBox="1"/>
+          <p:nvPr/>
+        </p:nvSpPr>
+        <p:spPr>
+          <a:xfrm>
+            <a:off x="777240" y="2286000"/>
+            <a:ext cx="411480" cy="411480"/>
           </a:xfrm>
           <a:prstGeom prst="rect">
             <a:avLst/>
@@ -2054,7 +2262,7 @@
               <a:buNone/>
             </a:pPr>
             <a:r>
-              <a:rPr lang="en-US" sz="1500" b="1" dirty="0">
+              <a:rPr lang="en-US" sz="1400" b="1" dirty="0">
                 <a:solidFill>
                   <a:srgbClr val="FFFFFF"/>
                 </a:solidFill>
@@ -2064,20 +2272,59 @@
               </a:rPr>
               <a:t>1</a:t>
             </a:r>
-            <a:endParaRPr lang="en-US" sz="1500" dirty="0"/>
-          </a:p>
-        </p:txBody>
-      </p:sp>
-      <p:sp>
-        <p:nvSpPr>
-          <p:cNvPr id="10" name="Text 7"/>
-          <p:cNvSpPr txBox="1"/>
-          <p:nvPr/>
-        </p:nvSpPr>
-        <p:spPr>
-          <a:xfrm>
-            <a:off x="822960" y="2606040"/>
-            <a:ext cx="2966618" cy="365760"/>
+            <a:endParaRPr lang="en-US" sz="1400" dirty="0"/>
+          </a:p>
+        </p:txBody>
+      </p:sp>
+      <p:sp>
+        <p:nvSpPr>
+          <p:cNvPr id="11" name="Text 8"/>
+          <p:cNvSpPr txBox="1"/>
+          <p:nvPr/>
+        </p:nvSpPr>
+        <p:spPr>
+          <a:xfrm>
+            <a:off x="1325880" y="2258568"/>
+            <a:ext cx="2600858" cy="457200"/>
+          </a:xfrm>
+          <a:prstGeom prst="rect">
+            <a:avLst/>
+          </a:prstGeom>
+          <a:noFill/>
+          <a:ln/>
+        </p:spPr>
+        <p:txBody>
+          <a:bodyPr wrap="square" lIns="0" tIns="0" rIns="0" bIns="0" rtlCol="0" anchor="ctr"/>
+          <a:lstStyle/>
+          <a:p>
+            <a:pPr indent="0" marL="0">
+              <a:buNone/>
+            </a:pPr>
+            <a:r>
+              <a:rPr lang="en-US" sz="1700" b="1" dirty="0">
+                <a:solidFill>
+                  <a:srgbClr val="17221A"/>
+                </a:solidFill>
+                <a:latin typeface="Arial" pitchFamily="34" charset="0"/>
+                <a:ea typeface="Arial" pitchFamily="34" charset="-122"/>
+                <a:cs typeface="Arial" pitchFamily="34" charset="-120"/>
+              </a:rPr>
+              <a:t>Plan</a:t>
+            </a:r>
+            <a:endParaRPr lang="en-US" sz="1700" dirty="0"/>
+          </a:p>
+        </p:txBody>
+      </p:sp>
+      <p:sp>
+        <p:nvSpPr>
+          <p:cNvPr id="12" name="Text 9"/>
+          <p:cNvSpPr txBox="1"/>
+          <p:nvPr/>
+        </p:nvSpPr>
+        <p:spPr>
+          <a:xfrm>
+            <a:off x="777240" y="2834640"/>
+            <a:ext cx="3058058" cy="594360"/>
           </a:xfrm>
           <a:prstGeom prst="rect">
             <a:avLst/>
@@ -2093,46 +2340,7 @@
               <a:buNone/>
             </a:pPr>
             <a:r>
-              <a:rPr lang="en-US" sz="1900" b="1" dirty="0">
-                <a:solidFill>
-                  <a:srgbClr val="17221A"/>
-                </a:solidFill>
-                <a:latin typeface="Arial" pitchFamily="34" charset="0"/>
-                <a:ea typeface="Arial" pitchFamily="34" charset="-122"/>
-                <a:cs typeface="Arial" pitchFamily="34" charset="-120"/>
-              </a:rPr>
-              <a:t>Plan</a:t>
-            </a:r>
-            <a:endParaRPr lang="en-US" sz="1900" dirty="0"/>
-          </a:p>
-        </p:txBody>
-      </p:sp>
-      <p:sp>
-        <p:nvSpPr>
-          <p:cNvPr id="11" name="Text 8"/>
-          <p:cNvSpPr txBox="1"/>
-          <p:nvPr/>
-        </p:nvSpPr>
-        <p:spPr>
-          <a:xfrm>
-            <a:off x="822960" y="2971800"/>
-            <a:ext cx="2966618" cy="365760"/>
-          </a:xfrm>
-          <a:prstGeom prst="rect">
-            <a:avLst/>
-          </a:prstGeom>
-          <a:noFill/>
-          <a:ln/>
-        </p:spPr>
-        <p:txBody>
-          <a:bodyPr wrap="square" lIns="0" tIns="0" rIns="0" bIns="0" rtlCol="0" anchor="t"/>
-          <a:lstStyle/>
-          <a:p>
-            <a:pPr indent="0" marL="0">
-              <a:buNone/>
-            </a:pPr>
-            <a:r>
-              <a:rPr lang="en-US" sz="1500" dirty="0">
+              <a:rPr lang="en-US" sz="1400" dirty="0">
                 <a:solidFill>
                   <a:srgbClr val="526066"/>
                 </a:solidFill>
@@ -2140,26 +2348,26 @@
                 <a:ea typeface="Arial" pitchFamily="34" charset="-122"/>
                 <a:cs typeface="Arial" pitchFamily="34" charset="-120"/>
               </a:rPr>
-              <a:t>Ledelsen: hvilke byer først</a:t>
-            </a:r>
-            <a:endParaRPr lang="en-US" sz="1500" dirty="0"/>
-          </a:p>
-        </p:txBody>
-      </p:sp>
-      <p:sp>
-        <p:nvSpPr>
-          <p:cNvPr id="12" name="Shape 9"/>
+              <a:t>Ledelsen: hvilke byer får kontor først</a:t>
+            </a:r>
+            <a:endParaRPr lang="en-US" sz="1400" dirty="0"/>
+          </a:p>
+        </p:txBody>
+      </p:sp>
+      <p:sp>
+        <p:nvSpPr>
+          <p:cNvPr id="13" name="Shape 10"/>
           <p:cNvSpPr/>
           <p:nvPr/>
         </p:nvSpPr>
         <p:spPr>
           <a:xfrm>
-            <a:off x="4338218" y="1737360"/>
-            <a:ext cx="3515258" cy="1691640"/>
+            <a:off x="4338218" y="2057400"/>
+            <a:ext cx="3515258" cy="1463040"/>
           </a:xfrm>
           <a:prstGeom prst="roundRect">
             <a:avLst>
-              <a:gd name="adj" fmla="val 6486"/>
+              <a:gd name="adj" fmla="val 7500"/>
             </a:avLst>
           </a:prstGeom>
           <a:solidFill>
@@ -2175,14 +2383,14 @@
       </p:sp>
       <p:sp>
         <p:nvSpPr>
-          <p:cNvPr id="13" name="Shape 10"/>
+          <p:cNvPr id="14" name="Shape 11"/>
           <p:cNvSpPr/>
           <p:nvPr/>
         </p:nvSpPr>
         <p:spPr>
           <a:xfrm>
-            <a:off x="4612538" y="2011680"/>
-            <a:ext cx="457200" cy="457200"/>
+            <a:off x="4566818" y="2286000"/>
+            <a:ext cx="411480" cy="411480"/>
           </a:xfrm>
           <a:prstGeom prst="ellipse">
             <a:avLst/>
@@ -2200,14 +2408,14 @@
       </p:sp>
       <p:sp>
         <p:nvSpPr>
-          <p:cNvPr id="14" name="Text 11"/>
-          <p:cNvSpPr txBox="1"/>
-          <p:nvPr/>
-        </p:nvSpPr>
-        <p:spPr>
-          <a:xfrm>
-            <a:off x="4612538" y="2011680"/>
-            <a:ext cx="457200" cy="457200"/>
+          <p:cNvPr id="15" name="Text 12"/>
+          <p:cNvSpPr txBox="1"/>
+          <p:nvPr/>
+        </p:nvSpPr>
+        <p:spPr>
+          <a:xfrm>
+            <a:off x="4566818" y="2286000"/>
+            <a:ext cx="411480" cy="411480"/>
           </a:xfrm>
           <a:prstGeom prst="rect">
             <a:avLst/>
@@ -2223,7 +2431,7 @@
               <a:buNone/>
             </a:pPr>
             <a:r>
-              <a:rPr lang="en-US" sz="1500" b="1" dirty="0">
+              <a:rPr lang="en-US" sz="1400" b="1" dirty="0">
                 <a:solidFill>
                   <a:srgbClr val="FFFFFF"/>
                 </a:solidFill>
@@ -2233,20 +2441,59 @@
               </a:rPr>
               <a:t>2</a:t>
             </a:r>
-            <a:endParaRPr lang="en-US" sz="1500" dirty="0"/>
-          </a:p>
-        </p:txBody>
-      </p:sp>
-      <p:sp>
-        <p:nvSpPr>
-          <p:cNvPr id="15" name="Text 12"/>
-          <p:cNvSpPr txBox="1"/>
-          <p:nvPr/>
-        </p:nvSpPr>
-        <p:spPr>
-          <a:xfrm>
-            <a:off x="4612538" y="2606040"/>
-            <a:ext cx="2966618" cy="365760"/>
+            <a:endParaRPr lang="en-US" sz="1400" dirty="0"/>
+          </a:p>
+        </p:txBody>
+      </p:sp>
+      <p:sp>
+        <p:nvSpPr>
+          <p:cNvPr id="16" name="Text 13"/>
+          <p:cNvSpPr txBox="1"/>
+          <p:nvPr/>
+        </p:nvSpPr>
+        <p:spPr>
+          <a:xfrm>
+            <a:off x="5115458" y="2258568"/>
+            <a:ext cx="2600858" cy="457200"/>
+          </a:xfrm>
+          <a:prstGeom prst="rect">
+            <a:avLst/>
+          </a:prstGeom>
+          <a:noFill/>
+          <a:ln/>
+        </p:spPr>
+        <p:txBody>
+          <a:bodyPr wrap="square" lIns="0" tIns="0" rIns="0" bIns="0" rtlCol="0" anchor="ctr"/>
+          <a:lstStyle/>
+          <a:p>
+            <a:pPr indent="0" marL="0">
+              <a:buNone/>
+            </a:pPr>
+            <a:r>
+              <a:rPr lang="en-US" sz="1700" b="1" dirty="0">
+                <a:solidFill>
+                  <a:srgbClr val="17221A"/>
+                </a:solidFill>
+                <a:latin typeface="Arial" pitchFamily="34" charset="0"/>
+                <a:ea typeface="Arial" pitchFamily="34" charset="-122"/>
+                <a:cs typeface="Arial" pitchFamily="34" charset="-120"/>
+              </a:rPr>
+              <a:t>Improve</a:t>
+            </a:r>
+            <a:endParaRPr lang="en-US" sz="1700" dirty="0"/>
+          </a:p>
+        </p:txBody>
+      </p:sp>
+      <p:sp>
+        <p:nvSpPr>
+          <p:cNvPr id="17" name="Text 14"/>
+          <p:cNvSpPr txBox="1"/>
+          <p:nvPr/>
+        </p:nvSpPr>
+        <p:spPr>
+          <a:xfrm>
+            <a:off x="4566818" y="2834640"/>
+            <a:ext cx="3058058" cy="594360"/>
           </a:xfrm>
           <a:prstGeom prst="rect">
             <a:avLst/>
@@ -2262,46 +2509,7 @@
               <a:buNone/>
             </a:pPr>
             <a:r>
-              <a:rPr lang="en-US" sz="1900" b="1" dirty="0">
-                <a:solidFill>
-                  <a:srgbClr val="17221A"/>
-                </a:solidFill>
-                <a:latin typeface="Arial" pitchFamily="34" charset="0"/>
-                <a:ea typeface="Arial" pitchFamily="34" charset="-122"/>
-                <a:cs typeface="Arial" pitchFamily="34" charset="-120"/>
-              </a:rPr>
-              <a:t>Improve</a:t>
-            </a:r>
-            <a:endParaRPr lang="en-US" sz="1900" dirty="0"/>
-          </a:p>
-        </p:txBody>
-      </p:sp>
-      <p:sp>
-        <p:nvSpPr>
-          <p:cNvPr id="16" name="Text 13"/>
-          <p:cNvSpPr txBox="1"/>
-          <p:nvPr/>
-        </p:nvSpPr>
-        <p:spPr>
-          <a:xfrm>
-            <a:off x="4612538" y="2971800"/>
-            <a:ext cx="2966618" cy="365760"/>
-          </a:xfrm>
-          <a:prstGeom prst="rect">
-            <a:avLst/>
-          </a:prstGeom>
-          <a:noFill/>
-          <a:ln/>
-        </p:spPr>
-        <p:txBody>
-          <a:bodyPr wrap="square" lIns="0" tIns="0" rIns="0" bIns="0" rtlCol="0" anchor="t"/>
-          <a:lstStyle/>
-          <a:p>
-            <a:pPr indent="0" marL="0">
-              <a:buNone/>
-            </a:pPr>
-            <a:r>
-              <a:rPr lang="en-US" sz="1500" dirty="0">
+              <a:rPr lang="en-US" sz="1400" dirty="0">
                 <a:solidFill>
                   <a:srgbClr val="526066"/>
                 </a:solidFill>
@@ -2309,26 +2517,26 @@
                 <a:ea typeface="Arial" pitchFamily="34" charset="-122"/>
                 <a:cs typeface="Arial" pitchFamily="34" charset="-120"/>
               </a:rPr>
-              <a:t>Færre falske alarmer</a:t>
-            </a:r>
-            <a:endParaRPr lang="en-US" sz="1500" dirty="0"/>
-          </a:p>
-        </p:txBody>
-      </p:sp>
-      <p:sp>
-        <p:nvSpPr>
-          <p:cNvPr id="17" name="Shape 14"/>
+              <a:t>Gør det bedre, fx færre falske alarmer</a:t>
+            </a:r>
+            <a:endParaRPr lang="en-US" sz="1400" dirty="0"/>
+          </a:p>
+        </p:txBody>
+      </p:sp>
+      <p:sp>
+        <p:nvSpPr>
+          <p:cNvPr id="18" name="Shape 15"/>
           <p:cNvSpPr/>
           <p:nvPr/>
         </p:nvSpPr>
         <p:spPr>
           <a:xfrm>
-            <a:off x="8127797" y="1737360"/>
-            <a:ext cx="3515258" cy="1691640"/>
+            <a:off x="8127797" y="2057400"/>
+            <a:ext cx="3515258" cy="1463040"/>
           </a:xfrm>
           <a:prstGeom prst="roundRect">
             <a:avLst>
-              <a:gd name="adj" fmla="val 6486"/>
+              <a:gd name="adj" fmla="val 7500"/>
             </a:avLst>
           </a:prstGeom>
           <a:solidFill>
@@ -2344,14 +2552,14 @@
       </p:sp>
       <p:sp>
         <p:nvSpPr>
-          <p:cNvPr id="18" name="Shape 15"/>
+          <p:cNvPr id="19" name="Shape 16"/>
           <p:cNvSpPr/>
           <p:nvPr/>
         </p:nvSpPr>
         <p:spPr>
           <a:xfrm>
-            <a:off x="8402117" y="2011680"/>
-            <a:ext cx="457200" cy="457200"/>
+            <a:off x="8356397" y="2286000"/>
+            <a:ext cx="411480" cy="411480"/>
           </a:xfrm>
           <a:prstGeom prst="ellipse">
             <a:avLst/>
@@ -2369,14 +2577,14 @@
       </p:sp>
       <p:sp>
         <p:nvSpPr>
-          <p:cNvPr id="19" name="Text 16"/>
-          <p:cNvSpPr txBox="1"/>
-          <p:nvPr/>
-        </p:nvSpPr>
-        <p:spPr>
-          <a:xfrm>
-            <a:off x="8402117" y="2011680"/>
-            <a:ext cx="457200" cy="457200"/>
+          <p:cNvPr id="20" name="Text 17"/>
+          <p:cNvSpPr txBox="1"/>
+          <p:nvPr/>
+        </p:nvSpPr>
+        <p:spPr>
+          <a:xfrm>
+            <a:off x="8356397" y="2286000"/>
+            <a:ext cx="411480" cy="411480"/>
           </a:xfrm>
           <a:prstGeom prst="rect">
             <a:avLst/>
@@ -2392,7 +2600,7 @@
               <a:buNone/>
             </a:pPr>
             <a:r>
-              <a:rPr lang="en-US" sz="1500" b="1" dirty="0">
+              <a:rPr lang="en-US" sz="1400" b="1" dirty="0">
                 <a:solidFill>
                   <a:srgbClr val="FFFFFF"/>
                 </a:solidFill>
@@ -2402,20 +2610,59 @@
               </a:rPr>
               <a:t>3</a:t>
             </a:r>
-            <a:endParaRPr lang="en-US" sz="1500" dirty="0"/>
-          </a:p>
-        </p:txBody>
-      </p:sp>
-      <p:sp>
-        <p:nvSpPr>
-          <p:cNvPr id="20" name="Text 17"/>
-          <p:cNvSpPr txBox="1"/>
-          <p:nvPr/>
-        </p:nvSpPr>
-        <p:spPr>
-          <a:xfrm>
-            <a:off x="8402117" y="2606040"/>
-            <a:ext cx="2966618" cy="365760"/>
+            <a:endParaRPr lang="en-US" sz="1400" dirty="0"/>
+          </a:p>
+        </p:txBody>
+      </p:sp>
+      <p:sp>
+        <p:nvSpPr>
+          <p:cNvPr id="21" name="Text 18"/>
+          <p:cNvSpPr txBox="1"/>
+          <p:nvPr/>
+        </p:nvSpPr>
+        <p:spPr>
+          <a:xfrm>
+            <a:off x="8905037" y="2258568"/>
+            <a:ext cx="2600858" cy="457200"/>
+          </a:xfrm>
+          <a:prstGeom prst="rect">
+            <a:avLst/>
+          </a:prstGeom>
+          <a:noFill/>
+          <a:ln/>
+        </p:spPr>
+        <p:txBody>
+          <a:bodyPr wrap="square" lIns="0" tIns="0" rIns="0" bIns="0" rtlCol="0" anchor="ctr"/>
+          <a:lstStyle/>
+          <a:p>
+            <a:pPr indent="0" marL="0">
+              <a:buNone/>
+            </a:pPr>
+            <a:r>
+              <a:rPr lang="en-US" sz="1700" b="1" dirty="0">
+                <a:solidFill>
+                  <a:srgbClr val="17221A"/>
+                </a:solidFill>
+                <a:latin typeface="Arial" pitchFamily="34" charset="0"/>
+                <a:ea typeface="Arial" pitchFamily="34" charset="-122"/>
+                <a:cs typeface="Arial" pitchFamily="34" charset="-120"/>
+              </a:rPr>
+              <a:t>Engage</a:t>
+            </a:r>
+            <a:endParaRPr lang="en-US" sz="1700" dirty="0"/>
+          </a:p>
+        </p:txBody>
+      </p:sp>
+      <p:sp>
+        <p:nvSpPr>
+          <p:cNvPr id="22" name="Text 19"/>
+          <p:cNvSpPr txBox="1"/>
+          <p:nvPr/>
+        </p:nvSpPr>
+        <p:spPr>
+          <a:xfrm>
+            <a:off x="8356397" y="2834640"/>
+            <a:ext cx="3058058" cy="594360"/>
           </a:xfrm>
           <a:prstGeom prst="rect">
             <a:avLst/>
@@ -2431,46 +2678,7 @@
               <a:buNone/>
             </a:pPr>
             <a:r>
-              <a:rPr lang="en-US" sz="1900" b="1" dirty="0">
-                <a:solidFill>
-                  <a:srgbClr val="17221A"/>
-                </a:solidFill>
-                <a:latin typeface="Arial" pitchFamily="34" charset="0"/>
-                <a:ea typeface="Arial" pitchFamily="34" charset="-122"/>
-                <a:cs typeface="Arial" pitchFamily="34" charset="-120"/>
-              </a:rPr>
-              <a:t>Engage</a:t>
-            </a:r>
-            <a:endParaRPr lang="en-US" sz="1900" dirty="0"/>
-          </a:p>
-        </p:txBody>
-      </p:sp>
-      <p:sp>
-        <p:nvSpPr>
-          <p:cNvPr id="21" name="Text 18"/>
-          <p:cNvSpPr txBox="1"/>
-          <p:nvPr/>
-        </p:nvSpPr>
-        <p:spPr>
-          <a:xfrm>
-            <a:off x="8402117" y="2971800"/>
-            <a:ext cx="2966618" cy="365760"/>
-          </a:xfrm>
-          <a:prstGeom prst="rect">
-            <a:avLst/>
-          </a:prstGeom>
-          <a:noFill/>
-          <a:ln/>
-        </p:spPr>
-        <p:txBody>
-          <a:bodyPr wrap="square" lIns="0" tIns="0" rIns="0" bIns="0" rtlCol="0" anchor="t"/>
-          <a:lstStyle/>
-          <a:p>
-            <a:pPr indent="0" marL="0">
-              <a:buNone/>
-            </a:pPr>
-            <a:r>
-              <a:rPr lang="en-US" sz="1500" dirty="0">
+              <a:rPr lang="en-US" sz="1400" dirty="0">
                 <a:solidFill>
                   <a:srgbClr val="526066"/>
                 </a:solidFill>
@@ -2478,26 +2686,26 @@
                 <a:ea typeface="Arial" pitchFamily="34" charset="-122"/>
                 <a:cs typeface="Arial" pitchFamily="34" charset="-120"/>
               </a:rPr>
-              <a:t>Salg taler med landmænd</a:t>
-            </a:r>
-            <a:endParaRPr lang="en-US" sz="1500" dirty="0"/>
-          </a:p>
-        </p:txBody>
-      </p:sp>
-      <p:sp>
-        <p:nvSpPr>
-          <p:cNvPr id="22" name="Shape 19"/>
+              <a:t>Sker både i salg og på de nye kontorer</a:t>
+            </a:r>
+            <a:endParaRPr lang="en-US" sz="1400" dirty="0"/>
+          </a:p>
+        </p:txBody>
+      </p:sp>
+      <p:sp>
+        <p:nvSpPr>
+          <p:cNvPr id="23" name="Shape 20"/>
           <p:cNvSpPr/>
           <p:nvPr/>
         </p:nvSpPr>
         <p:spPr>
           <a:xfrm>
-            <a:off x="548640" y="3703320"/>
-            <a:ext cx="3515258" cy="1691640"/>
+            <a:off x="548640" y="3749040"/>
+            <a:ext cx="3515258" cy="1463040"/>
           </a:xfrm>
           <a:prstGeom prst="roundRect">
             <a:avLst>
-              <a:gd name="adj" fmla="val 6486"/>
+              <a:gd name="adj" fmla="val 7500"/>
             </a:avLst>
           </a:prstGeom>
           <a:solidFill>
@@ -2513,14 +2721,14 @@
       </p:sp>
       <p:sp>
         <p:nvSpPr>
-          <p:cNvPr id="23" name="Shape 20"/>
+          <p:cNvPr id="24" name="Shape 21"/>
           <p:cNvSpPr/>
           <p:nvPr/>
         </p:nvSpPr>
         <p:spPr>
           <a:xfrm>
-            <a:off x="822960" y="3977640"/>
-            <a:ext cx="457200" cy="457200"/>
+            <a:off x="777240" y="3977640"/>
+            <a:ext cx="411480" cy="411480"/>
           </a:xfrm>
           <a:prstGeom prst="ellipse">
             <a:avLst/>
@@ -2538,14 +2746,14 @@
       </p:sp>
       <p:sp>
         <p:nvSpPr>
-          <p:cNvPr id="24" name="Text 21"/>
-          <p:cNvSpPr txBox="1"/>
-          <p:nvPr/>
-        </p:nvSpPr>
-        <p:spPr>
-          <a:xfrm>
-            <a:off x="822960" y="3977640"/>
-            <a:ext cx="457200" cy="457200"/>
+          <p:cNvPr id="25" name="Text 22"/>
+          <p:cNvSpPr txBox="1"/>
+          <p:nvPr/>
+        </p:nvSpPr>
+        <p:spPr>
+          <a:xfrm>
+            <a:off x="777240" y="3977640"/>
+            <a:ext cx="411480" cy="411480"/>
           </a:xfrm>
           <a:prstGeom prst="rect">
             <a:avLst/>
@@ -2561,7 +2769,7 @@
               <a:buNone/>
             </a:pPr>
             <a:r>
-              <a:rPr lang="en-US" sz="1500" b="1" dirty="0">
+              <a:rPr lang="en-US" sz="1400" b="1" dirty="0">
                 <a:solidFill>
                   <a:srgbClr val="FFFFFF"/>
                 </a:solidFill>
@@ -2571,20 +2779,59 @@
               </a:rPr>
               <a:t>4</a:t>
             </a:r>
-            <a:endParaRPr lang="en-US" sz="1500" dirty="0"/>
-          </a:p>
-        </p:txBody>
-      </p:sp>
-      <p:sp>
-        <p:nvSpPr>
-          <p:cNvPr id="25" name="Text 22"/>
-          <p:cNvSpPr txBox="1"/>
-          <p:nvPr/>
-        </p:nvSpPr>
-        <p:spPr>
-          <a:xfrm>
-            <a:off x="822960" y="4572000"/>
-            <a:ext cx="2966618" cy="365760"/>
+            <a:endParaRPr lang="en-US" sz="1400" dirty="0"/>
+          </a:p>
+        </p:txBody>
+      </p:sp>
+      <p:sp>
+        <p:nvSpPr>
+          <p:cNvPr id="26" name="Text 23"/>
+          <p:cNvSpPr txBox="1"/>
+          <p:nvPr/>
+        </p:nvSpPr>
+        <p:spPr>
+          <a:xfrm>
+            <a:off x="1325880" y="3950208"/>
+            <a:ext cx="2600858" cy="457200"/>
+          </a:xfrm>
+          <a:prstGeom prst="rect">
+            <a:avLst/>
+          </a:prstGeom>
+          <a:noFill/>
+          <a:ln/>
+        </p:spPr>
+        <p:txBody>
+          <a:bodyPr wrap="square" lIns="0" tIns="0" rIns="0" bIns="0" rtlCol="0" anchor="ctr"/>
+          <a:lstStyle/>
+          <a:p>
+            <a:pPr indent="0" marL="0">
+              <a:buNone/>
+            </a:pPr>
+            <a:r>
+              <a:rPr lang="en-US" sz="1700" b="1" dirty="0">
+                <a:solidFill>
+                  <a:srgbClr val="17221A"/>
+                </a:solidFill>
+                <a:latin typeface="Arial" pitchFamily="34" charset="0"/>
+                <a:ea typeface="Arial" pitchFamily="34" charset="-122"/>
+                <a:cs typeface="Arial" pitchFamily="34" charset="-120"/>
+              </a:rPr>
+              <a:t>Design &amp; transition</a:t>
+            </a:r>
+            <a:endParaRPr lang="en-US" sz="1700" dirty="0"/>
+          </a:p>
+        </p:txBody>
+      </p:sp>
+      <p:sp>
+        <p:nvSpPr>
+          <p:cNvPr id="27" name="Text 24"/>
+          <p:cNvSpPr txBox="1"/>
+          <p:nvPr/>
+        </p:nvSpPr>
+        <p:spPr>
+          <a:xfrm>
+            <a:off x="777240" y="4526280"/>
+            <a:ext cx="3058058" cy="594360"/>
           </a:xfrm>
           <a:prstGeom prst="rect">
             <a:avLst/>
@@ -2600,46 +2847,7 @@
               <a:buNone/>
             </a:pPr>
             <a:r>
-              <a:rPr lang="en-US" sz="1900" b="1" dirty="0">
-                <a:solidFill>
-                  <a:srgbClr val="17221A"/>
-                </a:solidFill>
-                <a:latin typeface="Arial" pitchFamily="34" charset="0"/>
-                <a:ea typeface="Arial" pitchFamily="34" charset="-122"/>
-                <a:cs typeface="Arial" pitchFamily="34" charset="-120"/>
-              </a:rPr>
-              <a:t>Design &amp; transition</a:t>
-            </a:r>
-            <a:endParaRPr lang="en-US" sz="1900" dirty="0"/>
-          </a:p>
-        </p:txBody>
-      </p:sp>
-      <p:sp>
-        <p:nvSpPr>
-          <p:cNvPr id="26" name="Text 23"/>
-          <p:cNvSpPr txBox="1"/>
-          <p:nvPr/>
-        </p:nvSpPr>
-        <p:spPr>
-          <a:xfrm>
-            <a:off x="822960" y="4937760"/>
-            <a:ext cx="2966618" cy="365760"/>
-          </a:xfrm>
-          <a:prstGeom prst="rect">
-            <a:avLst/>
-          </a:prstGeom>
-          <a:noFill/>
-          <a:ln/>
-        </p:spPr>
-        <p:txBody>
-          <a:bodyPr wrap="square" lIns="0" tIns="0" rIns="0" bIns="0" rtlCol="0" anchor="t"/>
-          <a:lstStyle/>
-          <a:p>
-            <a:pPr indent="0" marL="0">
-              <a:buNone/>
-            </a:pPr>
-            <a:r>
-              <a:rPr lang="en-US" sz="1500" dirty="0">
+              <a:rPr lang="en-US" sz="1400" dirty="0">
                 <a:solidFill>
                   <a:srgbClr val="526066"/>
                 </a:solidFill>
@@ -2647,26 +2855,26 @@
                 <a:ea typeface="Arial" pitchFamily="34" charset="-122"/>
                 <a:cs typeface="Arial" pitchFamily="34" charset="-120"/>
               </a:rPr>
-              <a:t>R&amp;D designer og tester</a:t>
-            </a:r>
-            <a:endParaRPr lang="en-US" sz="1500" dirty="0"/>
-          </a:p>
-        </p:txBody>
-      </p:sp>
-      <p:sp>
-        <p:nvSpPr>
-          <p:cNvPr id="27" name="Shape 24"/>
+              <a:t>R&amp;D designer, tester og overdrager til drift</a:t>
+            </a:r>
+            <a:endParaRPr lang="en-US" sz="1400" dirty="0"/>
+          </a:p>
+        </p:txBody>
+      </p:sp>
+      <p:sp>
+        <p:nvSpPr>
+          <p:cNvPr id="28" name="Shape 25"/>
           <p:cNvSpPr/>
           <p:nvPr/>
         </p:nvSpPr>
         <p:spPr>
           <a:xfrm>
-            <a:off x="4338218" y="3703320"/>
-            <a:ext cx="3515258" cy="1691640"/>
+            <a:off x="4338218" y="3749040"/>
+            <a:ext cx="3515258" cy="1463040"/>
           </a:xfrm>
           <a:prstGeom prst="roundRect">
             <a:avLst>
-              <a:gd name="adj" fmla="val 6486"/>
+              <a:gd name="adj" fmla="val 7500"/>
             </a:avLst>
           </a:prstGeom>
           <a:solidFill>
@@ -2682,14 +2890,14 @@
       </p:sp>
       <p:sp>
         <p:nvSpPr>
-          <p:cNvPr id="28" name="Shape 25"/>
+          <p:cNvPr id="29" name="Shape 26"/>
           <p:cNvSpPr/>
           <p:nvPr/>
         </p:nvSpPr>
         <p:spPr>
           <a:xfrm>
-            <a:off x="4612538" y="3977640"/>
-            <a:ext cx="457200" cy="457200"/>
+            <a:off x="4566818" y="3977640"/>
+            <a:ext cx="411480" cy="411480"/>
           </a:xfrm>
           <a:prstGeom prst="ellipse">
             <a:avLst/>
@@ -2707,14 +2915,14 @@
       </p:sp>
       <p:sp>
         <p:nvSpPr>
-          <p:cNvPr id="29" name="Text 26"/>
-          <p:cNvSpPr txBox="1"/>
-          <p:nvPr/>
-        </p:nvSpPr>
-        <p:spPr>
-          <a:xfrm>
-            <a:off x="4612538" y="3977640"/>
-            <a:ext cx="457200" cy="457200"/>
+          <p:cNvPr id="30" name="Text 27"/>
+          <p:cNvSpPr txBox="1"/>
+          <p:nvPr/>
+        </p:nvSpPr>
+        <p:spPr>
+          <a:xfrm>
+            <a:off x="4566818" y="3977640"/>
+            <a:ext cx="411480" cy="411480"/>
           </a:xfrm>
           <a:prstGeom prst="rect">
             <a:avLst/>
@@ -2730,7 +2938,7 @@
               <a:buNone/>
             </a:pPr>
             <a:r>
-              <a:rPr lang="en-US" sz="1500" b="1" dirty="0">
+              <a:rPr lang="en-US" sz="1400" b="1" dirty="0">
                 <a:solidFill>
                   <a:srgbClr val="FFFFFF"/>
                 </a:solidFill>
@@ -2740,20 +2948,59 @@
               </a:rPr>
               <a:t>5</a:t>
             </a:r>
-            <a:endParaRPr lang="en-US" sz="1500" dirty="0"/>
-          </a:p>
-        </p:txBody>
-      </p:sp>
-      <p:sp>
-        <p:nvSpPr>
-          <p:cNvPr id="30" name="Text 27"/>
-          <p:cNvSpPr txBox="1"/>
-          <p:nvPr/>
-        </p:nvSpPr>
-        <p:spPr>
-          <a:xfrm>
-            <a:off x="4612538" y="4572000"/>
-            <a:ext cx="2966618" cy="365760"/>
+            <a:endParaRPr lang="en-US" sz="1400" dirty="0"/>
+          </a:p>
+        </p:txBody>
+      </p:sp>
+      <p:sp>
+        <p:nvSpPr>
+          <p:cNvPr id="31" name="Text 28"/>
+          <p:cNvSpPr txBox="1"/>
+          <p:nvPr/>
+        </p:nvSpPr>
+        <p:spPr>
+          <a:xfrm>
+            <a:off x="5115458" y="3950208"/>
+            <a:ext cx="2600858" cy="457200"/>
+          </a:xfrm>
+          <a:prstGeom prst="rect">
+            <a:avLst/>
+          </a:prstGeom>
+          <a:noFill/>
+          <a:ln/>
+        </p:spPr>
+        <p:txBody>
+          <a:bodyPr wrap="square" lIns="0" tIns="0" rIns="0" bIns="0" rtlCol="0" anchor="ctr"/>
+          <a:lstStyle/>
+          <a:p>
+            <a:pPr indent="0" marL="0">
+              <a:buNone/>
+            </a:pPr>
+            <a:r>
+              <a:rPr lang="en-US" sz="1700" b="1" dirty="0">
+                <a:solidFill>
+                  <a:srgbClr val="17221A"/>
+                </a:solidFill>
+                <a:latin typeface="Arial" pitchFamily="34" charset="0"/>
+                <a:ea typeface="Arial" pitchFamily="34" charset="-122"/>
+                <a:cs typeface="Arial" pitchFamily="34" charset="-120"/>
+              </a:rPr>
+              <a:t>Obtain/build</a:t>
+            </a:r>
+            <a:endParaRPr lang="en-US" sz="1700" dirty="0"/>
+          </a:p>
+        </p:txBody>
+      </p:sp>
+      <p:sp>
+        <p:nvSpPr>
+          <p:cNvPr id="32" name="Text 29"/>
+          <p:cNvSpPr txBox="1"/>
+          <p:nvPr/>
+        </p:nvSpPr>
+        <p:spPr>
+          <a:xfrm>
+            <a:off x="4566818" y="4526280"/>
+            <a:ext cx="3058058" cy="594360"/>
           </a:xfrm>
           <a:prstGeom prst="rect">
             <a:avLst/>
@@ -2769,46 +3016,7 @@
               <a:buNone/>
             </a:pPr>
             <a:r>
-              <a:rPr lang="en-US" sz="1900" b="1" dirty="0">
-                <a:solidFill>
-                  <a:srgbClr val="17221A"/>
-                </a:solidFill>
-                <a:latin typeface="Arial" pitchFamily="34" charset="0"/>
-                <a:ea typeface="Arial" pitchFamily="34" charset="-122"/>
-                <a:cs typeface="Arial" pitchFamily="34" charset="-120"/>
-              </a:rPr>
-              <a:t>Obtain/build</a:t>
-            </a:r>
-            <a:endParaRPr lang="en-US" sz="1900" dirty="0"/>
-          </a:p>
-        </p:txBody>
-      </p:sp>
-      <p:sp>
-        <p:nvSpPr>
-          <p:cNvPr id="31" name="Text 28"/>
-          <p:cNvSpPr txBox="1"/>
-          <p:nvPr/>
-        </p:nvSpPr>
-        <p:spPr>
-          <a:xfrm>
-            <a:off x="4612538" y="4937760"/>
-            <a:ext cx="2966618" cy="365760"/>
-          </a:xfrm>
-          <a:prstGeom prst="rect">
-            <a:avLst/>
-          </a:prstGeom>
-          <a:noFill/>
-          <a:ln/>
-        </p:spPr>
-        <p:txBody>
-          <a:bodyPr wrap="square" lIns="0" tIns="0" rIns="0" bIns="0" rtlCol="0" anchor="t"/>
-          <a:lstStyle/>
-          <a:p>
-            <a:pPr indent="0" marL="0">
-              <a:buNone/>
-            </a:pPr>
-            <a:r>
-              <a:rPr lang="en-US" sz="1500" dirty="0">
+              <a:rPr lang="en-US" sz="1400" dirty="0">
                 <a:solidFill>
                   <a:srgbClr val="526066"/>
                 </a:solidFill>
@@ -2816,26 +3024,26 @@
                 <a:ea typeface="Arial" pitchFamily="34" charset="-122"/>
                 <a:cs typeface="Arial" pitchFamily="34" charset="-120"/>
               </a:rPr>
-              <a:t>Fabrikken laver sensorer</a:t>
-            </a:r>
-            <a:endParaRPr lang="en-US" sz="1500" dirty="0"/>
-          </a:p>
-        </p:txBody>
-      </p:sp>
-      <p:sp>
-        <p:nvSpPr>
-          <p:cNvPr id="32" name="Shape 29"/>
+              <a:t>Fabrikken laver sensorerne</a:t>
+            </a:r>
+            <a:endParaRPr lang="en-US" sz="1400" dirty="0"/>
+          </a:p>
+        </p:txBody>
+      </p:sp>
+      <p:sp>
+        <p:nvSpPr>
+          <p:cNvPr id="33" name="Shape 30"/>
           <p:cNvSpPr/>
           <p:nvPr/>
         </p:nvSpPr>
         <p:spPr>
           <a:xfrm>
-            <a:off x="8127797" y="3703320"/>
-            <a:ext cx="3515258" cy="1691640"/>
+            <a:off x="8127797" y="3749040"/>
+            <a:ext cx="3515258" cy="1463040"/>
           </a:xfrm>
           <a:prstGeom prst="roundRect">
             <a:avLst>
-              <a:gd name="adj" fmla="val 6486"/>
+              <a:gd name="adj" fmla="val 7500"/>
             </a:avLst>
           </a:prstGeom>
           <a:solidFill>
@@ -2851,14 +3059,14 @@
       </p:sp>
       <p:sp>
         <p:nvSpPr>
-          <p:cNvPr id="33" name="Shape 30"/>
+          <p:cNvPr id="34" name="Shape 31"/>
           <p:cNvSpPr/>
           <p:nvPr/>
         </p:nvSpPr>
         <p:spPr>
           <a:xfrm>
-            <a:off x="8402117" y="3977640"/>
-            <a:ext cx="457200" cy="457200"/>
+            <a:off x="8356397" y="3977640"/>
+            <a:ext cx="411480" cy="411480"/>
           </a:xfrm>
           <a:prstGeom prst="ellipse">
             <a:avLst/>
@@ -2876,14 +3084,14 @@
       </p:sp>
       <p:sp>
         <p:nvSpPr>
-          <p:cNvPr id="34" name="Text 31"/>
-          <p:cNvSpPr txBox="1"/>
-          <p:nvPr/>
-        </p:nvSpPr>
-        <p:spPr>
-          <a:xfrm>
-            <a:off x="8402117" y="3977640"/>
-            <a:ext cx="457200" cy="457200"/>
+          <p:cNvPr id="35" name="Text 32"/>
+          <p:cNvSpPr txBox="1"/>
+          <p:nvPr/>
+        </p:nvSpPr>
+        <p:spPr>
+          <a:xfrm>
+            <a:off x="8356397" y="3977640"/>
+            <a:ext cx="411480" cy="411480"/>
           </a:xfrm>
           <a:prstGeom prst="rect">
             <a:avLst/>
@@ -2899,7 +3107,7 @@
               <a:buNone/>
             </a:pPr>
             <a:r>
-              <a:rPr lang="en-US" sz="1500" b="1" dirty="0">
+              <a:rPr lang="en-US" sz="1400" b="1" dirty="0">
                 <a:solidFill>
                   <a:srgbClr val="FFFFFF"/>
                 </a:solidFill>
@@ -2909,20 +3117,59 @@
               </a:rPr>
               <a:t>6</a:t>
             </a:r>
-            <a:endParaRPr lang="en-US" sz="1500" dirty="0"/>
-          </a:p>
-        </p:txBody>
-      </p:sp>
-      <p:sp>
-        <p:nvSpPr>
-          <p:cNvPr id="35" name="Text 32"/>
-          <p:cNvSpPr txBox="1"/>
-          <p:nvPr/>
-        </p:nvSpPr>
-        <p:spPr>
-          <a:xfrm>
-            <a:off x="8402117" y="4572000"/>
-            <a:ext cx="2966618" cy="365760"/>
+            <a:endParaRPr lang="en-US" sz="1400" dirty="0"/>
+          </a:p>
+        </p:txBody>
+      </p:sp>
+      <p:sp>
+        <p:nvSpPr>
+          <p:cNvPr id="36" name="Text 33"/>
+          <p:cNvSpPr txBox="1"/>
+          <p:nvPr/>
+        </p:nvSpPr>
+        <p:spPr>
+          <a:xfrm>
+            <a:off x="8905037" y="3950208"/>
+            <a:ext cx="2600858" cy="457200"/>
+          </a:xfrm>
+          <a:prstGeom prst="rect">
+            <a:avLst/>
+          </a:prstGeom>
+          <a:noFill/>
+          <a:ln/>
+        </p:spPr>
+        <p:txBody>
+          <a:bodyPr wrap="square" lIns="0" tIns="0" rIns="0" bIns="0" rtlCol="0" anchor="ctr"/>
+          <a:lstStyle/>
+          <a:p>
+            <a:pPr indent="0" marL="0">
+              <a:buNone/>
+            </a:pPr>
+            <a:r>
+              <a:rPr lang="en-US" sz="1700" b="1" dirty="0">
+                <a:solidFill>
+                  <a:srgbClr val="17221A"/>
+                </a:solidFill>
+                <a:latin typeface="Arial" pitchFamily="34" charset="0"/>
+                <a:ea typeface="Arial" pitchFamily="34" charset="-122"/>
+                <a:cs typeface="Arial" pitchFamily="34" charset="-120"/>
+              </a:rPr>
+              <a:t>Deliver &amp; support</a:t>
+            </a:r>
+            <a:endParaRPr lang="en-US" sz="1700" dirty="0"/>
+          </a:p>
+        </p:txBody>
+      </p:sp>
+      <p:sp>
+        <p:nvSpPr>
+          <p:cNvPr id="37" name="Text 34"/>
+          <p:cNvSpPr txBox="1"/>
+          <p:nvPr/>
+        </p:nvSpPr>
+        <p:spPr>
+          <a:xfrm>
+            <a:off x="8356397" y="4526280"/>
+            <a:ext cx="3058058" cy="594360"/>
           </a:xfrm>
           <a:prstGeom prst="rect">
             <a:avLst/>
@@ -2938,46 +3185,7 @@
               <a:buNone/>
             </a:pPr>
             <a:r>
-              <a:rPr lang="en-US" sz="1900" b="1" dirty="0">
-                <a:solidFill>
-                  <a:srgbClr val="17221A"/>
-                </a:solidFill>
-                <a:latin typeface="Arial" pitchFamily="34" charset="0"/>
-                <a:ea typeface="Arial" pitchFamily="34" charset="-122"/>
-                <a:cs typeface="Arial" pitchFamily="34" charset="-120"/>
-              </a:rPr>
-              <a:t>Deliver &amp; support</a:t>
-            </a:r>
-            <a:endParaRPr lang="en-US" sz="1900" dirty="0"/>
-          </a:p>
-        </p:txBody>
-      </p:sp>
-      <p:sp>
-        <p:nvSpPr>
-          <p:cNvPr id="36" name="Text 33"/>
-          <p:cNvSpPr txBox="1"/>
-          <p:nvPr/>
-        </p:nvSpPr>
-        <p:spPr>
-          <a:xfrm>
-            <a:off x="8402117" y="4937760"/>
-            <a:ext cx="2966618" cy="365760"/>
-          </a:xfrm>
-          <a:prstGeom prst="rect">
-            <a:avLst/>
-          </a:prstGeom>
-          <a:noFill/>
-          <a:ln/>
-        </p:spPr>
-        <p:txBody>
-          <a:bodyPr wrap="square" lIns="0" tIns="0" rIns="0" bIns="0" rtlCol="0" anchor="t"/>
-          <a:lstStyle/>
-          <a:p>
-            <a:pPr indent="0" marL="0">
-              <a:buNone/>
-            </a:pPr>
-            <a:r>
-              <a:rPr lang="en-US" sz="1500" dirty="0">
+              <a:rPr lang="en-US" sz="1400" dirty="0">
                 <a:solidFill>
                   <a:srgbClr val="526066"/>
                 </a:solidFill>
@@ -2985,26 +3193,26 @@
                 <a:ea typeface="Arial" pitchFamily="34" charset="-122"/>
                 <a:cs typeface="Arial" pitchFamily="34" charset="-120"/>
               </a:rPr>
-              <a:t>Værksted og servicedesk</a:t>
-            </a:r>
-            <a:endParaRPr lang="en-US" sz="1500" dirty="0"/>
-          </a:p>
-        </p:txBody>
-      </p:sp>
-      <p:sp>
-        <p:nvSpPr>
-          <p:cNvPr id="37" name="Shape 34"/>
+              <a:t>Værkstedet installerer, servicedesken hjælper</a:t>
+            </a:r>
+            <a:endParaRPr lang="en-US" sz="1400" dirty="0"/>
+          </a:p>
+        </p:txBody>
+      </p:sp>
+      <p:sp>
+        <p:nvSpPr>
+          <p:cNvPr id="38" name="Shape 35"/>
           <p:cNvSpPr/>
           <p:nvPr/>
         </p:nvSpPr>
         <p:spPr>
           <a:xfrm>
-            <a:off x="548640" y="5715000"/>
-            <a:ext cx="11094415" cy="548640"/>
+            <a:off x="548640" y="5486400"/>
+            <a:ext cx="11094415" cy="777240"/>
           </a:xfrm>
           <a:prstGeom prst="roundRect">
             <a:avLst>
-              <a:gd name="adj" fmla="val 20000"/>
+              <a:gd name="adj" fmla="val 14118"/>
             </a:avLst>
           </a:prstGeom>
           <a:solidFill>
@@ -3020,14 +3228,14 @@
       </p:sp>
       <p:sp>
         <p:nvSpPr>
-          <p:cNvPr id="38" name="Text 35"/>
-          <p:cNvSpPr txBox="1"/>
-          <p:nvPr/>
-        </p:nvSpPr>
-        <p:spPr>
-          <a:xfrm>
-            <a:off x="822960" y="5715000"/>
-            <a:ext cx="10545775" cy="548640"/>
+          <p:cNvPr id="39" name="Text 36"/>
+          <p:cNvSpPr txBox="1"/>
+          <p:nvPr/>
+        </p:nvSpPr>
+        <p:spPr>
+          <a:xfrm>
+            <a:off x="822960" y="5486400"/>
+            <a:ext cx="10545775" cy="777240"/>
           </a:xfrm>
           <a:prstGeom prst="rect">
             <a:avLst/>
@@ -3043,7 +3251,7 @@
               <a:buNone/>
             </a:pPr>
             <a:r>
-              <a:rPr lang="en-US" sz="1600" b="1" dirty="0">
+              <a:rPr lang="en-US" sz="1500" b="1" dirty="0">
                 <a:solidFill>
                   <a:srgbClr val="1E4A26"/>
                 </a:solidFill>
@@ -3051,13 +3259,13 @@
                 <a:ea typeface="Arial" pitchFamily="34" charset="-122"/>
                 <a:cs typeface="Arial" pitchFamily="34" charset="-120"/>
               </a:rPr>
-              <a:t>Forslag  </a:t>
+              <a:t>Ikke afdelinger.  </a:t>
             </a:r>
             <a:pPr indent="0" marL="0">
               <a:buNone/>
             </a:pPr>
             <a:r>
-              <a:rPr lang="en-US" sz="1600" dirty="0">
+              <a:rPr lang="en-US" sz="1500" dirty="0">
                 <a:solidFill>
                   <a:srgbClr val="1E4A26"/>
                 </a:solidFill>
@@ -3065,9 +3273,9 @@
                 <a:ea typeface="Arial" pitchFamily="34" charset="-122"/>
                 <a:cs typeface="Arial" pitchFamily="34" charset="-120"/>
               </a:rPr>
-              <a:t>hver aktivitet får en ansvarlig på tværs af lokationerne</a:t>
-            </a:r>
-            <a:endParaRPr lang="en-US" sz="1600" dirty="0"/>
+              <a:t>Forslag: én ansvarlig pr. aktivitet, så intet ryger ned mellem byen, fabrikken og Jylland</a:t>
+            </a:r>
+            <a:endParaRPr lang="en-US" sz="1500" dirty="0"/>
           </a:p>
         </p:txBody>
       </p:sp>
@@ -3175,7 +3383,7 @@
                 <a:ea typeface="Georgia" pitchFamily="34" charset="-122"/>
                 <a:cs typeface="Georgia" pitchFamily="34" charset="-120"/>
               </a:rPr>
-              <a:t>Ikke et samlebånd</a:t>
+              <a:t>Eksempel: ikke et samlebånd</a:t>
             </a:r>
             <a:endParaRPr lang="en-US" sz="3200" dirty="0"/>
           </a:p>
@@ -3267,7 +3475,7 @@
         </p:nvSpPr>
         <p:spPr>
           <a:xfrm>
-            <a:off x="548640" y="1645920"/>
+            <a:off x="548640" y="1508760"/>
             <a:ext cx="11094415" cy="274320"/>
           </a:xfrm>
           <a:prstGeom prst="rect">
@@ -3306,12 +3514,12 @@
         </p:nvSpPr>
         <p:spPr>
           <a:xfrm>
-            <a:off x="548640" y="2103120"/>
-            <a:ext cx="1443838" cy="1371600"/>
+            <a:off x="548640" y="1920240"/>
+            <a:ext cx="1467351" cy="1828800"/>
           </a:xfrm>
           <a:prstGeom prst="roundRect">
             <a:avLst>
-              <a:gd name="adj" fmla="val 8000"/>
+              <a:gd name="adj" fmla="val 7478"/>
             </a:avLst>
           </a:prstGeom>
           <a:solidFill>
@@ -3333,8 +3541,8 @@
         </p:nvSpPr>
         <p:spPr>
           <a:xfrm>
-            <a:off x="548640" y="2194560"/>
-            <a:ext cx="1443838" cy="365760"/>
+            <a:off x="548640" y="2011680"/>
+            <a:ext cx="1467351" cy="320040"/>
           </a:xfrm>
           <a:prstGeom prst="rect">
             <a:avLst/>
@@ -3372,8 +3580,8 @@
         </p:nvSpPr>
         <p:spPr>
           <a:xfrm>
-            <a:off x="548640" y="2606040"/>
-            <a:ext cx="1443838" cy="640080"/>
+            <a:off x="548640" y="2331720"/>
+            <a:ext cx="1467351" cy="457200"/>
           </a:xfrm>
           <a:prstGeom prst="rect">
             <a:avLst/>
@@ -3405,18 +3613,57 @@
       </p:sp>
       <p:sp>
         <p:nvSpPr>
-          <p:cNvPr id="11" name="Shape 8"/>
+          <p:cNvPr id="11" name="Text 8"/>
+          <p:cNvSpPr txBox="1"/>
+          <p:nvPr/>
+        </p:nvSpPr>
+        <p:spPr>
+          <a:xfrm>
+            <a:off x="621792" y="2834640"/>
+            <a:ext cx="1321047" cy="822960"/>
+          </a:xfrm>
+          <a:prstGeom prst="rect">
+            <a:avLst/>
+          </a:prstGeom>
+          <a:noFill/>
+          <a:ln/>
+        </p:spPr>
+        <p:txBody>
+          <a:bodyPr wrap="square" lIns="0" tIns="0" rIns="0" bIns="0" rtlCol="0" anchor="t"/>
+          <a:lstStyle/>
+          <a:p>
+            <a:pPr algn="ctr" indent="0" marL="0">
+              <a:buNone/>
+            </a:pPr>
+            <a:r>
+              <a:rPr lang="en-US" sz="1300" dirty="0">
+                <a:solidFill>
+                  <a:srgbClr val="526066"/>
+                </a:solidFill>
+                <a:latin typeface="Arial" pitchFamily="34" charset="0"/>
+                <a:ea typeface="Arial" pitchFamily="34" charset="-122"/>
+                <a:cs typeface="Arial" pitchFamily="34" charset="-120"/>
+              </a:rPr>
+              <a:t>Sælgeren finder behovet</a:t>
+            </a:r>
+            <a:endParaRPr lang="en-US" sz="1300" dirty="0"/>
+          </a:p>
+        </p:txBody>
+      </p:sp>
+      <p:sp>
+        <p:nvSpPr>
+          <p:cNvPr id="12" name="Shape 9"/>
           <p:cNvSpPr/>
           <p:nvPr/>
         </p:nvSpPr>
         <p:spPr>
           <a:xfrm>
-            <a:off x="2157070" y="2103120"/>
-            <a:ext cx="1443838" cy="1371600"/>
+            <a:off x="2153151" y="1920240"/>
+            <a:ext cx="1467351" cy="1828800"/>
           </a:xfrm>
           <a:prstGeom prst="roundRect">
             <a:avLst>
-              <a:gd name="adj" fmla="val 8000"/>
+              <a:gd name="adj" fmla="val 7478"/>
             </a:avLst>
           </a:prstGeom>
           <a:solidFill>
@@ -3432,14 +3679,14 @@
       </p:sp>
       <p:sp>
         <p:nvSpPr>
-          <p:cNvPr id="12" name="Text 9"/>
-          <p:cNvSpPr txBox="1"/>
-          <p:nvPr/>
-        </p:nvSpPr>
-        <p:spPr>
-          <a:xfrm>
-            <a:off x="2157070" y="2194560"/>
-            <a:ext cx="1443838" cy="365760"/>
+          <p:cNvPr id="13" name="Text 10"/>
+          <p:cNvSpPr txBox="1"/>
+          <p:nvPr/>
+        </p:nvSpPr>
+        <p:spPr>
+          <a:xfrm>
+            <a:off x="2153151" y="2011680"/>
+            <a:ext cx="1467351" cy="320040"/>
           </a:xfrm>
           <a:prstGeom prst="rect">
             <a:avLst/>
@@ -3471,14 +3718,14 @@
       </p:sp>
       <p:sp>
         <p:nvSpPr>
-          <p:cNvPr id="13" name="Text 10"/>
-          <p:cNvSpPr txBox="1"/>
-          <p:nvPr/>
-        </p:nvSpPr>
-        <p:spPr>
-          <a:xfrm>
-            <a:off x="2157070" y="2606040"/>
-            <a:ext cx="1443838" cy="640080"/>
+          <p:cNvPr id="14" name="Text 11"/>
+          <p:cNvSpPr txBox="1"/>
+          <p:nvPr/>
+        </p:nvSpPr>
+        <p:spPr>
+          <a:xfrm>
+            <a:off x="2153151" y="2331720"/>
+            <a:ext cx="1467351" cy="457200"/>
           </a:xfrm>
           <a:prstGeom prst="rect">
             <a:avLst/>
@@ -3510,18 +3757,57 @@
       </p:sp>
       <p:sp>
         <p:nvSpPr>
-          <p:cNvPr id="14" name="Shape 11"/>
+          <p:cNvPr id="15" name="Text 12"/>
+          <p:cNvSpPr txBox="1"/>
+          <p:nvPr/>
+        </p:nvSpPr>
+        <p:spPr>
+          <a:xfrm>
+            <a:off x="2226303" y="2834640"/>
+            <a:ext cx="1321047" cy="822960"/>
+          </a:xfrm>
+          <a:prstGeom prst="rect">
+            <a:avLst/>
+          </a:prstGeom>
+          <a:noFill/>
+          <a:ln/>
+        </p:spPr>
+        <p:txBody>
+          <a:bodyPr wrap="square" lIns="0" tIns="0" rIns="0" bIns="0" rtlCol="0" anchor="t"/>
+          <a:lstStyle/>
+          <a:p>
+            <a:pPr algn="ctr" indent="0" marL="0">
+              <a:buNone/>
+            </a:pPr>
+            <a:r>
+              <a:rPr lang="en-US" sz="1300" dirty="0">
+                <a:solidFill>
+                  <a:srgbClr val="526066"/>
+                </a:solidFill>
+                <a:latin typeface="Arial" pitchFamily="34" charset="0"/>
+                <a:ea typeface="Arial" pitchFamily="34" charset="-122"/>
+                <a:cs typeface="Arial" pitchFamily="34" charset="-120"/>
+              </a:rPr>
+              <a:t>R&amp;D tilpasser</a:t>
+            </a:r>
+            <a:endParaRPr lang="en-US" sz="1300" dirty="0"/>
+          </a:p>
+        </p:txBody>
+      </p:sp>
+      <p:sp>
+        <p:nvSpPr>
+          <p:cNvPr id="16" name="Shape 13"/>
           <p:cNvSpPr/>
           <p:nvPr/>
         </p:nvSpPr>
         <p:spPr>
           <a:xfrm>
-            <a:off x="3765499" y="2103120"/>
-            <a:ext cx="1443838" cy="1371600"/>
+            <a:off x="3757661" y="1920240"/>
+            <a:ext cx="1467351" cy="1828800"/>
           </a:xfrm>
           <a:prstGeom prst="roundRect">
             <a:avLst>
-              <a:gd name="adj" fmla="val 8000"/>
+              <a:gd name="adj" fmla="val 7478"/>
             </a:avLst>
           </a:prstGeom>
           <a:solidFill>
@@ -3537,14 +3823,14 @@
       </p:sp>
       <p:sp>
         <p:nvSpPr>
-          <p:cNvPr id="15" name="Text 12"/>
-          <p:cNvSpPr txBox="1"/>
-          <p:nvPr/>
-        </p:nvSpPr>
-        <p:spPr>
-          <a:xfrm>
-            <a:off x="3765499" y="2194560"/>
-            <a:ext cx="1443838" cy="365760"/>
+          <p:cNvPr id="17" name="Text 14"/>
+          <p:cNvSpPr txBox="1"/>
+          <p:nvPr/>
+        </p:nvSpPr>
+        <p:spPr>
+          <a:xfrm>
+            <a:off x="3757661" y="2011680"/>
+            <a:ext cx="1467351" cy="320040"/>
           </a:xfrm>
           <a:prstGeom prst="rect">
             <a:avLst/>
@@ -3576,14 +3862,14 @@
       </p:sp>
       <p:sp>
         <p:nvSpPr>
-          <p:cNvPr id="16" name="Text 13"/>
-          <p:cNvSpPr txBox="1"/>
-          <p:nvPr/>
-        </p:nvSpPr>
-        <p:spPr>
-          <a:xfrm>
-            <a:off x="3765499" y="2606040"/>
-            <a:ext cx="1443838" cy="640080"/>
+          <p:cNvPr id="18" name="Text 15"/>
+          <p:cNvSpPr txBox="1"/>
+          <p:nvPr/>
+        </p:nvSpPr>
+        <p:spPr>
+          <a:xfrm>
+            <a:off x="3757661" y="2331720"/>
+            <a:ext cx="1467351" cy="457200"/>
           </a:xfrm>
           <a:prstGeom prst="rect">
             <a:avLst/>
@@ -3615,18 +3901,57 @@
       </p:sp>
       <p:sp>
         <p:nvSpPr>
-          <p:cNvPr id="17" name="Shape 14"/>
+          <p:cNvPr id="19" name="Text 16"/>
+          <p:cNvSpPr txBox="1"/>
+          <p:nvPr/>
+        </p:nvSpPr>
+        <p:spPr>
+          <a:xfrm>
+            <a:off x="3830813" y="2834640"/>
+            <a:ext cx="1321047" cy="822960"/>
+          </a:xfrm>
+          <a:prstGeom prst="rect">
+            <a:avLst/>
+          </a:prstGeom>
+          <a:noFill/>
+          <a:ln/>
+        </p:spPr>
+        <p:txBody>
+          <a:bodyPr wrap="square" lIns="0" tIns="0" rIns="0" bIns="0" rtlCol="0" anchor="t"/>
+          <a:lstStyle/>
+          <a:p>
+            <a:pPr algn="ctr" indent="0" marL="0">
+              <a:buNone/>
+            </a:pPr>
+            <a:r>
+              <a:rPr lang="en-US" sz="1300" dirty="0">
+                <a:solidFill>
+                  <a:srgbClr val="526066"/>
+                </a:solidFill>
+                <a:latin typeface="Arial" pitchFamily="34" charset="0"/>
+                <a:ea typeface="Arial" pitchFamily="34" charset="-122"/>
+                <a:cs typeface="Arial" pitchFamily="34" charset="-120"/>
+              </a:rPr>
+              <a:t>Fabrikken laver sensorer</a:t>
+            </a:r>
+            <a:endParaRPr lang="en-US" sz="1300" dirty="0"/>
+          </a:p>
+        </p:txBody>
+      </p:sp>
+      <p:sp>
+        <p:nvSpPr>
+          <p:cNvPr id="20" name="Shape 17"/>
           <p:cNvSpPr/>
           <p:nvPr/>
         </p:nvSpPr>
         <p:spPr>
           <a:xfrm>
-            <a:off x="5373929" y="2103120"/>
-            <a:ext cx="1443838" cy="1371600"/>
+            <a:off x="5362172" y="1920240"/>
+            <a:ext cx="1467351" cy="1828800"/>
           </a:xfrm>
           <a:prstGeom prst="roundRect">
             <a:avLst>
-              <a:gd name="adj" fmla="val 8000"/>
+              <a:gd name="adj" fmla="val 7478"/>
             </a:avLst>
           </a:prstGeom>
           <a:solidFill>
@@ -3642,14 +3967,14 @@
       </p:sp>
       <p:sp>
         <p:nvSpPr>
-          <p:cNvPr id="18" name="Text 15"/>
-          <p:cNvSpPr txBox="1"/>
-          <p:nvPr/>
-        </p:nvSpPr>
-        <p:spPr>
-          <a:xfrm>
-            <a:off x="5373929" y="2194560"/>
-            <a:ext cx="1443838" cy="365760"/>
+          <p:cNvPr id="21" name="Text 18"/>
+          <p:cNvSpPr txBox="1"/>
+          <p:nvPr/>
+        </p:nvSpPr>
+        <p:spPr>
+          <a:xfrm>
+            <a:off x="5362172" y="2011680"/>
+            <a:ext cx="1467351" cy="320040"/>
           </a:xfrm>
           <a:prstGeom prst="rect">
             <a:avLst/>
@@ -3681,14 +4006,14 @@
       </p:sp>
       <p:sp>
         <p:nvSpPr>
-          <p:cNvPr id="19" name="Text 16"/>
-          <p:cNvSpPr txBox="1"/>
-          <p:nvPr/>
-        </p:nvSpPr>
-        <p:spPr>
-          <a:xfrm>
-            <a:off x="5373929" y="2606040"/>
-            <a:ext cx="1443838" cy="640080"/>
+          <p:cNvPr id="22" name="Text 19"/>
+          <p:cNvSpPr txBox="1"/>
+          <p:nvPr/>
+        </p:nvSpPr>
+        <p:spPr>
+          <a:xfrm>
+            <a:off x="5362172" y="2331720"/>
+            <a:ext cx="1467351" cy="457200"/>
           </a:xfrm>
           <a:prstGeom prst="rect">
             <a:avLst/>
@@ -3720,18 +4045,57 @@
       </p:sp>
       <p:sp>
         <p:nvSpPr>
-          <p:cNvPr id="20" name="Shape 17"/>
+          <p:cNvPr id="23" name="Text 20"/>
+          <p:cNvSpPr txBox="1"/>
+          <p:nvPr/>
+        </p:nvSpPr>
+        <p:spPr>
+          <a:xfrm>
+            <a:off x="5435324" y="2834640"/>
+            <a:ext cx="1321047" cy="822960"/>
+          </a:xfrm>
+          <a:prstGeom prst="rect">
+            <a:avLst/>
+          </a:prstGeom>
+          <a:noFill/>
+          <a:ln/>
+        </p:spPr>
+        <p:txBody>
+          <a:bodyPr wrap="square" lIns="0" tIns="0" rIns="0" bIns="0" rtlCol="0" anchor="t"/>
+          <a:lstStyle/>
+          <a:p>
+            <a:pPr algn="ctr" indent="0" marL="0">
+              <a:buNone/>
+            </a:pPr>
+            <a:r>
+              <a:rPr lang="en-US" sz="1300" dirty="0">
+                <a:solidFill>
+                  <a:srgbClr val="526066"/>
+                </a:solidFill>
+                <a:latin typeface="Arial" pitchFamily="34" charset="0"/>
+                <a:ea typeface="Arial" pitchFamily="34" charset="-122"/>
+                <a:cs typeface="Arial" pitchFamily="34" charset="-120"/>
+              </a:rPr>
+              <a:t>Testes og overdrages</a:t>
+            </a:r>
+            <a:endParaRPr lang="en-US" sz="1300" dirty="0"/>
+          </a:p>
+        </p:txBody>
+      </p:sp>
+      <p:sp>
+        <p:nvSpPr>
+          <p:cNvPr id="24" name="Shape 21"/>
           <p:cNvSpPr/>
           <p:nvPr/>
         </p:nvSpPr>
         <p:spPr>
           <a:xfrm>
-            <a:off x="6982358" y="2103120"/>
-            <a:ext cx="1443838" cy="1371600"/>
+            <a:off x="6966683" y="1920240"/>
+            <a:ext cx="1467351" cy="1828800"/>
           </a:xfrm>
           <a:prstGeom prst="roundRect">
             <a:avLst>
-              <a:gd name="adj" fmla="val 8000"/>
+              <a:gd name="adj" fmla="val 7478"/>
             </a:avLst>
           </a:prstGeom>
           <a:solidFill>
@@ -3747,14 +4111,14 @@
       </p:sp>
       <p:sp>
         <p:nvSpPr>
-          <p:cNvPr id="21" name="Text 18"/>
-          <p:cNvSpPr txBox="1"/>
-          <p:nvPr/>
-        </p:nvSpPr>
-        <p:spPr>
-          <a:xfrm>
-            <a:off x="6982358" y="2194560"/>
-            <a:ext cx="1443838" cy="365760"/>
+          <p:cNvPr id="25" name="Text 22"/>
+          <p:cNvSpPr txBox="1"/>
+          <p:nvPr/>
+        </p:nvSpPr>
+        <p:spPr>
+          <a:xfrm>
+            <a:off x="6966683" y="2011680"/>
+            <a:ext cx="1467351" cy="320040"/>
           </a:xfrm>
           <a:prstGeom prst="rect">
             <a:avLst/>
@@ -3786,14 +4150,14 @@
       </p:sp>
       <p:sp>
         <p:nvSpPr>
-          <p:cNvPr id="22" name="Text 19"/>
-          <p:cNvSpPr txBox="1"/>
-          <p:nvPr/>
-        </p:nvSpPr>
-        <p:spPr>
-          <a:xfrm>
-            <a:off x="6982358" y="2606040"/>
-            <a:ext cx="1443838" cy="640080"/>
+          <p:cNvPr id="26" name="Text 23"/>
+          <p:cNvSpPr txBox="1"/>
+          <p:nvPr/>
+        </p:nvSpPr>
+        <p:spPr>
+          <a:xfrm>
+            <a:off x="6966683" y="2331720"/>
+            <a:ext cx="1467351" cy="457200"/>
           </a:xfrm>
           <a:prstGeom prst="rect">
             <a:avLst/>
@@ -3825,18 +4189,57 @@
       </p:sp>
       <p:sp>
         <p:nvSpPr>
-          <p:cNvPr id="23" name="Shape 20"/>
+          <p:cNvPr id="27" name="Text 24"/>
+          <p:cNvSpPr txBox="1"/>
+          <p:nvPr/>
+        </p:nvSpPr>
+        <p:spPr>
+          <a:xfrm>
+            <a:off x="7039835" y="2834640"/>
+            <a:ext cx="1321047" cy="822960"/>
+          </a:xfrm>
+          <a:prstGeom prst="rect">
+            <a:avLst/>
+          </a:prstGeom>
+          <a:noFill/>
+          <a:ln/>
+        </p:spPr>
+        <p:txBody>
+          <a:bodyPr wrap="square" lIns="0" tIns="0" rIns="0" bIns="0" rtlCol="0" anchor="t"/>
+          <a:lstStyle/>
+          <a:p>
+            <a:pPr algn="ctr" indent="0" marL="0">
+              <a:buNone/>
+            </a:pPr>
+            <a:r>
+              <a:rPr lang="en-US" sz="1300" dirty="0">
+                <a:solidFill>
+                  <a:srgbClr val="526066"/>
+                </a:solidFill>
+                <a:latin typeface="Arial" pitchFamily="34" charset="0"/>
+                <a:ea typeface="Arial" pitchFamily="34" charset="-122"/>
+                <a:cs typeface="Arial" pitchFamily="34" charset="-120"/>
+              </a:rPr>
+              <a:t>Værkstedet installerer</a:t>
+            </a:r>
+            <a:endParaRPr lang="en-US" sz="1300" dirty="0"/>
+          </a:p>
+        </p:txBody>
+      </p:sp>
+      <p:sp>
+        <p:nvSpPr>
+          <p:cNvPr id="28" name="Shape 25"/>
           <p:cNvSpPr/>
           <p:nvPr/>
         </p:nvSpPr>
         <p:spPr>
           <a:xfrm>
-            <a:off x="8590788" y="2103120"/>
-            <a:ext cx="1443838" cy="1371600"/>
+            <a:off x="8571194" y="1920240"/>
+            <a:ext cx="1467351" cy="1828800"/>
           </a:xfrm>
           <a:prstGeom prst="roundRect">
             <a:avLst>
-              <a:gd name="adj" fmla="val 8000"/>
+              <a:gd name="adj" fmla="val 7478"/>
             </a:avLst>
           </a:prstGeom>
           <a:solidFill>
@@ -3852,14 +4255,14 @@
       </p:sp>
       <p:sp>
         <p:nvSpPr>
-          <p:cNvPr id="24" name="Text 21"/>
-          <p:cNvSpPr txBox="1"/>
-          <p:nvPr/>
-        </p:nvSpPr>
-        <p:spPr>
-          <a:xfrm>
-            <a:off x="8590788" y="2194560"/>
-            <a:ext cx="1443838" cy="365760"/>
+          <p:cNvPr id="29" name="Text 26"/>
+          <p:cNvSpPr txBox="1"/>
+          <p:nvPr/>
+        </p:nvSpPr>
+        <p:spPr>
+          <a:xfrm>
+            <a:off x="8571194" y="2011680"/>
+            <a:ext cx="1467351" cy="320040"/>
           </a:xfrm>
           <a:prstGeom prst="rect">
             <a:avLst/>
@@ -3891,14 +4294,14 @@
       </p:sp>
       <p:sp>
         <p:nvSpPr>
-          <p:cNvPr id="25" name="Text 22"/>
-          <p:cNvSpPr txBox="1"/>
-          <p:nvPr/>
-        </p:nvSpPr>
-        <p:spPr>
-          <a:xfrm>
-            <a:off x="8590788" y="2606040"/>
-            <a:ext cx="1443838" cy="640080"/>
+          <p:cNvPr id="30" name="Text 27"/>
+          <p:cNvSpPr txBox="1"/>
+          <p:nvPr/>
+        </p:nvSpPr>
+        <p:spPr>
+          <a:xfrm>
+            <a:off x="8571194" y="2331720"/>
+            <a:ext cx="1467351" cy="457200"/>
           </a:xfrm>
           <a:prstGeom prst="rect">
             <a:avLst/>
@@ -3930,18 +4333,57 @@
       </p:sp>
       <p:sp>
         <p:nvSpPr>
-          <p:cNvPr id="26" name="Shape 23"/>
+          <p:cNvPr id="31" name="Text 28"/>
+          <p:cNvSpPr txBox="1"/>
+          <p:nvPr/>
+        </p:nvSpPr>
+        <p:spPr>
+          <a:xfrm>
+            <a:off x="8644346" y="2834640"/>
+            <a:ext cx="1321047" cy="822960"/>
+          </a:xfrm>
+          <a:prstGeom prst="rect">
+            <a:avLst/>
+          </a:prstGeom>
+          <a:noFill/>
+          <a:ln/>
+        </p:spPr>
+        <p:txBody>
+          <a:bodyPr wrap="square" lIns="0" tIns="0" rIns="0" bIns="0" rtlCol="0" anchor="t"/>
+          <a:lstStyle/>
+          <a:p>
+            <a:pPr algn="ctr" indent="0" marL="0">
+              <a:buNone/>
+            </a:pPr>
+            <a:r>
+              <a:rPr lang="en-US" sz="1300" dirty="0">
+                <a:solidFill>
+                  <a:srgbClr val="526066"/>
+                </a:solidFill>
+                <a:latin typeface="Arial" pitchFamily="34" charset="0"/>
+                <a:ea typeface="Arial" pitchFamily="34" charset="-122"/>
+                <a:cs typeface="Arial" pitchFamily="34" charset="-120"/>
+              </a:rPr>
+              <a:t>Opfølgning efter en måned</a:t>
+            </a:r>
+            <a:endParaRPr lang="en-US" sz="1300" dirty="0"/>
+          </a:p>
+        </p:txBody>
+      </p:sp>
+      <p:sp>
+        <p:nvSpPr>
+          <p:cNvPr id="32" name="Shape 29"/>
           <p:cNvSpPr/>
           <p:nvPr/>
         </p:nvSpPr>
         <p:spPr>
           <a:xfrm>
-            <a:off x="10199218" y="2103120"/>
-            <a:ext cx="1443838" cy="1371600"/>
+            <a:off x="10175704" y="1920240"/>
+            <a:ext cx="1467351" cy="1828800"/>
           </a:xfrm>
           <a:prstGeom prst="roundRect">
             <a:avLst>
-              <a:gd name="adj" fmla="val 8000"/>
+              <a:gd name="adj" fmla="val 7478"/>
             </a:avLst>
           </a:prstGeom>
           <a:solidFill>
@@ -3957,14 +4399,14 @@
       </p:sp>
       <p:sp>
         <p:nvSpPr>
-          <p:cNvPr id="27" name="Text 24"/>
-          <p:cNvSpPr txBox="1"/>
-          <p:nvPr/>
-        </p:nvSpPr>
-        <p:spPr>
-          <a:xfrm>
-            <a:off x="10199218" y="2194560"/>
-            <a:ext cx="1443838" cy="365760"/>
+          <p:cNvPr id="33" name="Text 30"/>
+          <p:cNvSpPr txBox="1"/>
+          <p:nvPr/>
+        </p:nvSpPr>
+        <p:spPr>
+          <a:xfrm>
+            <a:off x="10175704" y="2011680"/>
+            <a:ext cx="1467351" cy="320040"/>
           </a:xfrm>
           <a:prstGeom prst="rect">
             <a:avLst/>
@@ -3996,14 +4438,14 @@
       </p:sp>
       <p:sp>
         <p:nvSpPr>
-          <p:cNvPr id="28" name="Text 25"/>
-          <p:cNvSpPr txBox="1"/>
-          <p:nvPr/>
-        </p:nvSpPr>
-        <p:spPr>
-          <a:xfrm>
-            <a:off x="10199218" y="2606040"/>
-            <a:ext cx="1443838" cy="640080"/>
+          <p:cNvPr id="34" name="Text 31"/>
+          <p:cNvSpPr txBox="1"/>
+          <p:nvPr/>
+        </p:nvSpPr>
+        <p:spPr>
+          <a:xfrm>
+            <a:off x="10175704" y="2331720"/>
+            <a:ext cx="1467351" cy="457200"/>
           </a:xfrm>
           <a:prstGeom prst="rect">
             <a:avLst/>
@@ -4035,13 +4477,52 @@
       </p:sp>
       <p:sp>
         <p:nvSpPr>
-          <p:cNvPr id="29" name="Shape 26"/>
+          <p:cNvPr id="35" name="Text 32"/>
+          <p:cNvSpPr txBox="1"/>
+          <p:nvPr/>
+        </p:nvSpPr>
+        <p:spPr>
+          <a:xfrm>
+            <a:off x="10248856" y="2834640"/>
+            <a:ext cx="1321047" cy="822960"/>
+          </a:xfrm>
+          <a:prstGeom prst="rect">
+            <a:avLst/>
+          </a:prstGeom>
+          <a:noFill/>
+          <a:ln/>
+        </p:spPr>
+        <p:txBody>
+          <a:bodyPr wrap="square" lIns="0" tIns="0" rIns="0" bIns="0" rtlCol="0" anchor="t"/>
+          <a:lstStyle/>
+          <a:p>
+            <a:pPr algn="ctr" indent="0" marL="0">
+              <a:buNone/>
+            </a:pPr>
+            <a:r>
+              <a:rPr lang="en-US" sz="1300" dirty="0">
+                <a:solidFill>
+                  <a:srgbClr val="526066"/>
+                </a:solidFill>
+                <a:latin typeface="Arial" pitchFamily="34" charset="0"/>
+                <a:ea typeface="Arial" pitchFamily="34" charset="-122"/>
+                <a:cs typeface="Arial" pitchFamily="34" charset="-120"/>
+              </a:rPr>
+              <a:t>Næste gang hurtigere</a:t>
+            </a:r>
+            <a:endParaRPr lang="en-US" sz="1300" dirty="0"/>
+          </a:p>
+        </p:txBody>
+      </p:sp>
+      <p:sp>
+        <p:nvSpPr>
+          <p:cNvPr id="36" name="Shape 33"/>
           <p:cNvSpPr/>
           <p:nvPr/>
         </p:nvSpPr>
         <p:spPr>
           <a:xfrm>
-            <a:off x="548640" y="3977640"/>
+            <a:off x="548640" y="4069080"/>
             <a:ext cx="5387188" cy="2011680"/>
           </a:xfrm>
           <a:prstGeom prst="roundRect">
@@ -4062,13 +4543,13 @@
       </p:sp>
       <p:sp>
         <p:nvSpPr>
-          <p:cNvPr id="30" name="Text 27"/>
-          <p:cNvSpPr txBox="1"/>
-          <p:nvPr/>
-        </p:nvSpPr>
-        <p:spPr>
-          <a:xfrm>
-            <a:off x="868680" y="4160520"/>
+          <p:cNvPr id="37" name="Text 34"/>
+          <p:cNvSpPr txBox="1"/>
+          <p:nvPr/>
+        </p:nvSpPr>
+        <p:spPr>
+          <a:xfrm>
+            <a:off x="868680" y="4206240"/>
             <a:ext cx="4747108" cy="411480"/>
           </a:xfrm>
           <a:prstGeom prst="rect">
@@ -4085,7 +4566,7 @@
               <a:buNone/>
             </a:pPr>
             <a:r>
-              <a:rPr lang="en-US" sz="2200" dirty="0">
+              <a:rPr lang="en-US" sz="2100" dirty="0">
                 <a:solidFill>
                   <a:srgbClr val="17221A"/>
                 </a:solidFill>
@@ -4093,22 +4574,22 @@
                 <a:ea typeface="Georgia" pitchFamily="34" charset="-122"/>
                 <a:cs typeface="Georgia" pitchFamily="34" charset="-120"/>
               </a:rPr>
-              <a:t>To gange</a:t>
-            </a:r>
-            <a:endParaRPr lang="en-US" sz="2200" dirty="0"/>
-          </a:p>
-        </p:txBody>
-      </p:sp>
-      <p:sp>
-        <p:nvSpPr>
-          <p:cNvPr id="31" name="Text 28"/>
+              <a:t>Ikke et samlebånd</a:t>
+            </a:r>
+            <a:endParaRPr lang="en-US" sz="2100" dirty="0"/>
+          </a:p>
+        </p:txBody>
+      </p:sp>
+      <p:sp>
+        <p:nvSpPr>
+          <p:cNvPr id="38" name="Text 35"/>
           <p:cNvSpPr txBox="1"/>
           <p:nvPr/>
         </p:nvSpPr>
         <p:spPr>
           <a:xfrm>
             <a:off x="868680" y="4663440"/>
-            <a:ext cx="4747108" cy="1097280"/>
+            <a:ext cx="4747108" cy="1325880"/>
           </a:xfrm>
           <a:prstGeom prst="rect">
             <a:avLst/>
@@ -4120,11 +4601,15 @@
           <a:bodyPr wrap="square" lIns="0" tIns="0" rIns="0" bIns="0" rtlCol="0" anchor="t"/>
           <a:lstStyle/>
           <a:p>
-            <a:pPr indent="0" marL="0">
-              <a:buNone/>
-            </a:pPr>
-            <a:r>
-              <a:rPr lang="en-US" sz="1700" dirty="0">
+            <a:pPr marL="342900" indent="-342900">
+              <a:spcAft>
+                <a:spcPts val="400"/>
+              </a:spcAft>
+              <a:buSzPct val="100000"/>
+              <a:buChar char="•"/>
+            </a:pPr>
+            <a:r>
+              <a:rPr lang="en-US" sz="1600" dirty="0">
                 <a:solidFill>
                   <a:srgbClr val="526066"/>
                 </a:solidFill>
@@ -4132,21 +4617,63 @@
                 <a:ea typeface="Arial" pitchFamily="34" charset="-122"/>
                 <a:cs typeface="Arial" pitchFamily="34" charset="-120"/>
               </a:rPr>
-              <a:t>Engage og design bruges to gange. Plan bruges slet ikke.</a:t>
-            </a:r>
-            <a:endParaRPr lang="en-US" sz="1700" dirty="0"/>
-          </a:p>
-        </p:txBody>
-      </p:sp>
-      <p:sp>
-        <p:nvSpPr>
-          <p:cNvPr id="32" name="Shape 29"/>
+              <a:t>Engage og design bruges to gange</a:t>
+            </a:r>
+            <a:endParaRPr lang="en-US" sz="1600" dirty="0"/>
+          </a:p>
+          <a:p>
+            <a:pPr marL="342900" indent="-342900">
+              <a:spcAft>
+                <a:spcPts val="400"/>
+              </a:spcAft>
+              <a:buSzPct val="100000"/>
+              <a:buChar char="•"/>
+            </a:pPr>
+            <a:r>
+              <a:rPr lang="en-US" sz="1600" dirty="0">
+                <a:solidFill>
+                  <a:srgbClr val="526066"/>
+                </a:solidFill>
+                <a:latin typeface="Arial" pitchFamily="34" charset="0"/>
+                <a:ea typeface="Arial" pitchFamily="34" charset="-122"/>
+                <a:cs typeface="Arial" pitchFamily="34" charset="-120"/>
+              </a:rPr>
+              <a:t>Plan bruges slet ikke</a:t>
+            </a:r>
+            <a:endParaRPr lang="en-US" sz="1600" dirty="0"/>
+          </a:p>
+          <a:p>
+            <a:pPr marL="342900" indent="-342900">
+              <a:spcAft>
+                <a:spcPts val="400"/>
+              </a:spcAft>
+              <a:buSzPct val="100000"/>
+              <a:buChar char="•"/>
+            </a:pPr>
+            <a:r>
+              <a:rPr lang="en-US" sz="1600" dirty="0">
+                <a:solidFill>
+                  <a:srgbClr val="526066"/>
+                </a:solidFill>
+                <a:latin typeface="Arial" pitchFamily="34" charset="0"/>
+                <a:ea typeface="Arial" pitchFamily="34" charset="-122"/>
+                <a:cs typeface="Arial" pitchFamily="34" charset="-120"/>
+              </a:rPr>
+              <a:t>Kundens behov styrer rækkefølgen</a:t>
+            </a:r>
+            <a:endParaRPr lang="en-US" sz="1600" dirty="0"/>
+          </a:p>
+        </p:txBody>
+      </p:sp>
+      <p:sp>
+        <p:nvSpPr>
+          <p:cNvPr id="39" name="Shape 36"/>
           <p:cNvSpPr/>
           <p:nvPr/>
         </p:nvSpPr>
         <p:spPr>
           <a:xfrm>
-            <a:off x="6255868" y="3977640"/>
+            <a:off x="6255868" y="4069080"/>
             <a:ext cx="5387188" cy="2011680"/>
           </a:xfrm>
           <a:prstGeom prst="roundRect">
@@ -4167,13 +4694,13 @@
       </p:sp>
       <p:sp>
         <p:nvSpPr>
-          <p:cNvPr id="33" name="Text 30"/>
-          <p:cNvSpPr txBox="1"/>
-          <p:nvPr/>
-        </p:nvSpPr>
-        <p:spPr>
-          <a:xfrm>
-            <a:off x="6575908" y="4160520"/>
+          <p:cNvPr id="40" name="Text 37"/>
+          <p:cNvSpPr txBox="1"/>
+          <p:nvPr/>
+        </p:nvSpPr>
+        <p:spPr>
+          <a:xfrm>
+            <a:off x="6575908" y="4206240"/>
             <a:ext cx="4747108" cy="411480"/>
           </a:xfrm>
           <a:prstGeom prst="rect">
@@ -4190,7 +4717,7 @@
               <a:buNone/>
             </a:pPr>
             <a:r>
-              <a:rPr lang="en-US" sz="2200" dirty="0">
+              <a:rPr lang="en-US" sz="2100" dirty="0">
                 <a:solidFill>
                   <a:srgbClr val="1E4A26"/>
                 </a:solidFill>
@@ -4198,22 +4725,22 @@
                 <a:ea typeface="Georgia" pitchFamily="34" charset="-122"/>
                 <a:cs typeface="Georgia" pitchFamily="34" charset="-120"/>
               </a:rPr>
-              <a:t>Kombineres efter behov</a:t>
-            </a:r>
-            <a:endParaRPr lang="en-US" sz="2200" dirty="0"/>
-          </a:p>
-        </p:txBody>
-      </p:sp>
-      <p:sp>
-        <p:nvSpPr>
-          <p:cNvPr id="34" name="Text 31"/>
+              <a:t>Hver aktivitet bidrager</a:t>
+            </a:r>
+            <a:endParaRPr lang="en-US" sz="2100" dirty="0"/>
+          </a:p>
+        </p:txBody>
+      </p:sp>
+      <p:sp>
+        <p:nvSpPr>
+          <p:cNvPr id="41" name="Text 38"/>
           <p:cNvSpPr txBox="1"/>
           <p:nvPr/>
         </p:nvSpPr>
         <p:spPr>
           <a:xfrm>
             <a:off x="6575908" y="4663440"/>
-            <a:ext cx="4747108" cy="1097280"/>
+            <a:ext cx="4747108" cy="1325880"/>
           </a:xfrm>
           <a:prstGeom prst="rect">
             <a:avLst/>
@@ -4225,11 +4752,15 @@
           <a:bodyPr wrap="square" lIns="0" tIns="0" rIns="0" bIns="0" rtlCol="0" anchor="t"/>
           <a:lstStyle/>
           <a:p>
-            <a:pPr indent="0" marL="0">
-              <a:buNone/>
-            </a:pPr>
-            <a:r>
-              <a:rPr lang="en-US" sz="1700" dirty="0">
+            <a:pPr marL="342900" indent="-342900">
+              <a:spcAft>
+                <a:spcPts val="300"/>
+              </a:spcAft>
+              <a:buSzPct val="100000"/>
+              <a:buChar char="•"/>
+            </a:pPr>
+            <a:r>
+              <a:rPr lang="en-US" sz="1500" dirty="0">
                 <a:solidFill>
                   <a:srgbClr val="1E4A26"/>
                 </a:solidFill>
@@ -4237,9 +4768,72 @@
                 <a:ea typeface="Arial" pitchFamily="34" charset="-122"/>
                 <a:cs typeface="Arial" pitchFamily="34" charset="-120"/>
               </a:rPr>
-              <a:t>En sensorfejl: engage, direkte til deliver og support.</a:t>
-            </a:r>
-            <a:endParaRPr lang="en-US" sz="1700" dirty="0"/>
+              <a:t>Engage: værdi skabt sammen med landmanden</a:t>
+            </a:r>
+            <a:endParaRPr lang="en-US" sz="1500" dirty="0"/>
+          </a:p>
+          <a:p>
+            <a:pPr marL="342900" indent="-342900">
+              <a:spcAft>
+                <a:spcPts val="300"/>
+              </a:spcAft>
+              <a:buSzPct val="100000"/>
+              <a:buChar char="•"/>
+            </a:pPr>
+            <a:r>
+              <a:rPr lang="en-US" sz="1500" dirty="0">
+                <a:solidFill>
+                  <a:srgbClr val="1E4A26"/>
+                </a:solidFill>
+                <a:latin typeface="Arial" pitchFamily="34" charset="0"/>
+                <a:ea typeface="Arial" pitchFamily="34" charset="-122"/>
+                <a:cs typeface="Arial" pitchFamily="34" charset="-120"/>
+              </a:rPr>
+              <a:t>Design: testes før drift, stabil drift</a:t>
+            </a:r>
+            <a:endParaRPr lang="en-US" sz="1500" dirty="0"/>
+          </a:p>
+          <a:p>
+            <a:pPr marL="342900" indent="-342900">
+              <a:spcAft>
+                <a:spcPts val="300"/>
+              </a:spcAft>
+              <a:buSzPct val="100000"/>
+              <a:buChar char="•"/>
+            </a:pPr>
+            <a:r>
+              <a:rPr lang="en-US" sz="1500" dirty="0">
+                <a:solidFill>
+                  <a:srgbClr val="1E4A26"/>
+                </a:solidFill>
+                <a:latin typeface="Arial" pitchFamily="34" charset="0"/>
+                <a:ea typeface="Arial" pitchFamily="34" charset="-122"/>
+                <a:cs typeface="Arial" pitchFamily="34" charset="-120"/>
+              </a:rPr>
+              <a:t>Deliver og support: værdi hver dag</a:t>
+            </a:r>
+            <a:endParaRPr lang="en-US" sz="1500" dirty="0"/>
+          </a:p>
+          <a:p>
+            <a:pPr marL="342900" indent="-342900">
+              <a:spcAft>
+                <a:spcPts val="300"/>
+              </a:spcAft>
+              <a:buSzPct val="100000"/>
+              <a:buChar char="•"/>
+            </a:pPr>
+            <a:r>
+              <a:rPr lang="en-US" sz="1500" dirty="0">
+                <a:solidFill>
+                  <a:srgbClr val="1E4A26"/>
+                </a:solidFill>
+                <a:latin typeface="Arial" pitchFamily="34" charset="0"/>
+                <a:ea typeface="Arial" pitchFamily="34" charset="-122"/>
+                <a:cs typeface="Arial" pitchFamily="34" charset="-120"/>
+              </a:rPr>
+              <a:t>Improve: fejl bliver forbedringer</a:t>
+            </a:r>
+            <a:endParaRPr lang="en-US" sz="1500" dirty="0"/>
           </a:p>
         </p:txBody>
       </p:sp>
@@ -4347,7 +4941,7 @@
                 <a:ea typeface="Georgia" pitchFamily="34" charset="-122"/>
                 <a:cs typeface="Georgia" pitchFamily="34" charset="-120"/>
               </a:rPr>
-              <a:t>Incident Management</a:t>
+              <a:t>Incident management</a:t>
             </a:r>
             <a:endParaRPr lang="en-US" sz="3200" dirty="0"/>
           </a:p>
@@ -4433,57 +5027,126 @@
       </p:sp>
       <p:sp>
         <p:nvSpPr>
-          <p:cNvPr id="7" name="Text 4"/>
-          <p:cNvSpPr txBox="1"/>
-          <p:nvPr/>
-        </p:nvSpPr>
-        <p:spPr>
-          <a:xfrm>
-            <a:off x="548640" y="1508760"/>
-            <a:ext cx="11094415" cy="457200"/>
-          </a:xfrm>
-          <a:prstGeom prst="rect">
-            <a:avLst/>
-          </a:prstGeom>
-          <a:noFill/>
-          <a:ln/>
-        </p:spPr>
-        <p:txBody>
-          <a:bodyPr wrap="square" lIns="0" tIns="0" rIns="0" bIns="0" rtlCol="0" anchor="t"/>
-          <a:lstStyle/>
-          <a:p>
-            <a:pPr indent="0" marL="0">
-              <a:buNone/>
-            </a:pPr>
-            <a:r>
-              <a:rPr lang="en-US" sz="2100" i="1" dirty="0">
-                <a:solidFill>
-                  <a:srgbClr val="2F6B3A"/>
-                </a:solidFill>
-                <a:latin typeface="Georgia" pitchFamily="34" charset="0"/>
-                <a:ea typeface="Georgia" pitchFamily="34" charset="-122"/>
-                <a:cs typeface="Georgia" pitchFamily="34" charset="-120"/>
-              </a:rPr>
-              <a:t>Få servicen op igen, hurtigst muligt</a:t>
-            </a:r>
-            <a:endParaRPr lang="en-US" sz="2100" dirty="0"/>
-          </a:p>
-        </p:txBody>
-      </p:sp>
-      <p:sp>
-        <p:nvSpPr>
-          <p:cNvPr id="8" name="Shape 5"/>
+          <p:cNvPr id="7" name="Shape 4"/>
           <p:cNvSpPr/>
           <p:nvPr/>
         </p:nvSpPr>
         <p:spPr>
           <a:xfrm>
-            <a:off x="548640" y="2194560"/>
-            <a:ext cx="2036003" cy="1005840"/>
+            <a:off x="548640" y="1463040"/>
+            <a:ext cx="11094415" cy="685800"/>
           </a:xfrm>
           <a:prstGeom prst="roundRect">
             <a:avLst>
-              <a:gd name="adj" fmla="val 10909"/>
+              <a:gd name="adj" fmla="val 16000"/>
+            </a:avLst>
+          </a:prstGeom>
+          <a:solidFill>
+            <a:srgbClr val="E9F4EA"/>
+          </a:solidFill>
+          <a:ln w="9525">
+            <a:solidFill>
+              <a:srgbClr val="A9D3B0"/>
+            </a:solidFill>
+            <a:prstDash val="solid"/>
+          </a:ln>
+        </p:spPr>
+      </p:sp>
+      <p:sp>
+        <p:nvSpPr>
+          <p:cNvPr id="8" name="Text 5"/>
+          <p:cNvSpPr txBox="1"/>
+          <p:nvPr/>
+        </p:nvSpPr>
+        <p:spPr>
+          <a:xfrm>
+            <a:off x="822960" y="1463040"/>
+            <a:ext cx="10545775" cy="685800"/>
+          </a:xfrm>
+          <a:prstGeom prst="rect">
+            <a:avLst/>
+          </a:prstGeom>
+          <a:noFill/>
+          <a:ln/>
+        </p:spPr>
+        <p:txBody>
+          <a:bodyPr wrap="square" lIns="0" tIns="0" rIns="0" bIns="0" rtlCol="0" anchor="ctr"/>
+          <a:lstStyle/>
+          <a:p>
+            <a:pPr indent="0" marL="0">
+              <a:buNone/>
+            </a:pPr>
+            <a:r>
+              <a:rPr lang="en-US" sz="1500" b="1" dirty="0">
+                <a:solidFill>
+                  <a:srgbClr val="1E4A26"/>
+                </a:solidFill>
+                <a:latin typeface="Arial" pitchFamily="34" charset="0"/>
+                <a:ea typeface="Arial" pitchFamily="34" charset="-122"/>
+                <a:cs typeface="Arial" pitchFamily="34" charset="-120"/>
+              </a:rPr>
+              <a:t>Incident:  </a:t>
+            </a:r>
+            <a:pPr indent="0" marL="0">
+              <a:buNone/>
+            </a:pPr>
+            <a:r>
+              <a:rPr lang="en-US" sz="1500" dirty="0">
+                <a:solidFill>
+                  <a:srgbClr val="1E4A26"/>
+                </a:solidFill>
+                <a:latin typeface="Arial" pitchFamily="34" charset="0"/>
+                <a:ea typeface="Arial" pitchFamily="34" charset="-122"/>
+                <a:cs typeface="Arial" pitchFamily="34" charset="-120"/>
+              </a:rPr>
+              <a:t>uplanlagt afbrydelse eller forringelse.  </a:t>
+            </a:r>
+            <a:pPr indent="0" marL="0">
+              <a:buNone/>
+            </a:pPr>
+            <a:r>
+              <a:rPr lang="en-US" sz="1500" b="1" dirty="0">
+                <a:solidFill>
+                  <a:srgbClr val="1E4A26"/>
+                </a:solidFill>
+                <a:latin typeface="Arial" pitchFamily="34" charset="0"/>
+                <a:ea typeface="Arial" pitchFamily="34" charset="-122"/>
+                <a:cs typeface="Arial" pitchFamily="34" charset="-120"/>
+              </a:rPr>
+              <a:t>Formål:  </a:t>
+            </a:r>
+            <a:pPr indent="0" marL="0">
+              <a:buNone/>
+            </a:pPr>
+            <a:r>
+              <a:rPr lang="en-US" sz="1500" dirty="0">
+                <a:solidFill>
+                  <a:srgbClr val="1E4A26"/>
+                </a:solidFill>
+                <a:latin typeface="Arial" pitchFamily="34" charset="0"/>
+                <a:ea typeface="Arial" pitchFamily="34" charset="-122"/>
+                <a:cs typeface="Arial" pitchFamily="34" charset="-120"/>
+              </a:rPr>
+              <a:t>op igen hurtigst muligt. Årsagen: problem.</a:t>
+            </a:r>
+            <a:endParaRPr lang="en-US" sz="1500" dirty="0"/>
+          </a:p>
+        </p:txBody>
+      </p:sp>
+      <p:sp>
+        <p:nvSpPr>
+          <p:cNvPr id="9" name="Shape 6"/>
+          <p:cNvSpPr/>
+          <p:nvPr/>
+        </p:nvSpPr>
+        <p:spPr>
+          <a:xfrm>
+            <a:off x="548640" y="2377440"/>
+            <a:ext cx="2036003" cy="777240"/>
+          </a:xfrm>
+          <a:prstGeom prst="roundRect">
+            <a:avLst>
+              <a:gd name="adj" fmla="val 14118"/>
             </a:avLst>
           </a:prstGeom>
           <a:solidFill>
@@ -4499,14 +5162,14 @@
       </p:sp>
       <p:sp>
         <p:nvSpPr>
-          <p:cNvPr id="9" name="Text 6"/>
-          <p:cNvSpPr txBox="1"/>
-          <p:nvPr/>
-        </p:nvSpPr>
-        <p:spPr>
-          <a:xfrm>
-            <a:off x="548640" y="2194560"/>
-            <a:ext cx="2036003" cy="1005840"/>
+          <p:cNvPr id="10" name="Text 7"/>
+          <p:cNvSpPr txBox="1"/>
+          <p:nvPr/>
+        </p:nvSpPr>
+        <p:spPr>
+          <a:xfrm>
+            <a:off x="548640" y="2377440"/>
+            <a:ext cx="2036003" cy="777240"/>
           </a:xfrm>
           <a:prstGeom prst="rect">
             <a:avLst/>
@@ -4522,7 +5185,7 @@
               <a:buNone/>
             </a:pPr>
             <a:r>
-              <a:rPr lang="en-US" sz="1800" b="1" dirty="0">
+              <a:rPr lang="en-US" sz="1700" b="1" dirty="0">
                 <a:solidFill>
                   <a:srgbClr val="FFFFFF"/>
                 </a:solidFill>
@@ -4532,19 +5195,19 @@
               </a:rPr>
               <a:t>Registrer</a:t>
             </a:r>
-            <a:endParaRPr lang="en-US" sz="1800" dirty="0"/>
-          </a:p>
-        </p:txBody>
-      </p:sp>
-      <p:sp>
-        <p:nvSpPr>
-          <p:cNvPr id="10" name="Shape 7"/>
+            <a:endParaRPr lang="en-US" sz="1700" dirty="0"/>
+          </a:p>
+        </p:txBody>
+      </p:sp>
+      <p:sp>
+        <p:nvSpPr>
+          <p:cNvPr id="11" name="Shape 8"/>
           <p:cNvSpPr/>
           <p:nvPr/>
         </p:nvSpPr>
         <p:spPr>
           <a:xfrm>
-            <a:off x="2602931" y="2697480"/>
+            <a:off x="2602931" y="2761488"/>
             <a:ext cx="192024" cy="914"/>
           </a:xfrm>
           <a:prstGeom prst="line">
@@ -4562,18 +5225,18 @@
       </p:sp>
       <p:sp>
         <p:nvSpPr>
-          <p:cNvPr id="11" name="Shape 8"/>
+          <p:cNvPr id="12" name="Shape 9"/>
           <p:cNvSpPr/>
           <p:nvPr/>
         </p:nvSpPr>
         <p:spPr>
           <a:xfrm>
-            <a:off x="2813243" y="2194560"/>
-            <a:ext cx="2036003" cy="1005840"/>
+            <a:off x="2813243" y="2377440"/>
+            <a:ext cx="2036003" cy="777240"/>
           </a:xfrm>
           <a:prstGeom prst="roundRect">
             <a:avLst>
-              <a:gd name="adj" fmla="val 10909"/>
+              <a:gd name="adj" fmla="val 14118"/>
             </a:avLst>
           </a:prstGeom>
           <a:solidFill>
@@ -4589,14 +5252,14 @@
       </p:sp>
       <p:sp>
         <p:nvSpPr>
-          <p:cNvPr id="12" name="Text 9"/>
-          <p:cNvSpPr txBox="1"/>
-          <p:nvPr/>
-        </p:nvSpPr>
-        <p:spPr>
-          <a:xfrm>
-            <a:off x="2813243" y="2194560"/>
-            <a:ext cx="2036003" cy="1005840"/>
+          <p:cNvPr id="13" name="Text 10"/>
+          <p:cNvSpPr txBox="1"/>
+          <p:nvPr/>
+        </p:nvSpPr>
+        <p:spPr>
+          <a:xfrm>
+            <a:off x="2813243" y="2377440"/>
+            <a:ext cx="2036003" cy="777240"/>
           </a:xfrm>
           <a:prstGeom prst="rect">
             <a:avLst/>
@@ -4612,7 +5275,7 @@
               <a:buNone/>
             </a:pPr>
             <a:r>
-              <a:rPr lang="en-US" sz="1800" b="1" dirty="0">
+              <a:rPr lang="en-US" sz="1700" b="1" dirty="0">
                 <a:solidFill>
                   <a:srgbClr val="FFFFFF"/>
                 </a:solidFill>
@@ -4622,19 +5285,19 @@
               </a:rPr>
               <a:t>Prioriter</a:t>
             </a:r>
-            <a:endParaRPr lang="en-US" sz="1800" dirty="0"/>
-          </a:p>
-        </p:txBody>
-      </p:sp>
-      <p:sp>
-        <p:nvSpPr>
-          <p:cNvPr id="13" name="Shape 10"/>
+            <a:endParaRPr lang="en-US" sz="1700" dirty="0"/>
+          </a:p>
+        </p:txBody>
+      </p:sp>
+      <p:sp>
+        <p:nvSpPr>
+          <p:cNvPr id="14" name="Shape 11"/>
           <p:cNvSpPr/>
           <p:nvPr/>
         </p:nvSpPr>
         <p:spPr>
           <a:xfrm>
-            <a:off x="4867534" y="2697480"/>
+            <a:off x="4867534" y="2761488"/>
             <a:ext cx="192024" cy="914"/>
           </a:xfrm>
           <a:prstGeom prst="line">
@@ -4652,18 +5315,18 @@
       </p:sp>
       <p:sp>
         <p:nvSpPr>
-          <p:cNvPr id="14" name="Shape 11"/>
+          <p:cNvPr id="15" name="Shape 12"/>
           <p:cNvSpPr/>
           <p:nvPr/>
         </p:nvSpPr>
         <p:spPr>
           <a:xfrm>
-            <a:off x="5077846" y="2194560"/>
-            <a:ext cx="2036003" cy="1005840"/>
+            <a:off x="5077846" y="2377440"/>
+            <a:ext cx="2036003" cy="777240"/>
           </a:xfrm>
           <a:prstGeom prst="roundRect">
             <a:avLst>
-              <a:gd name="adj" fmla="val 10909"/>
+              <a:gd name="adj" fmla="val 14118"/>
             </a:avLst>
           </a:prstGeom>
           <a:solidFill>
@@ -4679,14 +5342,14 @@
       </p:sp>
       <p:sp>
         <p:nvSpPr>
-          <p:cNvPr id="15" name="Text 12"/>
-          <p:cNvSpPr txBox="1"/>
-          <p:nvPr/>
-        </p:nvSpPr>
-        <p:spPr>
-          <a:xfrm>
-            <a:off x="5077846" y="2194560"/>
-            <a:ext cx="2036003" cy="1005840"/>
+          <p:cNvPr id="16" name="Text 13"/>
+          <p:cNvSpPr txBox="1"/>
+          <p:nvPr/>
+        </p:nvSpPr>
+        <p:spPr>
+          <a:xfrm>
+            <a:off x="5077846" y="2377440"/>
+            <a:ext cx="2036003" cy="777240"/>
           </a:xfrm>
           <a:prstGeom prst="rect">
             <a:avLst/>
@@ -4702,7 +5365,7 @@
               <a:buNone/>
             </a:pPr>
             <a:r>
-              <a:rPr lang="en-US" sz="1800" b="1" dirty="0">
+              <a:rPr lang="en-US" sz="1700" b="1" dirty="0">
                 <a:solidFill>
                   <a:srgbClr val="FFFFFF"/>
                 </a:solidFill>
@@ -4712,19 +5375,19 @@
               </a:rPr>
               <a:t>Diagnosticer</a:t>
             </a:r>
-            <a:endParaRPr lang="en-US" sz="1800" dirty="0"/>
-          </a:p>
-        </p:txBody>
-      </p:sp>
-      <p:sp>
-        <p:nvSpPr>
-          <p:cNvPr id="16" name="Shape 13"/>
+            <a:endParaRPr lang="en-US" sz="1700" dirty="0"/>
+          </a:p>
+        </p:txBody>
+      </p:sp>
+      <p:sp>
+        <p:nvSpPr>
+          <p:cNvPr id="17" name="Shape 14"/>
           <p:cNvSpPr/>
           <p:nvPr/>
         </p:nvSpPr>
         <p:spPr>
           <a:xfrm>
-            <a:off x="7132137" y="2697480"/>
+            <a:off x="7132137" y="2761488"/>
             <a:ext cx="192024" cy="914"/>
           </a:xfrm>
           <a:prstGeom prst="line">
@@ -4742,18 +5405,18 @@
       </p:sp>
       <p:sp>
         <p:nvSpPr>
-          <p:cNvPr id="17" name="Shape 14"/>
+          <p:cNvPr id="18" name="Shape 15"/>
           <p:cNvSpPr/>
           <p:nvPr/>
         </p:nvSpPr>
         <p:spPr>
           <a:xfrm>
-            <a:off x="7342449" y="2194560"/>
-            <a:ext cx="2036003" cy="1005840"/>
+            <a:off x="7342449" y="2377440"/>
+            <a:ext cx="2036003" cy="777240"/>
           </a:xfrm>
           <a:prstGeom prst="roundRect">
             <a:avLst>
-              <a:gd name="adj" fmla="val 10909"/>
+              <a:gd name="adj" fmla="val 14118"/>
             </a:avLst>
           </a:prstGeom>
           <a:solidFill>
@@ -4769,14 +5432,14 @@
       </p:sp>
       <p:sp>
         <p:nvSpPr>
-          <p:cNvPr id="18" name="Text 15"/>
-          <p:cNvSpPr txBox="1"/>
-          <p:nvPr/>
-        </p:nvSpPr>
-        <p:spPr>
-          <a:xfrm>
-            <a:off x="7342449" y="2194560"/>
-            <a:ext cx="2036003" cy="1005840"/>
+          <p:cNvPr id="19" name="Text 16"/>
+          <p:cNvSpPr txBox="1"/>
+          <p:nvPr/>
+        </p:nvSpPr>
+        <p:spPr>
+          <a:xfrm>
+            <a:off x="7342449" y="2377440"/>
+            <a:ext cx="2036003" cy="777240"/>
           </a:xfrm>
           <a:prstGeom prst="rect">
             <a:avLst/>
@@ -4792,7 +5455,7 @@
               <a:buNone/>
             </a:pPr>
             <a:r>
-              <a:rPr lang="en-US" sz="1800" b="1" dirty="0">
+              <a:rPr lang="en-US" sz="1700" b="1" dirty="0">
                 <a:solidFill>
                   <a:srgbClr val="FFFFFF"/>
                 </a:solidFill>
@@ -4802,19 +5465,19 @@
               </a:rPr>
               <a:t>Eskaler</a:t>
             </a:r>
-            <a:endParaRPr lang="en-US" sz="1800" dirty="0"/>
-          </a:p>
-        </p:txBody>
-      </p:sp>
-      <p:sp>
-        <p:nvSpPr>
-          <p:cNvPr id="19" name="Shape 16"/>
+            <a:endParaRPr lang="en-US" sz="1700" dirty="0"/>
+          </a:p>
+        </p:txBody>
+      </p:sp>
+      <p:sp>
+        <p:nvSpPr>
+          <p:cNvPr id="20" name="Shape 17"/>
           <p:cNvSpPr/>
           <p:nvPr/>
         </p:nvSpPr>
         <p:spPr>
           <a:xfrm>
-            <a:off x="9396740" y="2697480"/>
+            <a:off x="9396740" y="2761488"/>
             <a:ext cx="192024" cy="914"/>
           </a:xfrm>
           <a:prstGeom prst="line">
@@ -4832,18 +5495,18 @@
       </p:sp>
       <p:sp>
         <p:nvSpPr>
-          <p:cNvPr id="20" name="Shape 17"/>
+          <p:cNvPr id="21" name="Shape 18"/>
           <p:cNvSpPr/>
           <p:nvPr/>
         </p:nvSpPr>
         <p:spPr>
           <a:xfrm>
-            <a:off x="9607052" y="2194560"/>
-            <a:ext cx="2036003" cy="1005840"/>
+            <a:off x="9607052" y="2377440"/>
+            <a:ext cx="2036003" cy="777240"/>
           </a:xfrm>
           <a:prstGeom prst="roundRect">
             <a:avLst>
-              <a:gd name="adj" fmla="val 10909"/>
+              <a:gd name="adj" fmla="val 14118"/>
             </a:avLst>
           </a:prstGeom>
           <a:solidFill>
@@ -4859,14 +5522,14 @@
       </p:sp>
       <p:sp>
         <p:nvSpPr>
-          <p:cNvPr id="21" name="Text 18"/>
-          <p:cNvSpPr txBox="1"/>
-          <p:nvPr/>
-        </p:nvSpPr>
-        <p:spPr>
-          <a:xfrm>
-            <a:off x="9607052" y="2194560"/>
-            <a:ext cx="2036003" cy="1005840"/>
+          <p:cNvPr id="22" name="Text 19"/>
+          <p:cNvSpPr txBox="1"/>
+          <p:nvPr/>
+        </p:nvSpPr>
+        <p:spPr>
+          <a:xfrm>
+            <a:off x="9607052" y="2377440"/>
+            <a:ext cx="2036003" cy="777240"/>
           </a:xfrm>
           <a:prstGeom prst="rect">
             <a:avLst/>
@@ -4882,7 +5545,7 @@
               <a:buNone/>
             </a:pPr>
             <a:r>
-              <a:rPr lang="en-US" sz="1800" b="1" dirty="0">
+              <a:rPr lang="en-US" sz="1700" b="1" dirty="0">
                 <a:solidFill>
                   <a:srgbClr val="FFFFFF"/>
                 </a:solidFill>
@@ -4892,46 +5555,7 @@
               </a:rPr>
               <a:t>Løs og luk</a:t>
             </a:r>
-            <a:endParaRPr lang="en-US" sz="1800" dirty="0"/>
-          </a:p>
-        </p:txBody>
-      </p:sp>
-      <p:sp>
-        <p:nvSpPr>
-          <p:cNvPr id="22" name="Text 19"/>
-          <p:cNvSpPr txBox="1"/>
-          <p:nvPr/>
-        </p:nvSpPr>
-        <p:spPr>
-          <a:xfrm>
-            <a:off x="548640" y="3383280"/>
-            <a:ext cx="11094415" cy="365760"/>
-          </a:xfrm>
-          <a:prstGeom prst="rect">
-            <a:avLst/>
-          </a:prstGeom>
-          <a:noFill/>
-          <a:ln/>
-        </p:spPr>
-        <p:txBody>
-          <a:bodyPr wrap="square" lIns="0" tIns="0" rIns="0" bIns="0" rtlCol="0" anchor="t"/>
-          <a:lstStyle/>
-          <a:p>
-            <a:pPr algn="ctr" indent="0" marL="0">
-              <a:buNone/>
-            </a:pPr>
-            <a:r>
-              <a:rPr lang="en-US" sz="1600" dirty="0">
-                <a:solidFill>
-                  <a:srgbClr val="526066"/>
-                </a:solidFill>
-                <a:latin typeface="Arial" pitchFamily="34" charset="0"/>
-                <a:ea typeface="Arial" pitchFamily="34" charset="-122"/>
-                <a:cs typeface="Arial" pitchFamily="34" charset="-120"/>
-              </a:rPr>
-              <a:t>L1 servicedesk  ·  L2 specialister  ·  L3 udviklere i R&amp;D</a:t>
-            </a:r>
-            <a:endParaRPr lang="en-US" sz="1600" dirty="0"/>
+            <a:endParaRPr lang="en-US" sz="1700" dirty="0"/>
           </a:p>
         </p:txBody>
       </p:sp>
@@ -4943,12 +5567,12 @@
         </p:nvSpPr>
         <p:spPr>
           <a:xfrm>
-            <a:off x="548640" y="4023360"/>
-            <a:ext cx="11094415" cy="2011680"/>
+            <a:off x="548640" y="3383280"/>
+            <a:ext cx="5387188" cy="2743200"/>
           </a:xfrm>
           <a:prstGeom prst="roundRect">
             <a:avLst>
-              <a:gd name="adj" fmla="val 5455"/>
+              <a:gd name="adj" fmla="val 4000"/>
             </a:avLst>
           </a:prstGeom>
           <a:solidFill>
@@ -4964,14 +5588,186 @@
       </p:sp>
       <p:sp>
         <p:nvSpPr>
-          <p:cNvPr id="24" name="Shape 21"/>
+          <p:cNvPr id="24" name="Text 21"/>
+          <p:cNvSpPr txBox="1"/>
+          <p:nvPr/>
+        </p:nvSpPr>
+        <p:spPr>
+          <a:xfrm>
+            <a:off x="868680" y="3520440"/>
+            <a:ext cx="4747108" cy="411480"/>
+          </a:xfrm>
+          <a:prstGeom prst="rect">
+            <a:avLst/>
+          </a:prstGeom>
+          <a:noFill/>
+          <a:ln/>
+        </p:spPr>
+        <p:txBody>
+          <a:bodyPr wrap="square" lIns="0" tIns="0" rIns="0" bIns="0" rtlCol="0" anchor="t"/>
+          <a:lstStyle/>
+          <a:p>
+            <a:pPr indent="0" marL="0">
+              <a:buNone/>
+            </a:pPr>
+            <a:r>
+              <a:rPr lang="en-US" sz="2000" dirty="0">
+                <a:solidFill>
+                  <a:srgbClr val="17221A"/>
+                </a:solidFill>
+                <a:latin typeface="Georgia" pitchFamily="34" charset="0"/>
+                <a:ea typeface="Georgia" pitchFamily="34" charset="-122"/>
+                <a:cs typeface="Georgia" pitchFamily="34" charset="-120"/>
+              </a:rPr>
+              <a:t>Hvem gør hvad</a:t>
+            </a:r>
+            <a:endParaRPr lang="en-US" sz="2000" dirty="0"/>
+          </a:p>
+        </p:txBody>
+      </p:sp>
+      <p:sp>
+        <p:nvSpPr>
+          <p:cNvPr id="25" name="Text 22"/>
+          <p:cNvSpPr txBox="1"/>
+          <p:nvPr/>
+        </p:nvSpPr>
+        <p:spPr>
+          <a:xfrm>
+            <a:off x="868680" y="3977640"/>
+            <a:ext cx="4747108" cy="2011680"/>
+          </a:xfrm>
+          <a:prstGeom prst="rect">
+            <a:avLst/>
+          </a:prstGeom>
+          <a:noFill/>
+          <a:ln/>
+        </p:spPr>
+        <p:txBody>
+          <a:bodyPr wrap="square" lIns="0" tIns="0" rIns="0" bIns="0" rtlCol="0" anchor="t"/>
+          <a:lstStyle/>
+          <a:p>
+            <a:pPr marL="342900" indent="-342900">
+              <a:spcAft>
+                <a:spcPts val="500"/>
+              </a:spcAft>
+              <a:buSzPct val="100000"/>
+              <a:buChar char="•"/>
+            </a:pPr>
+            <a:r>
+              <a:rPr lang="en-US" sz="1500" dirty="0">
+                <a:solidFill>
+                  <a:srgbClr val="526066"/>
+                </a:solidFill>
+                <a:latin typeface="Arial" pitchFamily="34" charset="0"/>
+                <a:ea typeface="Arial" pitchFamily="34" charset="-122"/>
+                <a:cs typeface="Arial" pitchFamily="34" charset="-120"/>
+              </a:rPr>
+              <a:t>Prioritet: hvor slemt og hvor hastende, styrer SLA'en</a:t>
+            </a:r>
+            <a:endParaRPr lang="en-US" sz="1500" dirty="0"/>
+          </a:p>
+          <a:p>
+            <a:pPr marL="342900" indent="-342900">
+              <a:spcAft>
+                <a:spcPts val="500"/>
+              </a:spcAft>
+              <a:buSzPct val="100000"/>
+              <a:buChar char="•"/>
+            </a:pPr>
+            <a:r>
+              <a:rPr lang="en-US" sz="1500" dirty="0">
+                <a:solidFill>
+                  <a:srgbClr val="526066"/>
+                </a:solidFill>
+                <a:latin typeface="Arial" pitchFamily="34" charset="0"/>
+                <a:ea typeface="Arial" pitchFamily="34" charset="-122"/>
+                <a:cs typeface="Arial" pitchFamily="34" charset="-120"/>
+              </a:rPr>
+              <a:t>Eskaler: L1 servicedesk, L2 specialister, L3 R&amp;D</a:t>
+            </a:r>
+            <a:endParaRPr lang="en-US" sz="1500" dirty="0"/>
+          </a:p>
+          <a:p>
+            <a:pPr marL="342900" indent="-342900">
+              <a:spcAft>
+                <a:spcPts val="500"/>
+              </a:spcAft>
+              <a:buSzPct val="100000"/>
+              <a:buChar char="•"/>
+            </a:pPr>
+            <a:r>
+              <a:rPr lang="en-US" sz="1500" dirty="0">
+                <a:solidFill>
+                  <a:srgbClr val="526066"/>
+                </a:solidFill>
+                <a:latin typeface="Arial" pitchFamily="34" charset="0"/>
+                <a:ea typeface="Arial" pitchFamily="34" charset="-122"/>
+                <a:cs typeface="Arial" pitchFamily="34" charset="-120"/>
+              </a:rPr>
+              <a:t>Servicedesken: landmandens ene indgang</a:t>
+            </a:r>
+            <a:endParaRPr lang="en-US" sz="1500" dirty="0"/>
+          </a:p>
+          <a:p>
+            <a:pPr marL="342900" indent="-342900">
+              <a:spcAft>
+                <a:spcPts val="500"/>
+              </a:spcAft>
+              <a:buSzPct val="100000"/>
+              <a:buChar char="•"/>
+            </a:pPr>
+            <a:r>
+              <a:rPr lang="en-US" sz="1500" dirty="0">
+                <a:solidFill>
+                  <a:srgbClr val="526066"/>
+                </a:solidFill>
+                <a:latin typeface="Arial" pitchFamily="34" charset="0"/>
+                <a:ea typeface="Arial" pitchFamily="34" charset="-122"/>
+                <a:cs typeface="Arial" pitchFamily="34" charset="-120"/>
+              </a:rPr>
+              <a:t>Fælles ticketsystem, alle tre steder</a:t>
+            </a:r>
+            <a:endParaRPr lang="en-US" sz="1500" dirty="0"/>
+          </a:p>
+        </p:txBody>
+      </p:sp>
+      <p:sp>
+        <p:nvSpPr>
+          <p:cNvPr id="26" name="Shape 23"/>
           <p:cNvSpPr/>
           <p:nvPr/>
         </p:nvSpPr>
         <p:spPr>
           <a:xfrm>
-            <a:off x="868680" y="4297680"/>
-            <a:ext cx="594360" cy="594360"/>
+            <a:off x="6255868" y="3383280"/>
+            <a:ext cx="5387188" cy="2743200"/>
+          </a:xfrm>
+          <a:prstGeom prst="roundRect">
+            <a:avLst>
+              <a:gd name="adj" fmla="val 4000"/>
+            </a:avLst>
+          </a:prstGeom>
+          <a:solidFill>
+            <a:srgbClr val="FCFDFD"/>
+          </a:solidFill>
+          <a:ln w="9525">
+            <a:solidFill>
+              <a:srgbClr val="DDE4E6"/>
+            </a:solidFill>
+            <a:prstDash val="solid"/>
+          </a:ln>
+        </p:spPr>
+      </p:sp>
+      <p:sp>
+        <p:nvSpPr>
+          <p:cNvPr id="27" name="Shape 24"/>
+          <p:cNvSpPr/>
+          <p:nvPr/>
+        </p:nvSpPr>
+        <p:spPr>
+          <a:xfrm>
+            <a:off x="6530188" y="3520440"/>
+            <a:ext cx="457200" cy="457200"/>
           </a:xfrm>
           <a:prstGeom prst="ellipse">
             <a:avLst/>
@@ -4989,7 +5785,7 @@
       </p:sp>
       <p:pic>
         <p:nvPicPr>
-          <p:cNvPr id="25" name="Image 0" descr="preencoded.png">    </p:cNvPr>
+          <p:cNvPr id="28" name="Image 0" descr="preencoded.png">    </p:cNvPr>
           <p:cNvPicPr>
             <a:picLocks noChangeAspect="1"/>
           </p:cNvPicPr>
@@ -5003,8 +5799,8 @@
         </p:blipFill>
         <p:spPr>
           <a:xfrm>
-            <a:off x="1011326" y="4440326"/>
-            <a:ext cx="309067" cy="309067"/>
+            <a:off x="6639916" y="3630168"/>
+            <a:ext cx="237744" cy="237744"/>
           </a:xfrm>
           <a:prstGeom prst="rect">
             <a:avLst/>
@@ -5013,30 +5809,30 @@
       </p:pic>
       <p:sp>
         <p:nvSpPr>
-          <p:cNvPr id="26" name="Text 22"/>
-          <p:cNvSpPr txBox="1"/>
-          <p:nvPr/>
-        </p:nvSpPr>
-        <p:spPr>
-          <a:xfrm>
-            <a:off x="1691640" y="4206240"/>
-            <a:ext cx="5486400" cy="457200"/>
-          </a:xfrm>
-          <a:prstGeom prst="rect">
-            <a:avLst/>
-          </a:prstGeom>
-          <a:noFill/>
-          <a:ln/>
-        </p:spPr>
-        <p:txBody>
-          <a:bodyPr wrap="square" lIns="0" tIns="0" rIns="0" bIns="0" rtlCol="0" anchor="t"/>
+          <p:cNvPr id="29" name="Text 25"/>
+          <p:cNvSpPr txBox="1"/>
+          <p:nvPr/>
+        </p:nvSpPr>
+        <p:spPr>
+          <a:xfrm>
+            <a:off x="7124548" y="3520440"/>
+            <a:ext cx="4289908" cy="457200"/>
+          </a:xfrm>
+          <a:prstGeom prst="rect">
+            <a:avLst/>
+          </a:prstGeom>
+          <a:noFill/>
+          <a:ln/>
+        </p:spPr>
+        <p:txBody>
+          <a:bodyPr wrap="square" lIns="0" tIns="0" rIns="0" bIns="0" rtlCol="0" anchor="ctr"/>
           <a:lstStyle/>
           <a:p>
             <a:pPr indent="0" marL="0">
               <a:buNone/>
             </a:pPr>
             <a:r>
-              <a:rPr lang="en-US" sz="2100" dirty="0">
+              <a:rPr lang="en-US" sz="2000" dirty="0">
                 <a:solidFill>
                   <a:srgbClr val="17221A"/>
                 </a:solidFill>
@@ -5046,20 +5842,20 @@
               </a:rPr>
               <a:t>Kvægstald, sommernat</a:t>
             </a:r>
-            <a:endParaRPr lang="en-US" sz="2100" dirty="0"/>
-          </a:p>
-        </p:txBody>
-      </p:sp>
-      <p:sp>
-        <p:nvSpPr>
-          <p:cNvPr id="27" name="Text 23"/>
-          <p:cNvSpPr txBox="1"/>
-          <p:nvPr/>
-        </p:nvSpPr>
-        <p:spPr>
-          <a:xfrm>
-            <a:off x="1691640" y="4709160"/>
-            <a:ext cx="9631375" cy="1234440"/>
+            <a:endParaRPr lang="en-US" sz="2000" dirty="0"/>
+          </a:p>
+        </p:txBody>
+      </p:sp>
+      <p:sp>
+        <p:nvSpPr>
+          <p:cNvPr id="30" name="Text 26"/>
+          <p:cNvSpPr txBox="1"/>
+          <p:nvPr/>
+        </p:nvSpPr>
+        <p:spPr>
+          <a:xfrm>
+            <a:off x="6575908" y="4069080"/>
+            <a:ext cx="4747108" cy="1920240"/>
           </a:xfrm>
           <a:prstGeom prst="rect">
             <a:avLst/>
@@ -5073,13 +5869,13 @@
           <a:p>
             <a:pPr marL="342900" indent="-342900">
               <a:spcAft>
-                <a:spcPts val="400"/>
+                <a:spcPts val="500"/>
               </a:spcAft>
               <a:buSzPct val="100000"/>
               <a:buChar char="•"/>
             </a:pPr>
             <a:r>
-              <a:rPr lang="en-US" sz="1600" dirty="0">
+              <a:rPr lang="en-US" sz="1500" dirty="0">
                 <a:solidFill>
                   <a:srgbClr val="526066"/>
                 </a:solidFill>
@@ -5087,20 +5883,20 @@
                 <a:ea typeface="Arial" pitchFamily="34" charset="-122"/>
                 <a:cs typeface="Arial" pitchFamily="34" charset="-120"/>
               </a:rPr>
-              <a:t>Prioritet 1: sensorerne sender ikke data</a:t>
-            </a:r>
-            <a:endParaRPr lang="en-US" sz="1600" dirty="0"/>
+              <a:t>Sensorerne sender ikke data: prioritet 1</a:t>
+            </a:r>
+            <a:endParaRPr lang="en-US" sz="1500" dirty="0"/>
           </a:p>
           <a:p>
             <a:pPr marL="342900" indent="-342900">
               <a:spcAft>
-                <a:spcPts val="400"/>
+                <a:spcPts val="500"/>
               </a:spcAft>
               <a:buSzPct val="100000"/>
               <a:buChar char="•"/>
             </a:pPr>
             <a:r>
-              <a:rPr lang="en-US" sz="1600" dirty="0">
+              <a:rPr lang="en-US" sz="1500" dirty="0">
                 <a:solidFill>
                   <a:srgbClr val="526066"/>
                 </a:solidFill>
@@ -5108,20 +5904,20 @@
                 <a:ea typeface="Arial" pitchFamily="34" charset="-122"/>
                 <a:cs typeface="Arial" pitchFamily="34" charset="-120"/>
               </a:rPr>
-              <a:t>L2: fejl i gatewayens mobilforbindelse, reservegateway</a:t>
-            </a:r>
-            <a:endParaRPr lang="en-US" sz="1600" dirty="0"/>
+              <a:t>L2: fejl i gatewayen, tekniker med en ny</a:t>
+            </a:r>
+            <a:endParaRPr lang="en-US" sz="1500" dirty="0"/>
           </a:p>
           <a:p>
             <a:pPr marL="342900" indent="-342900">
               <a:spcAft>
-                <a:spcPts val="400"/>
+                <a:spcPts val="500"/>
               </a:spcAft>
               <a:buSzPct val="100000"/>
               <a:buChar char="•"/>
             </a:pPr>
             <a:r>
-              <a:rPr lang="en-US" sz="1600" dirty="0">
+              <a:rPr lang="en-US" sz="1500" dirty="0">
                 <a:solidFill>
                   <a:srgbClr val="526066"/>
                 </a:solidFill>
@@ -5129,9 +5925,30 @@
                 <a:ea typeface="Arial" pitchFamily="34" charset="-122"/>
                 <a:cs typeface="Arial" pitchFamily="34" charset="-120"/>
               </a:rPr>
-              <a:t>Workaround: landmanden fører selv tilsyn</a:t>
-            </a:r>
-            <a:endParaRPr lang="en-US" sz="1600" dirty="0"/>
+              <a:t>Workaround: landmanden tjekker selv dyrene</a:t>
+            </a:r>
+            <a:endParaRPr lang="en-US" sz="1500" dirty="0"/>
+          </a:p>
+          <a:p>
+            <a:pPr marL="342900" indent="-342900">
+              <a:spcAft>
+                <a:spcPts val="500"/>
+              </a:spcAft>
+              <a:buSzPct val="100000"/>
+              <a:buChar char="•"/>
+            </a:pPr>
+            <a:r>
+              <a:rPr lang="en-US" sz="1500" dirty="0">
+                <a:solidFill>
+                  <a:srgbClr val="526066"/>
+                </a:solidFill>
+                <a:latin typeface="Arial" pitchFamily="34" charset="0"/>
+                <a:ea typeface="Arial" pitchFamily="34" charset="-122"/>
+                <a:cs typeface="Arial" pitchFamily="34" charset="-120"/>
+              </a:rPr>
+              <a:t>Mange stalde: major incident med én leder</a:t>
+            </a:r>
+            <a:endParaRPr lang="en-US" sz="1500" dirty="0"/>
           </a:p>
         </p:txBody>
       </p:sp>
@@ -5239,7 +6056,7 @@
                 <a:ea typeface="Georgia" pitchFamily="34" charset="-122"/>
                 <a:cs typeface="Georgia" pitchFamily="34" charset="-120"/>
               </a:rPr>
-              <a:t>Problem Management</a:t>
+              <a:t>Problem management</a:t>
             </a:r>
             <a:endParaRPr lang="en-US" sz="3200" dirty="0"/>
           </a:p>
@@ -5325,57 +6142,126 @@
       </p:sp>
       <p:sp>
         <p:nvSpPr>
-          <p:cNvPr id="7" name="Text 4"/>
-          <p:cNvSpPr txBox="1"/>
-          <p:nvPr/>
-        </p:nvSpPr>
-        <p:spPr>
-          <a:xfrm>
-            <a:off x="548640" y="1508760"/>
-            <a:ext cx="11094415" cy="457200"/>
-          </a:xfrm>
-          <a:prstGeom prst="rect">
-            <a:avLst/>
-          </a:prstGeom>
-          <a:noFill/>
-          <a:ln/>
-        </p:spPr>
-        <p:txBody>
-          <a:bodyPr wrap="square" lIns="0" tIns="0" rIns="0" bIns="0" rtlCol="0" anchor="t"/>
-          <a:lstStyle/>
-          <a:p>
-            <a:pPr indent="0" marL="0">
-              <a:buNone/>
-            </a:pPr>
-            <a:r>
-              <a:rPr lang="en-US" sz="2100" i="1" dirty="0">
-                <a:solidFill>
-                  <a:srgbClr val="2F6B3A"/>
-                </a:solidFill>
-                <a:latin typeface="Georgia" pitchFamily="34" charset="0"/>
-                <a:ea typeface="Georgia" pitchFamily="34" charset="-122"/>
-                <a:cs typeface="Georgia" pitchFamily="34" charset="-120"/>
-              </a:rPr>
-              <a:t>Find årsagen, så det ikke sker igen</a:t>
-            </a:r>
-            <a:endParaRPr lang="en-US" sz="2100" dirty="0"/>
-          </a:p>
-        </p:txBody>
-      </p:sp>
-      <p:sp>
-        <p:nvSpPr>
-          <p:cNvPr id="8" name="Shape 5"/>
+          <p:cNvPr id="7" name="Shape 4"/>
           <p:cNvSpPr/>
           <p:nvPr/>
         </p:nvSpPr>
         <p:spPr>
           <a:xfrm>
-            <a:off x="548640" y="2148840"/>
-            <a:ext cx="3515258" cy="1417320"/>
+            <a:off x="548640" y="1463040"/>
+            <a:ext cx="11094415" cy="685800"/>
           </a:xfrm>
           <a:prstGeom prst="roundRect">
             <a:avLst>
-              <a:gd name="adj" fmla="val 7742"/>
+              <a:gd name="adj" fmla="val 16000"/>
+            </a:avLst>
+          </a:prstGeom>
+          <a:solidFill>
+            <a:srgbClr val="E9F4EA"/>
+          </a:solidFill>
+          <a:ln w="9525">
+            <a:solidFill>
+              <a:srgbClr val="A9D3B0"/>
+            </a:solidFill>
+            <a:prstDash val="solid"/>
+          </a:ln>
+        </p:spPr>
+      </p:sp>
+      <p:sp>
+        <p:nvSpPr>
+          <p:cNvPr id="8" name="Text 5"/>
+          <p:cNvSpPr txBox="1"/>
+          <p:nvPr/>
+        </p:nvSpPr>
+        <p:spPr>
+          <a:xfrm>
+            <a:off x="822960" y="1463040"/>
+            <a:ext cx="10545775" cy="685800"/>
+          </a:xfrm>
+          <a:prstGeom prst="rect">
+            <a:avLst/>
+          </a:prstGeom>
+          <a:noFill/>
+          <a:ln/>
+        </p:spPr>
+        <p:txBody>
+          <a:bodyPr wrap="square" lIns="0" tIns="0" rIns="0" bIns="0" rtlCol="0" anchor="ctr"/>
+          <a:lstStyle/>
+          <a:p>
+            <a:pPr indent="0" marL="0">
+              <a:buNone/>
+            </a:pPr>
+            <a:r>
+              <a:rPr lang="en-US" sz="1500" b="1" dirty="0">
+                <a:solidFill>
+                  <a:srgbClr val="1E4A26"/>
+                </a:solidFill>
+                <a:latin typeface="Arial" pitchFamily="34" charset="0"/>
+                <a:ea typeface="Arial" pitchFamily="34" charset="-122"/>
+                <a:cs typeface="Arial" pitchFamily="34" charset="-120"/>
+              </a:rPr>
+              <a:t>Problem:  </a:t>
+            </a:r>
+            <a:pPr indent="0" marL="0">
+              <a:buNone/>
+            </a:pPr>
+            <a:r>
+              <a:rPr lang="en-US" sz="1500" dirty="0">
+                <a:solidFill>
+                  <a:srgbClr val="1E4A26"/>
+                </a:solidFill>
+                <a:latin typeface="Arial" pitchFamily="34" charset="0"/>
+                <a:ea typeface="Arial" pitchFamily="34" charset="-122"/>
+                <a:cs typeface="Arial" pitchFamily="34" charset="-120"/>
+              </a:rPr>
+              <a:t>årsagen, eller den mulige årsag, til incidents.  </a:t>
+            </a:r>
+            <a:pPr indent="0" marL="0">
+              <a:buNone/>
+            </a:pPr>
+            <a:r>
+              <a:rPr lang="en-US" sz="1500" b="1" dirty="0">
+                <a:solidFill>
+                  <a:srgbClr val="1E4A26"/>
+                </a:solidFill>
+                <a:latin typeface="Arial" pitchFamily="34" charset="0"/>
+                <a:ea typeface="Arial" pitchFamily="34" charset="-122"/>
+                <a:cs typeface="Arial" pitchFamily="34" charset="-120"/>
+              </a:rPr>
+              <a:t>Formål:  </a:t>
+            </a:r>
+            <a:pPr indent="0" marL="0">
+              <a:buNone/>
+            </a:pPr>
+            <a:r>
+              <a:rPr lang="en-US" sz="1500" dirty="0">
+                <a:solidFill>
+                  <a:srgbClr val="1E4A26"/>
+                </a:solidFill>
+                <a:latin typeface="Arial" pitchFamily="34" charset="0"/>
+                <a:ea typeface="Arial" pitchFamily="34" charset="-122"/>
+                <a:cs typeface="Arial" pitchFamily="34" charset="-120"/>
+              </a:rPr>
+              <a:t>så det ikke sker igen.</a:t>
+            </a:r>
+            <a:endParaRPr lang="en-US" sz="1500" dirty="0"/>
+          </a:p>
+        </p:txBody>
+      </p:sp>
+      <p:sp>
+        <p:nvSpPr>
+          <p:cNvPr id="9" name="Shape 6"/>
+          <p:cNvSpPr/>
+          <p:nvPr/>
+        </p:nvSpPr>
+        <p:spPr>
+          <a:xfrm>
+            <a:off x="548640" y="2377440"/>
+            <a:ext cx="3515258" cy="1325880"/>
+          </a:xfrm>
+          <a:prstGeom prst="roundRect">
+            <a:avLst>
+              <a:gd name="adj" fmla="val 8276"/>
             </a:avLst>
           </a:prstGeom>
           <a:solidFill>
@@ -5391,14 +6277,14 @@
       </p:sp>
       <p:sp>
         <p:nvSpPr>
-          <p:cNvPr id="9" name="Text 6"/>
-          <p:cNvSpPr txBox="1"/>
-          <p:nvPr/>
-        </p:nvSpPr>
-        <p:spPr>
-          <a:xfrm>
-            <a:off x="822960" y="2286000"/>
-            <a:ext cx="2966618" cy="411480"/>
+          <p:cNvPr id="10" name="Text 7"/>
+          <p:cNvSpPr txBox="1"/>
+          <p:nvPr/>
+        </p:nvSpPr>
+        <p:spPr>
+          <a:xfrm>
+            <a:off x="822960" y="2487168"/>
+            <a:ext cx="2966618" cy="384048"/>
           </a:xfrm>
           <a:prstGeom prst="rect">
             <a:avLst/>
@@ -5414,7 +6300,7 @@
               <a:buNone/>
             </a:pPr>
             <a:r>
-              <a:rPr lang="en-US" sz="1900" b="1" dirty="0">
+              <a:rPr lang="en-US" sz="1800" b="1" dirty="0">
                 <a:solidFill>
                   <a:srgbClr val="17221A"/>
                 </a:solidFill>
@@ -5422,21 +6308,21 @@
                 <a:ea typeface="Arial" pitchFamily="34" charset="-122"/>
                 <a:cs typeface="Arial" pitchFamily="34" charset="-120"/>
               </a:rPr>
-              <a:t>Identification</a:t>
-            </a:r>
-            <a:endParaRPr lang="en-US" sz="1900" dirty="0"/>
-          </a:p>
-        </p:txBody>
-      </p:sp>
-      <p:sp>
-        <p:nvSpPr>
-          <p:cNvPr id="10" name="Text 7"/>
-          <p:cNvSpPr txBox="1"/>
-          <p:nvPr/>
-        </p:nvSpPr>
-        <p:spPr>
-          <a:xfrm>
-            <a:off x="822960" y="2743200"/>
+              <a:t>1  Identification</a:t>
+            </a:r>
+            <a:endParaRPr lang="en-US" sz="1800" dirty="0"/>
+          </a:p>
+        </p:txBody>
+      </p:sp>
+      <p:sp>
+        <p:nvSpPr>
+          <p:cNvPr id="11" name="Text 8"/>
+          <p:cNvSpPr txBox="1"/>
+          <p:nvPr/>
+        </p:nvSpPr>
+        <p:spPr>
+          <a:xfrm>
+            <a:off x="822960" y="2880360"/>
             <a:ext cx="2966618" cy="731520"/>
           </a:xfrm>
           <a:prstGeom prst="rect">
@@ -5453,7 +6339,7 @@
               <a:buNone/>
             </a:pPr>
             <a:r>
-              <a:rPr lang="en-US" sz="1500" dirty="0">
+              <a:rPr lang="en-US" sz="1400" dirty="0">
                 <a:solidFill>
                   <a:srgbClr val="526066"/>
                 </a:solidFill>
@@ -5461,26 +6347,26 @@
                 <a:ea typeface="Arial" pitchFamily="34" charset="-122"/>
                 <a:cs typeface="Arial" pitchFamily="34" charset="-120"/>
               </a:rPr>
-              <a:t>Mønster i gentagne incidents</a:t>
-            </a:r>
-            <a:endParaRPr lang="en-US" sz="1500" dirty="0"/>
-          </a:p>
-        </p:txBody>
-      </p:sp>
-      <p:sp>
-        <p:nvSpPr>
-          <p:cNvPr id="11" name="Shape 8"/>
+              <a:t>Gentagne incidents, efter major incident eller proaktivt</a:t>
+            </a:r>
+            <a:endParaRPr lang="en-US" sz="1400" dirty="0"/>
+          </a:p>
+        </p:txBody>
+      </p:sp>
+      <p:sp>
+        <p:nvSpPr>
+          <p:cNvPr id="12" name="Shape 9"/>
           <p:cNvSpPr/>
           <p:nvPr/>
         </p:nvSpPr>
         <p:spPr>
           <a:xfrm>
-            <a:off x="4338218" y="2148840"/>
-            <a:ext cx="3515258" cy="1417320"/>
+            <a:off x="4338218" y="2377440"/>
+            <a:ext cx="3515258" cy="1325880"/>
           </a:xfrm>
           <a:prstGeom prst="roundRect">
             <a:avLst>
-              <a:gd name="adj" fmla="val 7742"/>
+              <a:gd name="adj" fmla="val 8276"/>
             </a:avLst>
           </a:prstGeom>
           <a:solidFill>
@@ -5496,14 +6382,14 @@
       </p:sp>
       <p:sp>
         <p:nvSpPr>
-          <p:cNvPr id="12" name="Text 9"/>
-          <p:cNvSpPr txBox="1"/>
-          <p:nvPr/>
-        </p:nvSpPr>
-        <p:spPr>
-          <a:xfrm>
-            <a:off x="4612538" y="2286000"/>
-            <a:ext cx="2966618" cy="411480"/>
+          <p:cNvPr id="13" name="Text 10"/>
+          <p:cNvSpPr txBox="1"/>
+          <p:nvPr/>
+        </p:nvSpPr>
+        <p:spPr>
+          <a:xfrm>
+            <a:off x="4612538" y="2487168"/>
+            <a:ext cx="2966618" cy="384048"/>
           </a:xfrm>
           <a:prstGeom prst="rect">
             <a:avLst/>
@@ -5519,7 +6405,7 @@
               <a:buNone/>
             </a:pPr>
             <a:r>
-              <a:rPr lang="en-US" sz="1900" b="1" dirty="0">
+              <a:rPr lang="en-US" sz="1800" b="1" dirty="0">
                 <a:solidFill>
                   <a:srgbClr val="17221A"/>
                 </a:solidFill>
@@ -5527,21 +6413,21 @@
                 <a:ea typeface="Arial" pitchFamily="34" charset="-122"/>
                 <a:cs typeface="Arial" pitchFamily="34" charset="-120"/>
               </a:rPr>
-              <a:t>Control</a:t>
-            </a:r>
-            <a:endParaRPr lang="en-US" sz="1900" dirty="0"/>
-          </a:p>
-        </p:txBody>
-      </p:sp>
-      <p:sp>
-        <p:nvSpPr>
-          <p:cNvPr id="13" name="Text 10"/>
-          <p:cNvSpPr txBox="1"/>
-          <p:nvPr/>
-        </p:nvSpPr>
-        <p:spPr>
-          <a:xfrm>
-            <a:off x="4612538" y="2743200"/>
+              <a:t>2  Problem control</a:t>
+            </a:r>
+            <a:endParaRPr lang="en-US" sz="1800" dirty="0"/>
+          </a:p>
+        </p:txBody>
+      </p:sp>
+      <p:sp>
+        <p:nvSpPr>
+          <p:cNvPr id="14" name="Text 11"/>
+          <p:cNvSpPr txBox="1"/>
+          <p:nvPr/>
+        </p:nvSpPr>
+        <p:spPr>
+          <a:xfrm>
+            <a:off x="4612538" y="2880360"/>
             <a:ext cx="2966618" cy="731520"/>
           </a:xfrm>
           <a:prstGeom prst="rect">
@@ -5558,7 +6444,7 @@
               <a:buNone/>
             </a:pPr>
             <a:r>
-              <a:rPr lang="en-US" sz="1500" dirty="0">
+              <a:rPr lang="en-US" sz="1400" dirty="0">
                 <a:solidFill>
                   <a:srgbClr val="526066"/>
                 </a:solidFill>
@@ -5566,26 +6452,26 @@
                 <a:ea typeface="Arial" pitchFamily="34" charset="-122"/>
                 <a:cs typeface="Arial" pitchFamily="34" charset="-120"/>
               </a:rPr>
-              <a:t>Root cause, workaround, known error</a:t>
-            </a:r>
-            <a:endParaRPr lang="en-US" sz="1500" dirty="0"/>
-          </a:p>
-        </p:txBody>
-      </p:sp>
-      <p:sp>
-        <p:nvSpPr>
-          <p:cNvPr id="14" name="Shape 11"/>
+              <a:t>Root cause og workaround. Kendt, ikke løst: known error</a:t>
+            </a:r>
+            <a:endParaRPr lang="en-US" sz="1400" dirty="0"/>
+          </a:p>
+        </p:txBody>
+      </p:sp>
+      <p:sp>
+        <p:nvSpPr>
+          <p:cNvPr id="15" name="Shape 12"/>
           <p:cNvSpPr/>
           <p:nvPr/>
         </p:nvSpPr>
         <p:spPr>
           <a:xfrm>
-            <a:off x="8127797" y="2148840"/>
-            <a:ext cx="3515258" cy="1417320"/>
+            <a:off x="8127797" y="2377440"/>
+            <a:ext cx="3515258" cy="1325880"/>
           </a:xfrm>
           <a:prstGeom prst="roundRect">
             <a:avLst>
-              <a:gd name="adj" fmla="val 7742"/>
+              <a:gd name="adj" fmla="val 8276"/>
             </a:avLst>
           </a:prstGeom>
           <a:solidFill>
@@ -5601,14 +6487,14 @@
       </p:sp>
       <p:sp>
         <p:nvSpPr>
-          <p:cNvPr id="15" name="Text 12"/>
-          <p:cNvSpPr txBox="1"/>
-          <p:nvPr/>
-        </p:nvSpPr>
-        <p:spPr>
-          <a:xfrm>
-            <a:off x="8402117" y="2286000"/>
-            <a:ext cx="2966618" cy="411480"/>
+          <p:cNvPr id="16" name="Text 13"/>
+          <p:cNvSpPr txBox="1"/>
+          <p:nvPr/>
+        </p:nvSpPr>
+        <p:spPr>
+          <a:xfrm>
+            <a:off x="8402117" y="2487168"/>
+            <a:ext cx="2966618" cy="384048"/>
           </a:xfrm>
           <a:prstGeom prst="rect">
             <a:avLst/>
@@ -5624,7 +6510,7 @@
               <a:buNone/>
             </a:pPr>
             <a:r>
-              <a:rPr lang="en-US" sz="1900" b="1" dirty="0">
+              <a:rPr lang="en-US" sz="1800" b="1" dirty="0">
                 <a:solidFill>
                   <a:srgbClr val="17221A"/>
                 </a:solidFill>
@@ -5632,21 +6518,21 @@
                 <a:ea typeface="Arial" pitchFamily="34" charset="-122"/>
                 <a:cs typeface="Arial" pitchFamily="34" charset="-120"/>
               </a:rPr>
-              <a:t>Error control</a:t>
-            </a:r>
-            <a:endParaRPr lang="en-US" sz="1900" dirty="0"/>
-          </a:p>
-        </p:txBody>
-      </p:sp>
-      <p:sp>
-        <p:nvSpPr>
-          <p:cNvPr id="16" name="Text 13"/>
-          <p:cNvSpPr txBox="1"/>
-          <p:nvPr/>
-        </p:nvSpPr>
-        <p:spPr>
-          <a:xfrm>
-            <a:off x="8402117" y="2743200"/>
+              <a:t>3  Error control</a:t>
+            </a:r>
+            <a:endParaRPr lang="en-US" sz="1800" dirty="0"/>
+          </a:p>
+        </p:txBody>
+      </p:sp>
+      <p:sp>
+        <p:nvSpPr>
+          <p:cNvPr id="17" name="Text 14"/>
+          <p:cNvSpPr txBox="1"/>
+          <p:nvPr/>
+        </p:nvSpPr>
+        <p:spPr>
+          <a:xfrm>
+            <a:off x="8402117" y="2880360"/>
             <a:ext cx="2966618" cy="731520"/>
           </a:xfrm>
           <a:prstGeom prst="rect">
@@ -5663,7 +6549,7 @@
               <a:buNone/>
             </a:pPr>
             <a:r>
-              <a:rPr lang="en-US" sz="1500" dirty="0">
+              <a:rPr lang="en-US" sz="1400" dirty="0">
                 <a:solidFill>
                   <a:srgbClr val="526066"/>
                 </a:solidFill>
@@ -5671,26 +6557,26 @@
                 <a:ea typeface="Arial" pitchFamily="34" charset="-122"/>
                 <a:cs typeface="Arial" pitchFamily="34" charset="-120"/>
               </a:rPr>
-              <a:t>Permanent løsning via Change Control</a:t>
-            </a:r>
-            <a:endParaRPr lang="en-US" sz="1500" dirty="0"/>
-          </a:p>
-        </p:txBody>
-      </p:sp>
-      <p:sp>
-        <p:nvSpPr>
-          <p:cNvPr id="17" name="Shape 14"/>
+              <a:t>Den rigtige løsning går til change control</a:t>
+            </a:r>
+            <a:endParaRPr lang="en-US" sz="1400" dirty="0"/>
+          </a:p>
+        </p:txBody>
+      </p:sp>
+      <p:sp>
+        <p:nvSpPr>
+          <p:cNvPr id="18" name="Shape 15"/>
           <p:cNvSpPr/>
           <p:nvPr/>
         </p:nvSpPr>
         <p:spPr>
           <a:xfrm>
-            <a:off x="548640" y="3886200"/>
-            <a:ext cx="5387188" cy="2148840"/>
+            <a:off x="548640" y="3931920"/>
+            <a:ext cx="5387188" cy="2194560"/>
           </a:xfrm>
           <a:prstGeom prst="roundRect">
             <a:avLst>
-              <a:gd name="adj" fmla="val 5106"/>
+              <a:gd name="adj" fmla="val 5000"/>
             </a:avLst>
           </a:prstGeom>
           <a:solidFill>
@@ -5706,7 +6592,7 @@
       </p:sp>
       <p:sp>
         <p:nvSpPr>
-          <p:cNvPr id="18" name="Text 15"/>
+          <p:cNvPr id="19" name="Text 16"/>
           <p:cNvSpPr txBox="1"/>
           <p:nvPr/>
         </p:nvSpPr>
@@ -5729,7 +6615,7 @@
               <a:buNone/>
             </a:pPr>
             <a:r>
-              <a:rPr lang="en-US" sz="2100" dirty="0">
+              <a:rPr lang="en-US" sz="2000" dirty="0">
                 <a:solidFill>
                   <a:srgbClr val="17221A"/>
                 </a:solidFill>
@@ -5739,20 +6625,20 @@
               </a:rPr>
               <a:t>Firmwarefejlen</a:t>
             </a:r>
-            <a:endParaRPr lang="en-US" sz="2100" dirty="0"/>
-          </a:p>
-        </p:txBody>
-      </p:sp>
-      <p:sp>
-        <p:nvSpPr>
-          <p:cNvPr id="19" name="Text 16"/>
-          <p:cNvSpPr txBox="1"/>
-          <p:nvPr/>
-        </p:nvSpPr>
-        <p:spPr>
-          <a:xfrm>
-            <a:off x="868680" y="4572000"/>
-            <a:ext cx="4747108" cy="1371600"/>
+            <a:endParaRPr lang="en-US" sz="2000" dirty="0"/>
+          </a:p>
+        </p:txBody>
+      </p:sp>
+      <p:sp>
+        <p:nvSpPr>
+          <p:cNvPr id="20" name="Text 17"/>
+          <p:cNvSpPr txBox="1"/>
+          <p:nvPr/>
+        </p:nvSpPr>
+        <p:spPr>
+          <a:xfrm>
+            <a:off x="868680" y="4526280"/>
+            <a:ext cx="4747108" cy="1508760"/>
           </a:xfrm>
           <a:prstGeom prst="rect">
             <a:avLst/>
@@ -5766,13 +6652,13 @@
           <a:p>
             <a:pPr marL="342900" indent="-342900">
               <a:spcAft>
-                <a:spcPts val="400"/>
+                <a:spcPts val="300"/>
               </a:spcAft>
               <a:buSzPct val="100000"/>
               <a:buChar char="•"/>
             </a:pPr>
             <a:r>
-              <a:rPr lang="en-US" sz="1600" dirty="0">
+              <a:rPr lang="en-US" sz="1500" dirty="0">
                 <a:solidFill>
                   <a:srgbClr val="526066"/>
                 </a:solidFill>
@@ -5780,20 +6666,20 @@
                 <a:ea typeface="Arial" pitchFamily="34" charset="-122"/>
                 <a:cs typeface="Arial" pitchFamily="34" charset="-120"/>
               </a:rPr>
-              <a:t>15 kunder mister forbindelsen om natten</a:t>
-            </a:r>
-            <a:endParaRPr lang="en-US" sz="1600" dirty="0"/>
+              <a:t>Efter opdatering: friland-sensorer mister net om natten, 15 kunder</a:t>
+            </a:r>
+            <a:endParaRPr lang="en-US" sz="1500" dirty="0"/>
           </a:p>
           <a:p>
             <a:pPr marL="342900" indent="-342900">
               <a:spcAft>
-                <a:spcPts val="400"/>
+                <a:spcPts val="300"/>
               </a:spcAft>
               <a:buSzPct val="100000"/>
               <a:buChar char="•"/>
             </a:pPr>
             <a:r>
-              <a:rPr lang="en-US" sz="1600" dirty="0">
+              <a:rPr lang="en-US" sz="1500" dirty="0">
                 <a:solidFill>
                   <a:srgbClr val="526066"/>
                 </a:solidFill>
@@ -5801,20 +6687,20 @@
                 <a:ea typeface="Arial" pitchFamily="34" charset="-122"/>
                 <a:cs typeface="Arial" pitchFamily="34" charset="-120"/>
               </a:rPr>
-              <a:t>Årsag: strømsparetilstand</a:t>
-            </a:r>
-            <a:endParaRPr lang="en-US" sz="1600" dirty="0"/>
+              <a:t>Årsag: strømspar, vågner ikke ved svagt signal</a:t>
+            </a:r>
+            <a:endParaRPr lang="en-US" sz="1500" dirty="0"/>
           </a:p>
           <a:p>
             <a:pPr marL="342900" indent="-342900">
               <a:spcAft>
-                <a:spcPts val="400"/>
+                <a:spcPts val="300"/>
               </a:spcAft>
               <a:buSzPct val="100000"/>
               <a:buChar char="•"/>
             </a:pPr>
             <a:r>
-              <a:rPr lang="en-US" sz="1600" dirty="0">
+              <a:rPr lang="en-US" sz="1500" dirty="0">
                 <a:solidFill>
                   <a:srgbClr val="526066"/>
                 </a:solidFill>
@@ -5822,26 +6708,47 @@
                 <a:ea typeface="Arial" pitchFamily="34" charset="-122"/>
                 <a:cs typeface="Arial" pitchFamily="34" charset="-120"/>
               </a:rPr>
-              <a:t>Rettelse via Change Control</a:t>
-            </a:r>
-            <a:endParaRPr lang="en-US" sz="1600" dirty="0"/>
-          </a:p>
-        </p:txBody>
-      </p:sp>
-      <p:sp>
-        <p:nvSpPr>
-          <p:cNvPr id="20" name="Shape 17"/>
+              <a:t>Workaround: slå strømspar fra, known error</a:t>
+            </a:r>
+            <a:endParaRPr lang="en-US" sz="1500" dirty="0"/>
+          </a:p>
+          <a:p>
+            <a:pPr marL="342900" indent="-342900">
+              <a:spcAft>
+                <a:spcPts val="300"/>
+              </a:spcAft>
+              <a:buSzPct val="100000"/>
+              <a:buChar char="•"/>
+            </a:pPr>
+            <a:r>
+              <a:rPr lang="en-US" sz="1500" dirty="0">
+                <a:solidFill>
+                  <a:srgbClr val="526066"/>
+                </a:solidFill>
+                <a:latin typeface="Arial" pitchFamily="34" charset="0"/>
+                <a:ea typeface="Arial" pitchFamily="34" charset="-122"/>
+                <a:cs typeface="Arial" pitchFamily="34" charset="-120"/>
+              </a:rPr>
+              <a:t>Rettet firmware via change control</a:t>
+            </a:r>
+            <a:endParaRPr lang="en-US" sz="1500" dirty="0"/>
+          </a:p>
+        </p:txBody>
+      </p:sp>
+      <p:sp>
+        <p:nvSpPr>
+          <p:cNvPr id="21" name="Shape 18"/>
           <p:cNvSpPr/>
           <p:nvPr/>
         </p:nvSpPr>
         <p:spPr>
           <a:xfrm>
-            <a:off x="6255868" y="3886200"/>
-            <a:ext cx="5387188" cy="2148840"/>
+            <a:off x="6255868" y="3931920"/>
+            <a:ext cx="5387188" cy="2194560"/>
           </a:xfrm>
           <a:prstGeom prst="roundRect">
             <a:avLst>
-              <a:gd name="adj" fmla="val 5106"/>
+              <a:gd name="adj" fmla="val 5000"/>
             </a:avLst>
           </a:prstGeom>
           <a:solidFill>
@@ -5857,7 +6764,7 @@
       </p:sp>
       <p:sp>
         <p:nvSpPr>
-          <p:cNvPr id="21" name="Text 18"/>
+          <p:cNvPr id="22" name="Text 19"/>
           <p:cNvSpPr txBox="1"/>
           <p:nvPr/>
         </p:nvSpPr>
@@ -5880,7 +6787,7 @@
               <a:buNone/>
             </a:pPr>
             <a:r>
-              <a:rPr lang="en-US" sz="2100" dirty="0">
+              <a:rPr lang="en-US" sz="2000" dirty="0">
                 <a:solidFill>
                   <a:srgbClr val="1E4A26"/>
                 </a:solidFill>
@@ -5890,20 +6797,20 @@
               </a:rPr>
               <a:t>Incident og problem</a:t>
             </a:r>
-            <a:endParaRPr lang="en-US" sz="2100" dirty="0"/>
-          </a:p>
-        </p:txBody>
-      </p:sp>
-      <p:sp>
-        <p:nvSpPr>
-          <p:cNvPr id="22" name="Text 19"/>
-          <p:cNvSpPr txBox="1"/>
-          <p:nvPr/>
-        </p:nvSpPr>
-        <p:spPr>
-          <a:xfrm>
-            <a:off x="6575908" y="4572000"/>
-            <a:ext cx="4747108" cy="1371600"/>
+            <a:endParaRPr lang="en-US" sz="2000" dirty="0"/>
+          </a:p>
+        </p:txBody>
+      </p:sp>
+      <p:sp>
+        <p:nvSpPr>
+          <p:cNvPr id="23" name="Text 20"/>
+          <p:cNvSpPr txBox="1"/>
+          <p:nvPr/>
+        </p:nvSpPr>
+        <p:spPr>
+          <a:xfrm>
+            <a:off x="6575908" y="4526280"/>
+            <a:ext cx="4747108" cy="1508760"/>
           </a:xfrm>
           <a:prstGeom prst="rect">
             <a:avLst/>
@@ -5917,13 +6824,13 @@
           <a:p>
             <a:pPr marL="342900" indent="-342900">
               <a:spcAft>
-                <a:spcPts val="400"/>
+                <a:spcPts val="300"/>
               </a:spcAft>
               <a:buSzPct val="100000"/>
               <a:buChar char="•"/>
             </a:pPr>
             <a:r>
-              <a:rPr lang="en-US" sz="1600" dirty="0">
+              <a:rPr lang="en-US" sz="1500" dirty="0">
                 <a:solidFill>
                   <a:srgbClr val="1E4A26"/>
                 </a:solidFill>
@@ -5931,20 +6838,20 @@
                 <a:ea typeface="Arial" pitchFamily="34" charset="-122"/>
                 <a:cs typeface="Arial" pitchFamily="34" charset="-120"/>
               </a:rPr>
-              <a:t>Incident genopretter servicen</a:t>
-            </a:r>
-            <a:endParaRPr lang="en-US" sz="1600" dirty="0"/>
+              <a:t>Incident får servicen op</a:t>
+            </a:r>
+            <a:endParaRPr lang="en-US" sz="1500" dirty="0"/>
           </a:p>
           <a:p>
             <a:pPr marL="342900" indent="-342900">
               <a:spcAft>
-                <a:spcPts val="400"/>
+                <a:spcPts val="300"/>
               </a:spcAft>
               <a:buSzPct val="100000"/>
               <a:buChar char="•"/>
             </a:pPr>
             <a:r>
-              <a:rPr lang="en-US" sz="1600" dirty="0">
+              <a:rPr lang="en-US" sz="1500" dirty="0">
                 <a:solidFill>
                   <a:srgbClr val="1E4A26"/>
                 </a:solidFill>
@@ -5954,18 +6861,18 @@
               </a:rPr>
               <a:t>Problem fjerner årsagen</a:t>
             </a:r>
-            <a:endParaRPr lang="en-US" sz="1600" dirty="0"/>
+            <a:endParaRPr lang="en-US" sz="1500" dirty="0"/>
           </a:p>
           <a:p>
             <a:pPr marL="342900" indent="-342900">
               <a:spcAft>
-                <a:spcPts val="400"/>
+                <a:spcPts val="300"/>
               </a:spcAft>
               <a:buSzPct val="100000"/>
               <a:buChar char="•"/>
             </a:pPr>
             <a:r>
-              <a:rPr lang="en-US" sz="1600" dirty="0">
+              <a:rPr lang="en-US" sz="1500" dirty="0">
                 <a:solidFill>
                   <a:srgbClr val="1E4A26"/>
                 </a:solidFill>
@@ -5973,9 +6880,30 @@
                 <a:ea typeface="Arial" pitchFamily="34" charset="-122"/>
                 <a:cs typeface="Arial" pitchFamily="34" charset="-120"/>
               </a:rPr>
-              <a:t>Known errors gør næste fix hurtigere</a:t>
-            </a:r>
-            <a:endParaRPr lang="en-US" sz="1600" dirty="0"/>
+              <a:t>Incident kan lukkes, selvom problemet er åbent</a:t>
+            </a:r>
+            <a:endParaRPr lang="en-US" sz="1500" dirty="0"/>
+          </a:p>
+          <a:p>
+            <a:pPr marL="342900" indent="-342900">
+              <a:spcAft>
+                <a:spcPts val="300"/>
+              </a:spcAft>
+              <a:buSzPct val="100000"/>
+              <a:buChar char="•"/>
+            </a:pPr>
+            <a:r>
+              <a:rPr lang="en-US" sz="1500" dirty="0">
+                <a:solidFill>
+                  <a:srgbClr val="1E4A26"/>
+                </a:solidFill>
+                <a:latin typeface="Arial" pitchFamily="34" charset="0"/>
+                <a:ea typeface="Arial" pitchFamily="34" charset="-122"/>
+                <a:cs typeface="Arial" pitchFamily="34" charset="-120"/>
+              </a:rPr>
+              <a:t>Known errors: næste løses hurtigere</a:t>
+            </a:r>
+            <a:endParaRPr lang="en-US" sz="1500" dirty="0"/>
           </a:p>
         </p:txBody>
       </p:sp>
@@ -6169,13 +7097,52 @@
       </p:sp>
       <p:sp>
         <p:nvSpPr>
-          <p:cNvPr id="7" name="Shape 4"/>
+          <p:cNvPr id="7" name="Text 4"/>
+          <p:cNvSpPr txBox="1"/>
+          <p:nvPr/>
+        </p:nvSpPr>
+        <p:spPr>
+          <a:xfrm>
+            <a:off x="548640" y="1463040"/>
+            <a:ext cx="11094415" cy="411480"/>
+          </a:xfrm>
+          <a:prstGeom prst="rect">
+            <a:avLst/>
+          </a:prstGeom>
+          <a:noFill/>
+          <a:ln/>
+        </p:spPr>
+        <p:txBody>
+          <a:bodyPr wrap="square" lIns="0" tIns="0" rIns="0" bIns="0" rtlCol="0" anchor="t"/>
+          <a:lstStyle/>
+          <a:p>
+            <a:pPr indent="0" marL="0">
+              <a:buNone/>
+            </a:pPr>
+            <a:r>
+              <a:rPr lang="en-US" sz="1900" i="1" dirty="0">
+                <a:solidFill>
+                  <a:srgbClr val="2F6B3A"/>
+                </a:solidFill>
+                <a:latin typeface="Georgia" pitchFamily="34" charset="0"/>
+                <a:ea typeface="Georgia" pitchFamily="34" charset="-122"/>
+                <a:cs typeface="Georgia" pitchFamily="34" charset="-120"/>
+              </a:rPr>
+              <a:t>En service skal ses fra fire sider. Mangler én, går det galt.</a:t>
+            </a:r>
+            <a:endParaRPr lang="en-US" sz="1900" dirty="0"/>
+          </a:p>
+        </p:txBody>
+      </p:sp>
+      <p:sp>
+        <p:nvSpPr>
+          <p:cNvPr id="8" name="Shape 5"/>
           <p:cNvSpPr/>
           <p:nvPr/>
         </p:nvSpPr>
         <p:spPr>
           <a:xfrm>
-            <a:off x="548640" y="1691640"/>
+            <a:off x="548640" y="2011680"/>
             <a:ext cx="5387188" cy="1600200"/>
           </a:xfrm>
           <a:prstGeom prst="roundRect">
@@ -6196,14 +7163,14 @@
       </p:sp>
       <p:sp>
         <p:nvSpPr>
-          <p:cNvPr id="8" name="Shape 5"/>
+          <p:cNvPr id="9" name="Shape 6"/>
           <p:cNvSpPr/>
           <p:nvPr/>
         </p:nvSpPr>
         <p:spPr>
           <a:xfrm>
-            <a:off x="822960" y="2148840"/>
-            <a:ext cx="685800" cy="685800"/>
+            <a:off x="777240" y="2240280"/>
+            <a:ext cx="502920" cy="502920"/>
           </a:xfrm>
           <a:prstGeom prst="ellipse">
             <a:avLst/>
@@ -6221,7 +7188,7 @@
       </p:sp>
       <p:pic>
         <p:nvPicPr>
-          <p:cNvPr id="9" name="Image 0" descr="preencoded.png">    </p:cNvPr>
+          <p:cNvPr id="10" name="Image 0" descr="preencoded.png">    </p:cNvPr>
           <p:cNvPicPr>
             <a:picLocks noChangeAspect="1"/>
           </p:cNvPicPr>
@@ -6235,8 +7202,8 @@
         </p:blipFill>
         <p:spPr>
           <a:xfrm>
-            <a:off x="987552" y="2313432"/>
-            <a:ext cx="356616" cy="356616"/>
+            <a:off x="897941" y="2360981"/>
+            <a:ext cx="261518" cy="261518"/>
           </a:xfrm>
           <a:prstGeom prst="rect">
             <a:avLst/>
@@ -6245,14 +7212,53 @@
       </p:pic>
       <p:sp>
         <p:nvSpPr>
-          <p:cNvPr id="10" name="Text 6"/>
-          <p:cNvSpPr txBox="1"/>
-          <p:nvPr/>
-        </p:nvSpPr>
-        <p:spPr>
-          <a:xfrm>
-            <a:off x="1737360" y="2011680"/>
-            <a:ext cx="4015588" cy="457200"/>
+          <p:cNvPr id="11" name="Text 7"/>
+          <p:cNvSpPr txBox="1"/>
+          <p:nvPr/>
+        </p:nvSpPr>
+        <p:spPr>
+          <a:xfrm>
+            <a:off x="1417320" y="2212848"/>
+            <a:ext cx="4335628" cy="548640"/>
+          </a:xfrm>
+          <a:prstGeom prst="rect">
+            <a:avLst/>
+          </a:prstGeom>
+          <a:noFill/>
+          <a:ln/>
+        </p:spPr>
+        <p:txBody>
+          <a:bodyPr wrap="square" lIns="0" tIns="0" rIns="0" bIns="0" rtlCol="0" anchor="ctr"/>
+          <a:lstStyle/>
+          <a:p>
+            <a:pPr indent="0" marL="0">
+              <a:buNone/>
+            </a:pPr>
+            <a:r>
+              <a:rPr lang="en-US" sz="1700" b="1" dirty="0">
+                <a:solidFill>
+                  <a:srgbClr val="17221A"/>
+                </a:solidFill>
+                <a:latin typeface="Arial" pitchFamily="34" charset="0"/>
+                <a:ea typeface="Arial" pitchFamily="34" charset="-122"/>
+                <a:cs typeface="Arial" pitchFamily="34" charset="-120"/>
+              </a:rPr>
+              <a:t>Organisationer og mennesker</a:t>
+            </a:r>
+            <a:endParaRPr lang="en-US" sz="1700" dirty="0"/>
+          </a:p>
+        </p:txBody>
+      </p:sp>
+      <p:sp>
+        <p:nvSpPr>
+          <p:cNvPr id="12" name="Text 8"/>
+          <p:cNvSpPr txBox="1"/>
+          <p:nvPr/>
+        </p:nvSpPr>
+        <p:spPr>
+          <a:xfrm>
+            <a:off x="822960" y="2834640"/>
+            <a:ext cx="4884268" cy="731520"/>
           </a:xfrm>
           <a:prstGeom prst="rect">
             <a:avLst/>
@@ -6264,50 +7270,15 @@
           <a:bodyPr wrap="square" lIns="0" tIns="0" rIns="0" bIns="0" rtlCol="0" anchor="t"/>
           <a:lstStyle/>
           <a:p>
-            <a:pPr indent="0" marL="0">
-              <a:buNone/>
-            </a:pPr>
-            <a:r>
-              <a:rPr lang="en-US" sz="1900" b="1" dirty="0">
-                <a:solidFill>
-                  <a:srgbClr val="17221A"/>
-                </a:solidFill>
-                <a:latin typeface="Arial" pitchFamily="34" charset="0"/>
-                <a:ea typeface="Arial" pitchFamily="34" charset="-122"/>
-                <a:cs typeface="Arial" pitchFamily="34" charset="-120"/>
-              </a:rPr>
-              <a:t>Mennesker</a:t>
-            </a:r>
-            <a:endParaRPr lang="en-US" sz="1900" dirty="0"/>
-          </a:p>
-        </p:txBody>
-      </p:sp>
-      <p:sp>
-        <p:nvSpPr>
-          <p:cNvPr id="11" name="Text 7"/>
-          <p:cNvSpPr txBox="1"/>
-          <p:nvPr/>
-        </p:nvSpPr>
-        <p:spPr>
-          <a:xfrm>
-            <a:off x="1737360" y="2514600"/>
-            <a:ext cx="4015588" cy="548640"/>
-          </a:xfrm>
-          <a:prstGeom prst="rect">
-            <a:avLst/>
-          </a:prstGeom>
-          <a:noFill/>
-          <a:ln/>
-        </p:spPr>
-        <p:txBody>
-          <a:bodyPr wrap="square" lIns="0" tIns="0" rIns="0" bIns="0" rtlCol="0" anchor="t"/>
-          <a:lstStyle/>
-          <a:p>
-            <a:pPr indent="0" marL="0">
-              <a:buNone/>
-            </a:pPr>
-            <a:r>
-              <a:rPr lang="en-US" sz="1600" dirty="0">
+            <a:pPr marL="342900" indent="-342900">
+              <a:spcAft>
+                <a:spcPts val="300"/>
+              </a:spcAft>
+              <a:buSzPct val="100000"/>
+              <a:buChar char="•"/>
+            </a:pPr>
+            <a:r>
+              <a:rPr lang="en-US" sz="1400" dirty="0">
                 <a:solidFill>
                   <a:srgbClr val="526066"/>
                 </a:solidFill>
@@ -6315,21 +7286,42 @@
                 <a:ea typeface="Arial" pitchFamily="34" charset="-122"/>
                 <a:cs typeface="Arial" pitchFamily="34" charset="-120"/>
               </a:rPr>
-              <a:t>Klare roller, ingen "dem og os"</a:t>
-            </a:r>
-            <a:endParaRPr lang="en-US" sz="1600" dirty="0"/>
-          </a:p>
-        </p:txBody>
-      </p:sp>
-      <p:sp>
-        <p:nvSpPr>
-          <p:cNvPr id="12" name="Shape 8"/>
+              <a:t>R&amp;D i byen, salg på fabrikken: os og dem</a:t>
+            </a:r>
+            <a:endParaRPr lang="en-US" sz="1400" dirty="0"/>
+          </a:p>
+          <a:p>
+            <a:pPr marL="342900" indent="-342900">
+              <a:spcAft>
+                <a:spcPts val="300"/>
+              </a:spcAft>
+              <a:buSzPct val="100000"/>
+              <a:buChar char="•"/>
+            </a:pPr>
+            <a:r>
+              <a:rPr lang="en-US" sz="1400" dirty="0">
+                <a:solidFill>
+                  <a:srgbClr val="526066"/>
+                </a:solidFill>
+                <a:latin typeface="Arial" pitchFamily="34" charset="0"/>
+                <a:ea typeface="Arial" pitchFamily="34" charset="-122"/>
+                <a:cs typeface="Arial" pitchFamily="34" charset="-120"/>
+              </a:rPr>
+              <a:t>Klare roller, sig det tidligt, når noget går galt</a:t>
+            </a:r>
+            <a:endParaRPr lang="en-US" sz="1400" dirty="0"/>
+          </a:p>
+        </p:txBody>
+      </p:sp>
+      <p:sp>
+        <p:nvSpPr>
+          <p:cNvPr id="13" name="Shape 9"/>
           <p:cNvSpPr/>
           <p:nvPr/>
         </p:nvSpPr>
         <p:spPr>
           <a:xfrm>
-            <a:off x="6255868" y="1691640"/>
+            <a:off x="6255868" y="2011680"/>
             <a:ext cx="5387188" cy="1600200"/>
           </a:xfrm>
           <a:prstGeom prst="roundRect">
@@ -6350,14 +7342,14 @@
       </p:sp>
       <p:sp>
         <p:nvSpPr>
-          <p:cNvPr id="13" name="Shape 9"/>
+          <p:cNvPr id="14" name="Shape 10"/>
           <p:cNvSpPr/>
           <p:nvPr/>
         </p:nvSpPr>
         <p:spPr>
           <a:xfrm>
-            <a:off x="6530188" y="2148840"/>
-            <a:ext cx="685800" cy="685800"/>
+            <a:off x="6484468" y="2240280"/>
+            <a:ext cx="502920" cy="502920"/>
           </a:xfrm>
           <a:prstGeom prst="ellipse">
             <a:avLst/>
@@ -6375,7 +7367,7 @@
       </p:sp>
       <p:pic>
         <p:nvPicPr>
-          <p:cNvPr id="14" name="Image 1" descr="preencoded.png">    </p:cNvPr>
+          <p:cNvPr id="15" name="Image 1" descr="preencoded.png">    </p:cNvPr>
           <p:cNvPicPr>
             <a:picLocks noChangeAspect="1"/>
           </p:cNvPicPr>
@@ -6389,8 +7381,8 @@
         </p:blipFill>
         <p:spPr>
           <a:xfrm>
-            <a:off x="6694780" y="2313432"/>
-            <a:ext cx="356616" cy="356616"/>
+            <a:off x="6605168" y="2360981"/>
+            <a:ext cx="261518" cy="261518"/>
           </a:xfrm>
           <a:prstGeom prst="rect">
             <a:avLst/>
@@ -6399,14 +7391,53 @@
       </p:pic>
       <p:sp>
         <p:nvSpPr>
-          <p:cNvPr id="15" name="Text 10"/>
-          <p:cNvSpPr txBox="1"/>
-          <p:nvPr/>
-        </p:nvSpPr>
-        <p:spPr>
-          <a:xfrm>
-            <a:off x="7444588" y="2011680"/>
-            <a:ext cx="4015588" cy="457200"/>
+          <p:cNvPr id="16" name="Text 11"/>
+          <p:cNvSpPr txBox="1"/>
+          <p:nvPr/>
+        </p:nvSpPr>
+        <p:spPr>
+          <a:xfrm>
+            <a:off x="7124548" y="2212848"/>
+            <a:ext cx="4335628" cy="548640"/>
+          </a:xfrm>
+          <a:prstGeom prst="rect">
+            <a:avLst/>
+          </a:prstGeom>
+          <a:noFill/>
+          <a:ln/>
+        </p:spPr>
+        <p:txBody>
+          <a:bodyPr wrap="square" lIns="0" tIns="0" rIns="0" bIns="0" rtlCol="0" anchor="ctr"/>
+          <a:lstStyle/>
+          <a:p>
+            <a:pPr indent="0" marL="0">
+              <a:buNone/>
+            </a:pPr>
+            <a:r>
+              <a:rPr lang="en-US" sz="1700" b="1" dirty="0">
+                <a:solidFill>
+                  <a:srgbClr val="17221A"/>
+                </a:solidFill>
+                <a:latin typeface="Arial" pitchFamily="34" charset="0"/>
+                <a:ea typeface="Arial" pitchFamily="34" charset="-122"/>
+                <a:cs typeface="Arial" pitchFamily="34" charset="-120"/>
+              </a:rPr>
+              <a:t>Information og teknologi</a:t>
+            </a:r>
+            <a:endParaRPr lang="en-US" sz="1700" dirty="0"/>
+          </a:p>
+        </p:txBody>
+      </p:sp>
+      <p:sp>
+        <p:nvSpPr>
+          <p:cNvPr id="17" name="Text 12"/>
+          <p:cNvSpPr txBox="1"/>
+          <p:nvPr/>
+        </p:nvSpPr>
+        <p:spPr>
+          <a:xfrm>
+            <a:off x="6530188" y="2834640"/>
+            <a:ext cx="4884268" cy="731520"/>
           </a:xfrm>
           <a:prstGeom prst="rect">
             <a:avLst/>
@@ -6418,50 +7449,15 @@
           <a:bodyPr wrap="square" lIns="0" tIns="0" rIns="0" bIns="0" rtlCol="0" anchor="t"/>
           <a:lstStyle/>
           <a:p>
-            <a:pPr indent="0" marL="0">
-              <a:buNone/>
-            </a:pPr>
-            <a:r>
-              <a:rPr lang="en-US" sz="1900" b="1" dirty="0">
-                <a:solidFill>
-                  <a:srgbClr val="17221A"/>
-                </a:solidFill>
-                <a:latin typeface="Arial" pitchFamily="34" charset="0"/>
-                <a:ea typeface="Arial" pitchFamily="34" charset="-122"/>
-                <a:cs typeface="Arial" pitchFamily="34" charset="-120"/>
-              </a:rPr>
-              <a:t>Information og teknologi</a:t>
-            </a:r>
-            <a:endParaRPr lang="en-US" sz="1900" dirty="0"/>
-          </a:p>
-        </p:txBody>
-      </p:sp>
-      <p:sp>
-        <p:nvSpPr>
-          <p:cNvPr id="16" name="Text 11"/>
-          <p:cNvSpPr txBox="1"/>
-          <p:nvPr/>
-        </p:nvSpPr>
-        <p:spPr>
-          <a:xfrm>
-            <a:off x="7444588" y="2514600"/>
-            <a:ext cx="4015588" cy="548640"/>
-          </a:xfrm>
-          <a:prstGeom prst="rect">
-            <a:avLst/>
-          </a:prstGeom>
-          <a:noFill/>
-          <a:ln/>
-        </p:spPr>
-        <p:txBody>
-          <a:bodyPr wrap="square" lIns="0" tIns="0" rIns="0" bIns="0" rtlCol="0" anchor="t"/>
-          <a:lstStyle/>
-          <a:p>
-            <a:pPr indent="0" marL="0">
-              <a:buNone/>
-            </a:pPr>
-            <a:r>
-              <a:rPr lang="en-US" sz="1600" dirty="0">
+            <a:pPr marL="342900" indent="-342900">
+              <a:spcAft>
+                <a:spcPts val="300"/>
+              </a:spcAft>
+              <a:buSzPct val="100000"/>
+              <a:buChar char="•"/>
+            </a:pPr>
+            <a:r>
+              <a:rPr lang="en-US" sz="1400" dirty="0">
                 <a:solidFill>
                   <a:srgbClr val="526066"/>
                 </a:solidFill>
@@ -6469,21 +7465,42 @@
                 <a:ea typeface="Arial" pitchFamily="34" charset="-122"/>
                 <a:cs typeface="Arial" pitchFamily="34" charset="-120"/>
               </a:rPr>
-              <a:t>Sensordata, GDPR, skalering</a:t>
-            </a:r>
-            <a:endParaRPr lang="en-US" sz="1600" dirty="0"/>
-          </a:p>
-        </p:txBody>
-      </p:sp>
-      <p:sp>
-        <p:nvSpPr>
-          <p:cNvPr id="17" name="Shape 12"/>
+              <a:t>Sensordata er kernen, landmanden ejer dem</a:t>
+            </a:r>
+            <a:endParaRPr lang="en-US" sz="1400" dirty="0"/>
+          </a:p>
+          <a:p>
+            <a:pPr marL="342900" indent="-342900">
+              <a:spcAft>
+                <a:spcPts val="300"/>
+              </a:spcAft>
+              <a:buSzPct val="100000"/>
+              <a:buChar char="•"/>
+            </a:pPr>
+            <a:r>
+              <a:rPr lang="en-US" sz="1400" dirty="0">
+                <a:solidFill>
+                  <a:srgbClr val="526066"/>
+                </a:solidFill>
+                <a:latin typeface="Arial" pitchFamily="34" charset="0"/>
+                <a:ea typeface="Arial" pitchFamily="34" charset="-122"/>
+                <a:cs typeface="Arial" pitchFamily="34" charset="-120"/>
+              </a:rPr>
+              <a:t>Persondata: GDPR. Skal kunne vokse</a:t>
+            </a:r>
+            <a:endParaRPr lang="en-US" sz="1400" dirty="0"/>
+          </a:p>
+        </p:txBody>
+      </p:sp>
+      <p:sp>
+        <p:nvSpPr>
+          <p:cNvPr id="18" name="Shape 13"/>
           <p:cNvSpPr/>
           <p:nvPr/>
         </p:nvSpPr>
         <p:spPr>
           <a:xfrm>
-            <a:off x="548640" y="3520440"/>
+            <a:off x="548640" y="3794760"/>
             <a:ext cx="5387188" cy="1600200"/>
           </a:xfrm>
           <a:prstGeom prst="roundRect">
@@ -6504,14 +7521,14 @@
       </p:sp>
       <p:sp>
         <p:nvSpPr>
-          <p:cNvPr id="18" name="Shape 13"/>
+          <p:cNvPr id="19" name="Shape 14"/>
           <p:cNvSpPr/>
           <p:nvPr/>
         </p:nvSpPr>
         <p:spPr>
           <a:xfrm>
-            <a:off x="822960" y="3977640"/>
-            <a:ext cx="685800" cy="685800"/>
+            <a:off x="777240" y="4023360"/>
+            <a:ext cx="502920" cy="502920"/>
           </a:xfrm>
           <a:prstGeom prst="ellipse">
             <a:avLst/>
@@ -6529,7 +7546,7 @@
       </p:sp>
       <p:pic>
         <p:nvPicPr>
-          <p:cNvPr id="19" name="Image 2" descr="preencoded.png">    </p:cNvPr>
+          <p:cNvPr id="20" name="Image 2" descr="preencoded.png">    </p:cNvPr>
           <p:cNvPicPr>
             <a:picLocks noChangeAspect="1"/>
           </p:cNvPicPr>
@@ -6543,8 +7560,8 @@
         </p:blipFill>
         <p:spPr>
           <a:xfrm>
-            <a:off x="987552" y="4142232"/>
-            <a:ext cx="356616" cy="356616"/>
+            <a:off x="897941" y="4144061"/>
+            <a:ext cx="261518" cy="261518"/>
           </a:xfrm>
           <a:prstGeom prst="rect">
             <a:avLst/>
@@ -6553,14 +7570,53 @@
       </p:pic>
       <p:sp>
         <p:nvSpPr>
-          <p:cNvPr id="20" name="Text 14"/>
-          <p:cNvSpPr txBox="1"/>
-          <p:nvPr/>
-        </p:nvSpPr>
-        <p:spPr>
-          <a:xfrm>
-            <a:off x="1737360" y="3840480"/>
-            <a:ext cx="4015588" cy="457200"/>
+          <p:cNvPr id="21" name="Text 15"/>
+          <p:cNvSpPr txBox="1"/>
+          <p:nvPr/>
+        </p:nvSpPr>
+        <p:spPr>
+          <a:xfrm>
+            <a:off x="1417320" y="3995928"/>
+            <a:ext cx="4335628" cy="548640"/>
+          </a:xfrm>
+          <a:prstGeom prst="rect">
+            <a:avLst/>
+          </a:prstGeom>
+          <a:noFill/>
+          <a:ln/>
+        </p:spPr>
+        <p:txBody>
+          <a:bodyPr wrap="square" lIns="0" tIns="0" rIns="0" bIns="0" rtlCol="0" anchor="ctr"/>
+          <a:lstStyle/>
+          <a:p>
+            <a:pPr indent="0" marL="0">
+              <a:buNone/>
+            </a:pPr>
+            <a:r>
+              <a:rPr lang="en-US" sz="1700" b="1" dirty="0">
+                <a:solidFill>
+                  <a:srgbClr val="17221A"/>
+                </a:solidFill>
+                <a:latin typeface="Arial" pitchFamily="34" charset="0"/>
+                <a:ea typeface="Arial" pitchFamily="34" charset="-122"/>
+                <a:cs typeface="Arial" pitchFamily="34" charset="-120"/>
+              </a:rPr>
+              <a:t>Partnere og leverandører</a:t>
+            </a:r>
+            <a:endParaRPr lang="en-US" sz="1700" dirty="0"/>
+          </a:p>
+        </p:txBody>
+      </p:sp>
+      <p:sp>
+        <p:nvSpPr>
+          <p:cNvPr id="22" name="Text 16"/>
+          <p:cNvSpPr txBox="1"/>
+          <p:nvPr/>
+        </p:nvSpPr>
+        <p:spPr>
+          <a:xfrm>
+            <a:off x="822960" y="4617720"/>
+            <a:ext cx="4884268" cy="731520"/>
           </a:xfrm>
           <a:prstGeom prst="rect">
             <a:avLst/>
@@ -6572,50 +7628,15 @@
           <a:bodyPr wrap="square" lIns="0" tIns="0" rIns="0" bIns="0" rtlCol="0" anchor="t"/>
           <a:lstStyle/>
           <a:p>
-            <a:pPr indent="0" marL="0">
-              <a:buNone/>
-            </a:pPr>
-            <a:r>
-              <a:rPr lang="en-US" sz="1900" b="1" dirty="0">
-                <a:solidFill>
-                  <a:srgbClr val="17221A"/>
-                </a:solidFill>
-                <a:latin typeface="Arial" pitchFamily="34" charset="0"/>
-                <a:ea typeface="Arial" pitchFamily="34" charset="-122"/>
-                <a:cs typeface="Arial" pitchFamily="34" charset="-120"/>
-              </a:rPr>
-              <a:t>Partnere og leverandører</a:t>
-            </a:r>
-            <a:endParaRPr lang="en-US" sz="1900" dirty="0"/>
-          </a:p>
-        </p:txBody>
-      </p:sp>
-      <p:sp>
-        <p:nvSpPr>
-          <p:cNvPr id="21" name="Text 15"/>
-          <p:cNvSpPr txBox="1"/>
-          <p:nvPr/>
-        </p:nvSpPr>
-        <p:spPr>
-          <a:xfrm>
-            <a:off x="1737360" y="4343400"/>
-            <a:ext cx="4015588" cy="548640"/>
-          </a:xfrm>
-          <a:prstGeom prst="rect">
-            <a:avLst/>
-          </a:prstGeom>
-          <a:noFill/>
-          <a:ln/>
-        </p:spPr>
-        <p:txBody>
-          <a:bodyPr wrap="square" lIns="0" tIns="0" rIns="0" bIns="0" rtlCol="0" anchor="t"/>
-          <a:lstStyle/>
-          <a:p>
-            <a:pPr indent="0" marL="0">
-              <a:buNone/>
-            </a:pPr>
-            <a:r>
-              <a:rPr lang="en-US" sz="1600" dirty="0">
+            <a:pPr marL="342900" indent="-342900">
+              <a:spcAft>
+                <a:spcPts val="300"/>
+              </a:spcAft>
+              <a:buSzPct val="100000"/>
+              <a:buChar char="•"/>
+            </a:pPr>
+            <a:r>
+              <a:rPr lang="en-US" sz="1400" dirty="0">
                 <a:solidFill>
                   <a:srgbClr val="526066"/>
                 </a:solidFill>
@@ -6623,21 +7644,42 @@
                 <a:ea typeface="Arial" pitchFamily="34" charset="-122"/>
                 <a:cs typeface="Arial" pitchFamily="34" charset="-120"/>
               </a:rPr>
-              <a:t>Deres nedetid er vores</a:t>
-            </a:r>
-            <a:endParaRPr lang="en-US" sz="1600" dirty="0"/>
-          </a:p>
-        </p:txBody>
-      </p:sp>
-      <p:sp>
-        <p:nvSpPr>
-          <p:cNvPr id="22" name="Shape 16"/>
+              <a:t>Hosting, sensorleverandører, teleselskaber</a:t>
+            </a:r>
+            <a:endParaRPr lang="en-US" sz="1400" dirty="0"/>
+          </a:p>
+          <a:p>
+            <a:pPr marL="342900" indent="-342900">
+              <a:spcAft>
+                <a:spcPts val="300"/>
+              </a:spcAft>
+              <a:buSzPct val="100000"/>
+              <a:buChar char="•"/>
+            </a:pPr>
+            <a:r>
+              <a:rPr lang="en-US" sz="1400" dirty="0">
+                <a:solidFill>
+                  <a:srgbClr val="526066"/>
+                </a:solidFill>
+                <a:latin typeface="Arial" pitchFamily="34" charset="0"/>
+                <a:ea typeface="Arial" pitchFamily="34" charset="-122"/>
+                <a:cs typeface="Arial" pitchFamily="34" charset="-120"/>
+              </a:rPr>
+              <a:t>Er de nede, er Green-IT nede: failover</a:t>
+            </a:r>
+            <a:endParaRPr lang="en-US" sz="1400" dirty="0"/>
+          </a:p>
+        </p:txBody>
+      </p:sp>
+      <p:sp>
+        <p:nvSpPr>
+          <p:cNvPr id="23" name="Shape 17"/>
           <p:cNvSpPr/>
           <p:nvPr/>
         </p:nvSpPr>
         <p:spPr>
           <a:xfrm>
-            <a:off x="6255868" y="3520440"/>
+            <a:off x="6255868" y="3794760"/>
             <a:ext cx="5387188" cy="1600200"/>
           </a:xfrm>
           <a:prstGeom prst="roundRect">
@@ -6658,14 +7700,14 @@
       </p:sp>
       <p:sp>
         <p:nvSpPr>
-          <p:cNvPr id="23" name="Shape 17"/>
+          <p:cNvPr id="24" name="Shape 18"/>
           <p:cNvSpPr/>
           <p:nvPr/>
         </p:nvSpPr>
         <p:spPr>
           <a:xfrm>
-            <a:off x="6530188" y="3977640"/>
-            <a:ext cx="685800" cy="685800"/>
+            <a:off x="6484468" y="4023360"/>
+            <a:ext cx="502920" cy="502920"/>
           </a:xfrm>
           <a:prstGeom prst="ellipse">
             <a:avLst/>
@@ -6683,7 +7725,7 @@
       </p:sp>
       <p:pic>
         <p:nvPicPr>
-          <p:cNvPr id="24" name="Image 3" descr="preencoded.png">    </p:cNvPr>
+          <p:cNvPr id="25" name="Image 3" descr="preencoded.png">    </p:cNvPr>
           <p:cNvPicPr>
             <a:picLocks noChangeAspect="1"/>
           </p:cNvPicPr>
@@ -6697,8 +7739,8 @@
         </p:blipFill>
         <p:spPr>
           <a:xfrm>
-            <a:off x="6694780" y="4142232"/>
-            <a:ext cx="356616" cy="356616"/>
+            <a:off x="6605168" y="4144061"/>
+            <a:ext cx="261518" cy="261518"/>
           </a:xfrm>
           <a:prstGeom prst="rect">
             <a:avLst/>
@@ -6707,14 +7749,53 @@
       </p:pic>
       <p:sp>
         <p:nvSpPr>
-          <p:cNvPr id="25" name="Text 18"/>
-          <p:cNvSpPr txBox="1"/>
-          <p:nvPr/>
-        </p:nvSpPr>
-        <p:spPr>
-          <a:xfrm>
-            <a:off x="7444588" y="3840480"/>
-            <a:ext cx="4015588" cy="457200"/>
+          <p:cNvPr id="26" name="Text 19"/>
+          <p:cNvSpPr txBox="1"/>
+          <p:nvPr/>
+        </p:nvSpPr>
+        <p:spPr>
+          <a:xfrm>
+            <a:off x="7124548" y="3995928"/>
+            <a:ext cx="4335628" cy="548640"/>
+          </a:xfrm>
+          <a:prstGeom prst="rect">
+            <a:avLst/>
+          </a:prstGeom>
+          <a:noFill/>
+          <a:ln/>
+        </p:spPr>
+        <p:txBody>
+          <a:bodyPr wrap="square" lIns="0" tIns="0" rIns="0" bIns="0" rtlCol="0" anchor="ctr"/>
+          <a:lstStyle/>
+          <a:p>
+            <a:pPr indent="0" marL="0">
+              <a:buNone/>
+            </a:pPr>
+            <a:r>
+              <a:rPr lang="en-US" sz="1700" b="1" dirty="0">
+                <a:solidFill>
+                  <a:srgbClr val="17221A"/>
+                </a:solidFill>
+                <a:latin typeface="Arial" pitchFamily="34" charset="0"/>
+                <a:ea typeface="Arial" pitchFamily="34" charset="-122"/>
+                <a:cs typeface="Arial" pitchFamily="34" charset="-120"/>
+              </a:rPr>
+              <a:t>Værdistrømme og processer</a:t>
+            </a:r>
+            <a:endParaRPr lang="en-US" sz="1700" dirty="0"/>
+          </a:p>
+        </p:txBody>
+      </p:sp>
+      <p:sp>
+        <p:nvSpPr>
+          <p:cNvPr id="27" name="Text 20"/>
+          <p:cNvSpPr txBox="1"/>
+          <p:nvPr/>
+        </p:nvSpPr>
+        <p:spPr>
+          <a:xfrm>
+            <a:off x="6530188" y="4617720"/>
+            <a:ext cx="4884268" cy="731520"/>
           </a:xfrm>
           <a:prstGeom prst="rect">
             <a:avLst/>
@@ -6726,50 +7807,15 @@
           <a:bodyPr wrap="square" lIns="0" tIns="0" rIns="0" bIns="0" rtlCol="0" anchor="t"/>
           <a:lstStyle/>
           <a:p>
-            <a:pPr indent="0" marL="0">
-              <a:buNone/>
-            </a:pPr>
-            <a:r>
-              <a:rPr lang="en-US" sz="1900" b="1" dirty="0">
-                <a:solidFill>
-                  <a:srgbClr val="17221A"/>
-                </a:solidFill>
-                <a:latin typeface="Arial" pitchFamily="34" charset="0"/>
-                <a:ea typeface="Arial" pitchFamily="34" charset="-122"/>
-                <a:cs typeface="Arial" pitchFamily="34" charset="-120"/>
-              </a:rPr>
-              <a:t>Værdistrømme og processer</a:t>
-            </a:r>
-            <a:endParaRPr lang="en-US" sz="1900" dirty="0"/>
-          </a:p>
-        </p:txBody>
-      </p:sp>
-      <p:sp>
-        <p:nvSpPr>
-          <p:cNvPr id="26" name="Text 19"/>
-          <p:cNvSpPr txBox="1"/>
-          <p:nvPr/>
-        </p:nvSpPr>
-        <p:spPr>
-          <a:xfrm>
-            <a:off x="7444588" y="4343400"/>
-            <a:ext cx="4015588" cy="548640"/>
-          </a:xfrm>
-          <a:prstGeom prst="rect">
-            <a:avLst/>
-          </a:prstGeom>
-          <a:noFill/>
-          <a:ln/>
-        </p:spPr>
-        <p:txBody>
-          <a:bodyPr wrap="square" lIns="0" tIns="0" rIns="0" bIns="0" rtlCol="0" anchor="t"/>
-          <a:lstStyle/>
-          <a:p>
-            <a:pPr indent="0" marL="0">
-              <a:buNone/>
-            </a:pPr>
-            <a:r>
-              <a:rPr lang="en-US" sz="1600" dirty="0">
+            <a:pPr marL="342900" indent="-342900">
+              <a:spcAft>
+                <a:spcPts val="300"/>
+              </a:spcAft>
+              <a:buSzPct val="100000"/>
+              <a:buChar char="•"/>
+            </a:pPr>
+            <a:r>
+              <a:rPr lang="en-US" sz="1400" dirty="0">
                 <a:solidFill>
                   <a:srgbClr val="526066"/>
                 </a:solidFill>
@@ -6777,26 +7823,47 @@
                 <a:ea typeface="Arial" pitchFamily="34" charset="-122"/>
                 <a:cs typeface="Arial" pitchFamily="34" charset="-120"/>
               </a:rPr>
-              <a:t>Ventetid i overgangene</a:t>
-            </a:r>
-            <a:endParaRPr lang="en-US" sz="1600" dirty="0"/>
-          </a:p>
-        </p:txBody>
-      </p:sp>
-      <p:sp>
-        <p:nvSpPr>
-          <p:cNvPr id="27" name="Shape 20"/>
+              <a:t>Går på tværs af fabrikken og byen</a:t>
+            </a:r>
+            <a:endParaRPr lang="en-US" sz="1400" dirty="0"/>
+          </a:p>
+          <a:p>
+            <a:pPr marL="342900" indent="-342900">
+              <a:spcAft>
+                <a:spcPts val="300"/>
+              </a:spcAft>
+              <a:buSzPct val="100000"/>
+              <a:buChar char="•"/>
+            </a:pPr>
+            <a:r>
+              <a:rPr lang="en-US" sz="1400" dirty="0">
+                <a:solidFill>
+                  <a:srgbClr val="526066"/>
+                </a:solidFill>
+                <a:latin typeface="Arial" pitchFamily="34" charset="0"/>
+                <a:ea typeface="Arial" pitchFamily="34" charset="-122"/>
+                <a:cs typeface="Arial" pitchFamily="34" charset="-120"/>
+              </a:rPr>
+              <a:t>Sager venter i overgangene, faste processer</a:t>
+            </a:r>
+            <a:endParaRPr lang="en-US" sz="1400" dirty="0"/>
+          </a:p>
+        </p:txBody>
+      </p:sp>
+      <p:sp>
+        <p:nvSpPr>
+          <p:cNvPr id="28" name="Shape 21"/>
           <p:cNvSpPr/>
           <p:nvPr/>
         </p:nvSpPr>
         <p:spPr>
           <a:xfrm>
-            <a:off x="548640" y="5440680"/>
-            <a:ext cx="11094415" cy="685800"/>
+            <a:off x="548640" y="5669280"/>
+            <a:ext cx="11094415" cy="548640"/>
           </a:xfrm>
           <a:prstGeom prst="roundRect">
             <a:avLst>
-              <a:gd name="adj" fmla="val 16000"/>
+              <a:gd name="adj" fmla="val 20000"/>
             </a:avLst>
           </a:prstGeom>
           <a:solidFill>
@@ -6812,14 +7879,14 @@
       </p:sp>
       <p:sp>
         <p:nvSpPr>
-          <p:cNvPr id="28" name="Text 21"/>
-          <p:cNvSpPr txBox="1"/>
-          <p:nvPr/>
-        </p:nvSpPr>
-        <p:spPr>
-          <a:xfrm>
-            <a:off x="822960" y="5440680"/>
-            <a:ext cx="10545775" cy="685800"/>
+          <p:cNvPr id="29" name="Text 22"/>
+          <p:cNvSpPr txBox="1"/>
+          <p:nvPr/>
+        </p:nvSpPr>
+        <p:spPr>
+          <a:xfrm>
+            <a:off x="822960" y="5669280"/>
+            <a:ext cx="10545775" cy="548640"/>
           </a:xfrm>
           <a:prstGeom prst="rect">
             <a:avLst/>
@@ -6835,7 +7902,7 @@
               <a:buNone/>
             </a:pPr>
             <a:r>
-              <a:rPr lang="en-US" sz="1600" b="1" dirty="0">
+              <a:rPr lang="en-US" sz="1500" b="1" dirty="0">
                 <a:solidFill>
                   <a:srgbClr val="1E4A26"/>
                 </a:solidFill>
@@ -6843,13 +7910,13 @@
                 <a:ea typeface="Arial" pitchFamily="34" charset="-122"/>
                 <a:cs typeface="Arial" pitchFamily="34" charset="-120"/>
               </a:rPr>
-              <a:t>Udenfor  </a:t>
+              <a:t>Udefra (PESTLE)  </a:t>
             </a:r>
             <a:pPr indent="0" marL="0">
               <a:buNone/>
             </a:pPr>
             <a:r>
-              <a:rPr lang="en-US" sz="1600" dirty="0">
+              <a:rPr lang="en-US" sz="1500" dirty="0">
                 <a:solidFill>
                   <a:srgbClr val="1E4A26"/>
                 </a:solidFill>
@@ -6859,7 +7926,7 @@
               </a:rPr>
               <a:t>GDPR, NIS2 og krav om bæredygtighed</a:t>
             </a:r>
-            <a:endParaRPr lang="en-US" sz="1600" dirty="0"/>
+            <a:endParaRPr lang="en-US" sz="1500" dirty="0"/>
           </a:p>
         </p:txBody>
       </p:sp>

--- a/praesentation/green-it-hans.pptx
+++ b/praesentation/green-it-hans.pptx
@@ -507,7 +507,7 @@
           <a:p>
             <a:r>
               <a:rPr lang="en-US" dirty="0"/>
-              <a:t>Jeg har opgave 3, 4 og 5. Først Service Value Chain. Så incident og problem management. Og til sidst de fire dimensioner.</a:t>
+              <a:t>Jeg har opgave 3, 4 og 5. Først Service Value Chain, så incident og problem management, og til sidst de fire dimensioner.</a:t>
             </a:r>
             <a:endParaRPr lang="en-US" dirty="0"/>
           </a:p>
@@ -595,8 +595,8 @@
           <a:p>
             <a:r>
               <a:rPr lang="en-US" dirty="0"/>
-              <a:t>Så hvad er Service Value Chain? Det er de seks aktiviteter, der omdanner efterspørgsel og muligheder til værdi. Plan. Improve. Engage. Design og transition. Obtain og build. Deliver og support.
- Aktiviteterne er ikke afdelinger. Engage sker fx både i salg og på de nye kontorer. Vi foreslår, at hver aktivitet får én ansvarlig. Så ryger der ikke opgaver ned mellem byen, fabrikken og Jylland.</a:t>
+              <a:t>Så hvad er en Service Value Chain? Det er de seks aktiviteter, der omdanner efterspørgsel og muligheder til værdi. De hedder plan, improve, engage, design og transition, obtain og build, og deliver og support.
+ Det vigtige er, at aktiviteterne ikke er afdelinger. Engage sker fx både i salg og på de nye kontorer. Og fordi Green-IT er spredt ud på byen, fabrikken og snart Jylland, foreslår vi, at hver aktivitet får én ansvarlig. Så ryger der ikke opgaver ned mellem stederne.</a:t>
             </a:r>
             <a:endParaRPr lang="en-US" dirty="0"/>
           </a:p>
@@ -684,9 +684,9 @@
           <a:p>
             <a:r>
               <a:rPr lang="en-US" dirty="0"/>
-              <a:t>Eksemplet i opgaven er en svineproducent, der vil have staldovervågning. Sælgeren finder ud af, hvad landmanden skal bruge. Det er engage. R&amp;D tilpasser løsningen. Det er design og transition. Fabrikken laver sensorerne. Det er obtain og build. Løsningen testes og overdrages til drift. Det er design og transition igen. Værkstedet installerer. Det er deliver og support. Efter en måned følger sælgeren op. Det er engage igen. Det, vi lærer, gør det hurtigere næste gang. Det er improve.
- Pointen er, at det ikke er et samlebånd. Man bruger aktiviteterne efter behov. Engage og design bruges to gange. Plan bruges slet ikke. En sensorfejl kan gå direkte fra engage til deliver og support.
- Og hver aktivitet bidrager. Engage er der, hvor vi skaber værdien sammen med landmanden. Design og transition tester, før noget kommer i drift. Det beskytter den stabile drift. Deliver og support er der, hvor kunden mærker værdien hver dag. Og improve gør fejl til forbedringer.</a:t>
+              <a:t>For at gøre det konkret har vi i opgaven et eksempel med en svineproducent, der vil have staldovervågning. Først finder sælgeren ud af, hvad landmanden skal bruge. Det er engage. Så tilpasser R&amp;D løsningen, og det er design og transition. Fabrikken laver sensorerne, det er obtain og build. Derefter bliver løsningen testet og overdraget til drift, og det er design og transition igen. Værkstedet installerer, det er deliver og support. Efter en måned følger sælgeren op, så er vi i engage igen. Og det, vi lærer, gør det hurtigere næste gang. Det er improve.
+ Pointen med eksemplet er, at det ikke er et samlebånd. Engage og design bruges to gange, og plan bruges slet ikke, fordi man bruger aktiviteterne efter behov. En sensorfejl kan fx gå direkte fra engage til deliver og support.
+ Og hver aktivitet bidrager til værdien. I engage skaber vi værdien sammen med landmanden. Design og transition tester, før noget kommer i drift, og det beskytter den stabile drift. I deliver og support mærker kunden værdien hver dag. Og improve sørger for, at fejl bliver til forbedringer.</a:t>
             </a:r>
             <a:endParaRPr lang="en-US" dirty="0"/>
           </a:p>
@@ -774,9 +774,9 @@
           <a:p>
             <a:r>
               <a:rPr lang="en-US" dirty="0"/>
-              <a:t>Så kommer vi til opgave 4. Incident management. En incident er en uplanlagt afbrydelse eller forringelse af en service. Altså når noget går ned eller virker dårligere. Formålet er at få det op at køre igen. Hurtigst muligt. Incident management finder ikke årsagen. Det gør problem management.
- Processen har fem trin. Registrer. Prioriter. Diagnosticer. Eskaler. Og løs og luk. Prioriteten sættes ud fra, hvor slemt det er, og hvor meget det haster. Den bestemmer, hvor hurtigt det skal løses. Det står i SLA'en. Eskalering betyder, at sagen går videre. L1 er servicedesken. L2 er specialisterne. L3 er udviklerne i R&amp;D. Landmanden ringer kun ét sted hen. Til servicedesken. Og med et fælles ticketsystem kan alle tre steder se de samme sager.
- Eksemplet er en kvægstald en sommernat. Sensorerne holder op med at sende data. Det er prioritet 1. L2 finder fejlen i gatewayen. Altså boksen, der sender data videre. En tekniker kører ud med en ny. Imens tjekker landmanden selv dyrene. Det er workarounden. En midlertidig løsning. Hvis det rammer mange stalde, er det en major incident. Så får den sin egen leder.</a:t>
+              <a:t>Det leder os over til opgave 4, for hvad gør man, når noget alligevel går galt? Det er incident management. En incident er en uplanlagt afbrydelse eller forringelse af en service, altså når noget går ned eller virker dårligere. Formålet er at få det op at køre igen hurtigst muligt. Incident management finder ikke årsagen. Det gør problem management, som jeg kommer til bagefter.
+ Processen har fem trin: registrer, prioriter, diagnosticer, eskaler, og løs og luk. Prioriteten sættes ud fra, hvor slemt det er, og hvor meget det haster, og den bestemmer, hvor hurtigt det skal løses ifølge SLA'en. Hvis servicedesken ikke selv kan løse det, eskalerer de. L1 er servicedesken, L2 er specialisterne, og L3 er udviklerne i R&amp;D. For Green-IT er det vigtigt, at landmanden kun ringer ét sted hen, nemlig servicedesken, og at et fælles ticketsystem gør, at alle tre steder ser de samme sager.
+ Vores eksempel er en kvægstald en sommernat, hvor sensorerne holder op med at sende data. Det er prioritet 1, fordi dyrene kan tage skade. L2 finder fejlen i gatewayen, altså boksen, der sender data videre, og en tekniker kører ud med en ny. Imens tjekker landmanden selv dyrene. Det er workarounden, en midlertidig løsning. Og hvis det rammer mange stalde på én gang, er det en major incident, som får sin egen leder.</a:t>
             </a:r>
             <a:endParaRPr lang="en-US" dirty="0"/>
           </a:p>
@@ -864,10 +864,10 @@
           <a:p>
             <a:r>
               <a:rPr lang="en-US" dirty="0"/>
-              <a:t>Så har vi problem management. Et problem er årsagen, eller den mulige årsag, til en eller flere incidents. Problem management finder årsagen. Så det ikke sker igen.
- Der er tre faser. Først problem identification. Vi finder problemer i incidents, der kommer igen. Efter en major incident. Eller før, fx fra R&amp;D's tests. Så problem control. Vi finder root cause, altså grundårsagen. Og vi laver en workaround. Når vi kender årsagen, men ikke har løst den, hedder det en known error. Til sidst error control. Den rigtige løsning skal igennem change control, før den kommer ud.
- Eksemplet er en firmwareopdatering. Bagefter mister sensorerne på dyr på friland forbindelsen om natten. Det sker hos 15 kunder. Servicedesken genstarter gatewayen. Men de ser mønstret og opretter et problem. R&amp;D finder årsagen. Firmwaren går i strømsparetilstand og vågner ikke ved svagt signal. Workarounden er at slå strømspar fra. Fejlen bliver en known error, så alle bruger samme workaround. Og den rettede firmware kommer ud via change control.
- Så hvordan hænger de sammen? Incident management får servicen op igen. Problem management fjerner årsagen. En incident kan lukkes, selvom problemet stadig er åbent. Og når servicedesken kender en known error, løser de den næste incident hurtigere.</a:t>
+              <a:t>Men hvis den samme fejl bliver ved med at komme, er det ikke nok bare at genstarte. Så skal vi bruge problem management. Et problem er årsagen, eller den mulige årsag, til en eller flere incidents, og problem management finder den, så det ikke sker igen.
+ Det sker i tre faser. Først problem identification, hvor vi finder problemet. Det kan være i incidents, der kommer igen, efter en major incident, eller før, fx fra R&amp;D's tests. Så problem control, hvor vi finder root cause, altså grundårsagen, og laver en workaround. Når vi kender årsagen, men ikke har løst den, hedder det en known error. Og til sidst error control, hvor den rigtige løsning skal igennem change control, før den kommer ud.
+ Eksemplet i opgaven er en firmwareopdatering. Bagefter mister sensorerne på dyr på friland forbindelsen om natten, og det sker hos 15 kunder. Servicedesken genstarter gatewayen hver gang, men de ser mønstret og opretter et problem. R&amp;D finder så årsagen: firmwaren går i strømsparetilstand og vågner ikke ved svagt signal. Workarounden er at slå strømspar fra, og fejlen bliver registreret som en known error, så alle bruger den samme workaround. Den rettede firmware kommer så ud via change control.
+ Så hvordan hænger de to sammen? Incident management får servicen op igen, og problem management fjerner årsagen. En incident kan godt lukkes, selvom problemet stadig er åbent. Og når servicedesken kender en known error, kan de løse den næste incident hurtigere.</a:t>
             </a:r>
             <a:endParaRPr lang="en-US" dirty="0"/>
           </a:p>
@@ -955,12 +955,12 @@
           <a:p>
             <a:r>
               <a:rPr lang="en-US" dirty="0"/>
-              <a:t>Så kommer vi til de fire dimensioner. En service skal ses fra fire sider. Hvis man glemmer én, går det galt. Og så er der ting udefra, som påvirker dem alle. Det hedder PESTLE. Fx GDPR, NIS2 og krav om bæredygtighed.
- Først organisationer og mennesker. R&amp;D sidder i byen. Salg sidder på fabrikken. Så kan der nemt komme en os og dem-kultur. Green-IT skal have klare roller. Og man skal turde sige det, når noget går galt. Gerne tidligt.
- Så information og teknologi. Sensordata er kernen. Landmanden ejer sine data, og persondata er omfattet af GDPR. Og teknologien skal kunne vokse med de nye kontorer.
- Så partnere og leverandører. Det er fx hosting, sensorleverandører og teleselskaber. Når de er nede, er Green-IT også nede. Så de vigtige dele skal have failover. Altså en backup, der tager over.
- Og til sidst værdistrømme og processer. Værdistrømmen går på tværs af fabrikken og byen. Sagerne ligger og venter, når de skal fra det ene sted til det andet. Faste processer gør, at alle steder arbejder på samme måde.
-Og det var så min del. Og så vil jeg give ordet videre til Patrick.</a:t>
+              <a:t>Til sidst opgave 5, de fire dimensioner. De handler om, at det ikke er nok at have gode processer, for en service skal ses fra fire sider. Glemmer man én, går det galt. Og udenom ligger der ting udefra, som påvirker dem alle. Det hedder PESTLE, og for Green-IT er det fx GDPR, NIS2 og krav om bæredygtighed.
+ Den første er organisationer og mennesker. Her er Green-ITs udfordring, at R&amp;D sidder i byen og salg sidder på fabrikken. Så kan der nemt opstå en os og dem-kultur, hvor man ikke taler sammen. Derfor skal Green-IT have klare roller og en kultur, hvor man tør sige det tidligt, når noget går galt.
+ Den anden er information og teknologi. Sensordata er kernen i Green-ITs services, så det skal være klart, at landmanden ejer sine data, og at persondata er omfattet af GDPR. Og teknologien skal kunne vokse med, når de nye kontorer kommer.
+ Den tredje er partnere og leverandører, fx hosting, sensorleverandører og teleselskaber. Green-IT er afhængig af dem, for når de er nede, er Green-IT også nede. Derfor skal de vigtigste dele have failover, altså en backup, der tager over.
+ Den fjerde er værdistrømme og processer. Den hænger sammen med value chain fra opgave 3. Værdistrømmen går på tværs af fabrikken og byen, og det er, når sagerne skal fra det ene sted til det andet, at de ligger og venter. Faste processer sørger for, at alle steder arbejder på samme måde.
+Og det var så min del. Så vil jeg give ordet videre til Patrick.</a:t>
             </a:r>
             <a:endParaRPr lang="en-US" dirty="0"/>
           </a:p>

--- a/praesentation/green-it-hans.pptx
+++ b/praesentation/green-it-hans.pptx
@@ -6,12 +6,12 @@
   </p:sldMasterIdLst>
   <p:sldIdLst>
     <p:sldId id="256" r:id="rId2"/>
+    <p:sldId id="262" r:id="rId13"/>
     <p:sldId id="257" r:id="rId3"/>
     <p:sldId id="258" r:id="rId4"/>
     <p:sldId id="259" r:id="rId5"/>
     <p:sldId id="260" r:id="rId6"/>
     <p:sldId id="261" r:id="rId7"/>
-    <p:sldId id="262" r:id="rId13"/>
     <p:sldId id="263" r:id="rId14"/>
     <p:sldId id="264" r:id="rId15"/>
     <p:sldId id="265" r:id="rId16"/>
